--- a/Architecture-Copilot-OnePager.pptx
+++ b/Architecture-Copilot-OnePager.pptx
@@ -6,6 +6,7 @@
   </p:sldMasterIdLst>
   <p:sldIdLst>
     <p:sldId id="256" r:id="rId7"/>
+    <p:sldId id="257" r:id="rId8"/>
   </p:sldIdLst>
   <p:sldSz cx="12191695" cy="6858000" type="screen4x3"/>
   <p:notesSz cx="6858000" cy="9144000"/>
@@ -10606,6 +10607,6362 @@
                 <a:latin typeface="Menlo"/>
               </a:rPr>
               <a:t>Python · MCP · Pydantic · mxGraph XML · Copilot · Claude · Vertex AI Agent Engine</a:t>
+            </a:r>
+          </a:p>
+        </p:txBody>
+      </p:sp>
+    </p:spTree>
+  </p:cSld>
+  <p:clrMapOvr>
+    <a:masterClrMapping/>
+  </p:clrMapOvr>
+</p:sld>
+</file>
+
+<file path=ppt/slides/slide2.xml><?xml version="1.0" encoding="utf-8"?>
+<p:sld xmlns:a="http://schemas.openxmlformats.org/drawingml/2006/main" xmlns:p="http://schemas.openxmlformats.org/presentationml/2006/main" xmlns:r="http://schemas.openxmlformats.org/officeDocument/2006/relationships">
+  <p:cSld>
+    <p:bg>
+      <p:bgPr>
+        <a:solidFill>
+          <a:srgbClr val="FFFFFF"/>
+        </a:solidFill>
+        <a:effectLst/>
+      </p:bgPr>
+    </p:bg>
+    <p:spTree>
+      <p:nvGrpSpPr>
+        <p:cNvPr id="1" name=""/>
+        <p:cNvGrpSpPr/>
+        <p:nvPr/>
+      </p:nvGrpSpPr>
+      <p:grpSpPr/>
+      <p:sp>
+        <p:nvSpPr>
+          <p:cNvPr id="2" name="Rectangle 1"/>
+          <p:cNvSpPr/>
+          <p:nvPr/>
+        </p:nvSpPr>
+        <p:spPr>
+          <a:xfrm>
+            <a:off x="219456" y="219456"/>
+            <a:ext cx="155448" cy="14630"/>
+          </a:xfrm>
+          <a:prstGeom prst="rect">
+            <a:avLst/>
+          </a:prstGeom>
+          <a:solidFill>
+            <a:srgbClr val="B7C4D5"/>
+          </a:solidFill>
+          <a:ln>
+            <a:noFill/>
+          </a:ln>
+          <a:effectLst/>
+        </p:spPr>
+        <p:style>
+          <a:lnRef idx="1">
+            <a:schemeClr val="accent1"/>
+          </a:lnRef>
+          <a:fillRef idx="3">
+            <a:schemeClr val="accent1"/>
+          </a:fillRef>
+          <a:effectRef idx="2">
+            <a:schemeClr val="accent1"/>
+          </a:effectRef>
+          <a:fontRef idx="minor">
+            <a:schemeClr val="lt1"/>
+          </a:fontRef>
+        </p:style>
+        <p:txBody>
+          <a:bodyPr rtlCol="0" anchor="ctr"/>
+          <a:lstStyle/>
+          <a:p>
+            <a:pPr algn="ctr"/>
+          </a:p>
+        </p:txBody>
+      </p:sp>
+      <p:sp>
+        <p:nvSpPr>
+          <p:cNvPr id="3" name="Rectangle 2"/>
+          <p:cNvSpPr/>
+          <p:nvPr/>
+        </p:nvSpPr>
+        <p:spPr>
+          <a:xfrm>
+            <a:off x="219456" y="219456"/>
+            <a:ext cx="14630" cy="155448"/>
+          </a:xfrm>
+          <a:prstGeom prst="rect">
+            <a:avLst/>
+          </a:prstGeom>
+          <a:solidFill>
+            <a:srgbClr val="B7C4D5"/>
+          </a:solidFill>
+          <a:ln>
+            <a:noFill/>
+          </a:ln>
+          <a:effectLst/>
+        </p:spPr>
+        <p:style>
+          <a:lnRef idx="1">
+            <a:schemeClr val="accent1"/>
+          </a:lnRef>
+          <a:fillRef idx="3">
+            <a:schemeClr val="accent1"/>
+          </a:fillRef>
+          <a:effectRef idx="2">
+            <a:schemeClr val="accent1"/>
+          </a:effectRef>
+          <a:fontRef idx="minor">
+            <a:schemeClr val="lt1"/>
+          </a:fontRef>
+        </p:style>
+        <p:txBody>
+          <a:bodyPr rtlCol="0" anchor="ctr"/>
+          <a:lstStyle/>
+          <a:p>
+            <a:pPr algn="ctr"/>
+          </a:p>
+        </p:txBody>
+      </p:sp>
+      <p:sp>
+        <p:nvSpPr>
+          <p:cNvPr id="4" name="Rectangle 3"/>
+          <p:cNvSpPr/>
+          <p:nvPr/>
+        </p:nvSpPr>
+        <p:spPr>
+          <a:xfrm>
+            <a:off x="11802160" y="219456"/>
+            <a:ext cx="155448" cy="14630"/>
+          </a:xfrm>
+          <a:prstGeom prst="rect">
+            <a:avLst/>
+          </a:prstGeom>
+          <a:solidFill>
+            <a:srgbClr val="B7C4D5"/>
+          </a:solidFill>
+          <a:ln>
+            <a:noFill/>
+          </a:ln>
+          <a:effectLst/>
+        </p:spPr>
+        <p:style>
+          <a:lnRef idx="1">
+            <a:schemeClr val="accent1"/>
+          </a:lnRef>
+          <a:fillRef idx="3">
+            <a:schemeClr val="accent1"/>
+          </a:fillRef>
+          <a:effectRef idx="2">
+            <a:schemeClr val="accent1"/>
+          </a:effectRef>
+          <a:fontRef idx="minor">
+            <a:schemeClr val="lt1"/>
+          </a:fontRef>
+        </p:style>
+        <p:txBody>
+          <a:bodyPr rtlCol="0" anchor="ctr"/>
+          <a:lstStyle/>
+          <a:p>
+            <a:pPr algn="ctr"/>
+          </a:p>
+        </p:txBody>
+      </p:sp>
+      <p:sp>
+        <p:nvSpPr>
+          <p:cNvPr id="5" name="Rectangle 4"/>
+          <p:cNvSpPr/>
+          <p:nvPr/>
+        </p:nvSpPr>
+        <p:spPr>
+          <a:xfrm>
+            <a:off x="11957608" y="219456"/>
+            <a:ext cx="14630" cy="155448"/>
+          </a:xfrm>
+          <a:prstGeom prst="rect">
+            <a:avLst/>
+          </a:prstGeom>
+          <a:solidFill>
+            <a:srgbClr val="B7C4D5"/>
+          </a:solidFill>
+          <a:ln>
+            <a:noFill/>
+          </a:ln>
+          <a:effectLst/>
+        </p:spPr>
+        <p:style>
+          <a:lnRef idx="1">
+            <a:schemeClr val="accent1"/>
+          </a:lnRef>
+          <a:fillRef idx="3">
+            <a:schemeClr val="accent1"/>
+          </a:fillRef>
+          <a:effectRef idx="2">
+            <a:schemeClr val="accent1"/>
+          </a:effectRef>
+          <a:fontRef idx="minor">
+            <a:schemeClr val="lt1"/>
+          </a:fontRef>
+        </p:style>
+        <p:txBody>
+          <a:bodyPr rtlCol="0" anchor="ctr"/>
+          <a:lstStyle/>
+          <a:p>
+            <a:pPr algn="ctr"/>
+          </a:p>
+        </p:txBody>
+      </p:sp>
+      <p:sp>
+        <p:nvSpPr>
+          <p:cNvPr id="6" name="Rectangle 5"/>
+          <p:cNvSpPr/>
+          <p:nvPr/>
+        </p:nvSpPr>
+        <p:spPr>
+          <a:xfrm>
+            <a:off x="219456" y="6623913"/>
+            <a:ext cx="155448" cy="14630"/>
+          </a:xfrm>
+          <a:prstGeom prst="rect">
+            <a:avLst/>
+          </a:prstGeom>
+          <a:solidFill>
+            <a:srgbClr val="B7C4D5"/>
+          </a:solidFill>
+          <a:ln>
+            <a:noFill/>
+          </a:ln>
+          <a:effectLst/>
+        </p:spPr>
+        <p:style>
+          <a:lnRef idx="1">
+            <a:schemeClr val="accent1"/>
+          </a:lnRef>
+          <a:fillRef idx="3">
+            <a:schemeClr val="accent1"/>
+          </a:fillRef>
+          <a:effectRef idx="2">
+            <a:schemeClr val="accent1"/>
+          </a:effectRef>
+          <a:fontRef idx="minor">
+            <a:schemeClr val="lt1"/>
+          </a:fontRef>
+        </p:style>
+        <p:txBody>
+          <a:bodyPr rtlCol="0" anchor="ctr"/>
+          <a:lstStyle/>
+          <a:p>
+            <a:pPr algn="ctr"/>
+          </a:p>
+        </p:txBody>
+      </p:sp>
+      <p:sp>
+        <p:nvSpPr>
+          <p:cNvPr id="7" name="Rectangle 6"/>
+          <p:cNvSpPr/>
+          <p:nvPr/>
+        </p:nvSpPr>
+        <p:spPr>
+          <a:xfrm>
+            <a:off x="219456" y="6468465"/>
+            <a:ext cx="14630" cy="155448"/>
+          </a:xfrm>
+          <a:prstGeom prst="rect">
+            <a:avLst/>
+          </a:prstGeom>
+          <a:solidFill>
+            <a:srgbClr val="B7C4D5"/>
+          </a:solidFill>
+          <a:ln>
+            <a:noFill/>
+          </a:ln>
+          <a:effectLst/>
+        </p:spPr>
+        <p:style>
+          <a:lnRef idx="1">
+            <a:schemeClr val="accent1"/>
+          </a:lnRef>
+          <a:fillRef idx="3">
+            <a:schemeClr val="accent1"/>
+          </a:fillRef>
+          <a:effectRef idx="2">
+            <a:schemeClr val="accent1"/>
+          </a:effectRef>
+          <a:fontRef idx="minor">
+            <a:schemeClr val="lt1"/>
+          </a:fontRef>
+        </p:style>
+        <p:txBody>
+          <a:bodyPr rtlCol="0" anchor="ctr"/>
+          <a:lstStyle/>
+          <a:p>
+            <a:pPr algn="ctr"/>
+          </a:p>
+        </p:txBody>
+      </p:sp>
+      <p:sp>
+        <p:nvSpPr>
+          <p:cNvPr id="8" name="Rectangle 7"/>
+          <p:cNvSpPr/>
+          <p:nvPr/>
+        </p:nvSpPr>
+        <p:spPr>
+          <a:xfrm>
+            <a:off x="11802160" y="6623913"/>
+            <a:ext cx="155448" cy="14630"/>
+          </a:xfrm>
+          <a:prstGeom prst="rect">
+            <a:avLst/>
+          </a:prstGeom>
+          <a:solidFill>
+            <a:srgbClr val="B7C4D5"/>
+          </a:solidFill>
+          <a:ln>
+            <a:noFill/>
+          </a:ln>
+          <a:effectLst/>
+        </p:spPr>
+        <p:style>
+          <a:lnRef idx="1">
+            <a:schemeClr val="accent1"/>
+          </a:lnRef>
+          <a:fillRef idx="3">
+            <a:schemeClr val="accent1"/>
+          </a:fillRef>
+          <a:effectRef idx="2">
+            <a:schemeClr val="accent1"/>
+          </a:effectRef>
+          <a:fontRef idx="minor">
+            <a:schemeClr val="lt1"/>
+          </a:fontRef>
+        </p:style>
+        <p:txBody>
+          <a:bodyPr rtlCol="0" anchor="ctr"/>
+          <a:lstStyle/>
+          <a:p>
+            <a:pPr algn="ctr"/>
+          </a:p>
+        </p:txBody>
+      </p:sp>
+      <p:sp>
+        <p:nvSpPr>
+          <p:cNvPr id="9" name="Rectangle 8"/>
+          <p:cNvSpPr/>
+          <p:nvPr/>
+        </p:nvSpPr>
+        <p:spPr>
+          <a:xfrm>
+            <a:off x="11957608" y="6468465"/>
+            <a:ext cx="14630" cy="155448"/>
+          </a:xfrm>
+          <a:prstGeom prst="rect">
+            <a:avLst/>
+          </a:prstGeom>
+          <a:solidFill>
+            <a:srgbClr val="B7C4D5"/>
+          </a:solidFill>
+          <a:ln>
+            <a:noFill/>
+          </a:ln>
+          <a:effectLst/>
+        </p:spPr>
+        <p:style>
+          <a:lnRef idx="1">
+            <a:schemeClr val="accent1"/>
+          </a:lnRef>
+          <a:fillRef idx="3">
+            <a:schemeClr val="accent1"/>
+          </a:fillRef>
+          <a:effectRef idx="2">
+            <a:schemeClr val="accent1"/>
+          </a:effectRef>
+          <a:fontRef idx="minor">
+            <a:schemeClr val="lt1"/>
+          </a:fontRef>
+        </p:style>
+        <p:txBody>
+          <a:bodyPr rtlCol="0" anchor="ctr"/>
+          <a:lstStyle/>
+          <a:p>
+            <a:pPr algn="ctr"/>
+          </a:p>
+        </p:txBody>
+      </p:sp>
+      <p:sp>
+        <p:nvSpPr>
+          <p:cNvPr id="10" name="Rounded Rectangle 9"/>
+          <p:cNvSpPr/>
+          <p:nvPr/>
+        </p:nvSpPr>
+        <p:spPr>
+          <a:xfrm>
+            <a:off x="457200" y="292608"/>
+            <a:ext cx="228600" cy="228600"/>
+          </a:xfrm>
+          <a:prstGeom prst="roundRect">
+            <a:avLst>
+              <a:gd name="adj" fmla="val 30000"/>
+            </a:avLst>
+          </a:prstGeom>
+          <a:solidFill>
+            <a:srgbClr val="1657B0"/>
+          </a:solidFill>
+          <a:ln>
+            <a:noFill/>
+          </a:ln>
+          <a:effectLst>
+            <a:outerShdw blurRad="82296" dist="25603" dir="5400000" rotWithShape="0">
+              <a:srgbClr val="1B2A40">
+                <a:alpha val="11000"/>
+              </a:srgbClr>
+            </a:outerShdw>
+          </a:effectLst>
+        </p:spPr>
+        <p:style>
+          <a:lnRef idx="1">
+            <a:schemeClr val="accent1"/>
+          </a:lnRef>
+          <a:fillRef idx="3">
+            <a:schemeClr val="accent1"/>
+          </a:fillRef>
+          <a:effectRef idx="2">
+            <a:schemeClr val="accent1"/>
+          </a:effectRef>
+          <a:fontRef idx="minor">
+            <a:schemeClr val="lt1"/>
+          </a:fontRef>
+        </p:style>
+        <p:txBody>
+          <a:bodyPr rtlCol="0" anchor="ctr"/>
+          <a:lstStyle/>
+          <a:p>
+            <a:pPr algn="ctr"/>
+          </a:p>
+        </p:txBody>
+      </p:sp>
+      <p:sp>
+        <p:nvSpPr>
+          <p:cNvPr id="11" name="Rounded Rectangle 10"/>
+          <p:cNvSpPr/>
+          <p:nvPr/>
+        </p:nvSpPr>
+        <p:spPr>
+          <a:xfrm>
+            <a:off x="523036" y="358444"/>
+            <a:ext cx="96926" cy="96926"/>
+          </a:xfrm>
+          <a:prstGeom prst="roundRect">
+            <a:avLst>
+              <a:gd name="adj" fmla="val 30000"/>
+            </a:avLst>
+          </a:prstGeom>
+          <a:solidFill>
+            <a:srgbClr val="FFFFFF"/>
+          </a:solidFill>
+          <a:ln>
+            <a:noFill/>
+          </a:ln>
+          <a:effectLst/>
+        </p:spPr>
+        <p:style>
+          <a:lnRef idx="1">
+            <a:schemeClr val="accent1"/>
+          </a:lnRef>
+          <a:fillRef idx="3">
+            <a:schemeClr val="accent1"/>
+          </a:fillRef>
+          <a:effectRef idx="2">
+            <a:schemeClr val="accent1"/>
+          </a:effectRef>
+          <a:fontRef idx="minor">
+            <a:schemeClr val="lt1"/>
+          </a:fontRef>
+        </p:style>
+        <p:txBody>
+          <a:bodyPr rtlCol="0" anchor="ctr"/>
+          <a:lstStyle/>
+          <a:p>
+            <a:pPr algn="ctr"/>
+          </a:p>
+        </p:txBody>
+      </p:sp>
+      <p:sp>
+        <p:nvSpPr>
+          <p:cNvPr id="12" name="TextBox 11"/>
+          <p:cNvSpPr txBox="1"/>
+          <p:nvPr/>
+        </p:nvSpPr>
+        <p:spPr>
+          <a:xfrm>
+            <a:off x="822960" y="292608"/>
+            <a:ext cx="8229600" cy="237744"/>
+          </a:xfrm>
+          <a:prstGeom prst="rect">
+            <a:avLst/>
+          </a:prstGeom>
+          <a:noFill/>
+        </p:spPr>
+        <p:txBody>
+          <a:bodyPr wrap="square" lIns="0" rIns="0" tIns="0" bIns="0" anchor="ctr">
+            <a:spAutoFit/>
+          </a:bodyPr>
+          <a:lstStyle/>
+          <a:p>
+            <a:pPr algn="l">
+              <a:lnSpc>
+                <a:spcPct val="100000"/>
+              </a:lnSpc>
+            </a:pPr>
+            <a:r>
+              <a:rPr sz="900" b="1" spc="240">
+                <a:solidFill>
+                  <a:srgbClr val="1657B0"/>
+                </a:solidFill>
+                <a:latin typeface="Menlo"/>
+              </a:rPr>
+              <a:t>ARCHITECTURE COPILOT</a:t>
+            </a:r>
+            <a:r>
+              <a:rPr sz="900" b="0" spc="240">
+                <a:solidFill>
+                  <a:srgbClr val="93A0B2"/>
+                </a:solidFill>
+                <a:latin typeface="Menlo"/>
+              </a:rPr>
+              <a:t>   ·   FLOW DEEP-DIVE</a:t>
+            </a:r>
+          </a:p>
+        </p:txBody>
+      </p:sp>
+      <p:sp>
+        <p:nvSpPr>
+          <p:cNvPr id="13" name="Rounded Rectangle 12"/>
+          <p:cNvSpPr/>
+          <p:nvPr/>
+        </p:nvSpPr>
+        <p:spPr>
+          <a:xfrm>
+            <a:off x="8945575" y="274320"/>
+            <a:ext cx="2788920" cy="292608"/>
+          </a:xfrm>
+          <a:prstGeom prst="roundRect">
+            <a:avLst>
+              <a:gd name="adj" fmla="val 50000"/>
+            </a:avLst>
+          </a:prstGeom>
+          <a:noFill/>
+          <a:ln w="9525">
+            <a:solidFill>
+              <a:srgbClr val="D2DBE7"/>
+            </a:solidFill>
+          </a:ln>
+          <a:effectLst/>
+        </p:spPr>
+        <p:style>
+          <a:lnRef idx="1">
+            <a:schemeClr val="accent1"/>
+          </a:lnRef>
+          <a:fillRef idx="3">
+            <a:schemeClr val="accent1"/>
+          </a:fillRef>
+          <a:effectRef idx="2">
+            <a:schemeClr val="accent1"/>
+          </a:effectRef>
+          <a:fontRef idx="minor">
+            <a:schemeClr val="lt1"/>
+          </a:fontRef>
+        </p:style>
+        <p:txBody>
+          <a:bodyPr rtlCol="0" anchor="ctr"/>
+          <a:lstStyle/>
+          <a:p>
+            <a:pPr algn="ctr"/>
+          </a:p>
+        </p:txBody>
+      </p:sp>
+      <p:sp>
+        <p:nvSpPr>
+          <p:cNvPr id="14" name="TextBox 13"/>
+          <p:cNvSpPr txBox="1"/>
+          <p:nvPr/>
+        </p:nvSpPr>
+        <p:spPr>
+          <a:xfrm>
+            <a:off x="9082735" y="274320"/>
+            <a:ext cx="2514600" cy="292608"/>
+          </a:xfrm>
+          <a:prstGeom prst="rect">
+            <a:avLst/>
+          </a:prstGeom>
+          <a:noFill/>
+        </p:spPr>
+        <p:txBody>
+          <a:bodyPr wrap="square" lIns="0" rIns="0" tIns="0" bIns="0" anchor="ctr">
+            <a:spAutoFit/>
+          </a:bodyPr>
+          <a:lstStyle/>
+          <a:p>
+            <a:pPr algn="l">
+              <a:lnSpc>
+                <a:spcPct val="100000"/>
+              </a:lnSpc>
+            </a:pPr>
+            <a:r>
+              <a:rPr sz="850" b="0">
+                <a:solidFill>
+                  <a:srgbClr val="51617A"/>
+                </a:solidFill>
+                <a:latin typeface="Menlo"/>
+              </a:rPr>
+              <a:t>9 stages · 8 handoffs · 2 gates</a:t>
+            </a:r>
+          </a:p>
+        </p:txBody>
+      </p:sp>
+      <p:sp>
+        <p:nvSpPr>
+          <p:cNvPr id="15" name="TextBox 14"/>
+          <p:cNvSpPr txBox="1"/>
+          <p:nvPr/>
+        </p:nvSpPr>
+        <p:spPr>
+          <a:xfrm>
+            <a:off x="457200" y="585216"/>
+            <a:ext cx="11338560" cy="502920"/>
+          </a:xfrm>
+          <a:prstGeom prst="rect">
+            <a:avLst/>
+          </a:prstGeom>
+          <a:noFill/>
+        </p:spPr>
+        <p:txBody>
+          <a:bodyPr wrap="square" lIns="0" rIns="0" tIns="0" bIns="0" anchor="t">
+            <a:spAutoFit/>
+          </a:bodyPr>
+          <a:lstStyle/>
+          <a:p>
+            <a:pPr algn="l">
+              <a:lnSpc>
+                <a:spcPct val="100000"/>
+              </a:lnSpc>
+            </a:pPr>
+            <a:r>
+              <a:rPr sz="2200" b="0" spc="-20">
+                <a:solidFill>
+                  <a:srgbClr val="16202E"/>
+                </a:solidFill>
+                <a:latin typeface="Helvetica Neue"/>
+              </a:rPr>
+              <a:t>How the flow runs — </a:t>
+            </a:r>
+            <a:r>
+              <a:rPr sz="2200" b="1" spc="-20">
+                <a:solidFill>
+                  <a:srgbClr val="1657B0"/>
+                </a:solidFill>
+                <a:latin typeface="Helvetica Neue"/>
+              </a:rPr>
+              <a:t>stage-by-stage handoffs</a:t>
+            </a:r>
+          </a:p>
+        </p:txBody>
+      </p:sp>
+      <p:sp>
+        <p:nvSpPr>
+          <p:cNvPr id="16" name="Rounded Rectangle 15"/>
+          <p:cNvSpPr/>
+          <p:nvPr/>
+        </p:nvSpPr>
+        <p:spPr>
+          <a:xfrm>
+            <a:off x="457200" y="1152144"/>
+            <a:ext cx="1371600" cy="41148"/>
+          </a:xfrm>
+          <a:prstGeom prst="roundRect">
+            <a:avLst>
+              <a:gd name="adj" fmla="val 50000"/>
+            </a:avLst>
+          </a:prstGeom>
+          <a:solidFill>
+            <a:srgbClr val="1657B0"/>
+          </a:solidFill>
+          <a:ln>
+            <a:noFill/>
+          </a:ln>
+          <a:effectLst/>
+        </p:spPr>
+        <p:style>
+          <a:lnRef idx="1">
+            <a:schemeClr val="accent1"/>
+          </a:lnRef>
+          <a:fillRef idx="3">
+            <a:schemeClr val="accent1"/>
+          </a:fillRef>
+          <a:effectRef idx="2">
+            <a:schemeClr val="accent1"/>
+          </a:effectRef>
+          <a:fontRef idx="minor">
+            <a:schemeClr val="lt1"/>
+          </a:fontRef>
+        </p:style>
+        <p:txBody>
+          <a:bodyPr rtlCol="0" anchor="ctr"/>
+          <a:lstStyle/>
+          <a:p>
+            <a:pPr algn="ctr"/>
+          </a:p>
+        </p:txBody>
+      </p:sp>
+      <p:sp>
+        <p:nvSpPr>
+          <p:cNvPr id="17" name="TextBox 16"/>
+          <p:cNvSpPr txBox="1"/>
+          <p:nvPr/>
+        </p:nvSpPr>
+        <p:spPr>
+          <a:xfrm>
+            <a:off x="457200" y="1280160"/>
+            <a:ext cx="11338560" cy="274320"/>
+          </a:xfrm>
+          <a:prstGeom prst="rect">
+            <a:avLst/>
+          </a:prstGeom>
+          <a:noFill/>
+        </p:spPr>
+        <p:txBody>
+          <a:bodyPr wrap="square" lIns="0" rIns="0" tIns="0" bIns="0" anchor="t">
+            <a:spAutoFit/>
+          </a:bodyPr>
+          <a:lstStyle/>
+          <a:p>
+            <a:pPr algn="l">
+              <a:lnSpc>
+                <a:spcPct val="100000"/>
+              </a:lnSpc>
+            </a:pPr>
+            <a:r>
+              <a:rPr sz="1050" b="0">
+                <a:solidFill>
+                  <a:srgbClr val="51617A"/>
+                </a:solidFill>
+                <a:latin typeface="Helvetica Neue"/>
+              </a:rPr>
+              <a:t>Each stage consumes one artifact and produces the next. Two hard gates can pause the run (Guardrail) or send it back to fix (Verify).</a:t>
+            </a:r>
+          </a:p>
+        </p:txBody>
+      </p:sp>
+      <p:sp>
+        <p:nvSpPr>
+          <p:cNvPr id="18" name="Rectangle 17"/>
+          <p:cNvSpPr/>
+          <p:nvPr/>
+        </p:nvSpPr>
+        <p:spPr>
+          <a:xfrm>
+            <a:off x="1083716" y="1795881"/>
+            <a:ext cx="10024262" cy="10972"/>
+          </a:xfrm>
+          <a:prstGeom prst="rect">
+            <a:avLst/>
+          </a:prstGeom>
+          <a:solidFill>
+            <a:srgbClr val="D2DBE7"/>
+          </a:solidFill>
+          <a:ln>
+            <a:noFill/>
+          </a:ln>
+          <a:effectLst/>
+        </p:spPr>
+        <p:style>
+          <a:lnRef idx="1">
+            <a:schemeClr val="accent1"/>
+          </a:lnRef>
+          <a:fillRef idx="3">
+            <a:schemeClr val="accent1"/>
+          </a:fillRef>
+          <a:effectRef idx="2">
+            <a:schemeClr val="accent1"/>
+          </a:effectRef>
+          <a:fontRef idx="minor">
+            <a:schemeClr val="lt1"/>
+          </a:fontRef>
+        </p:style>
+        <p:txBody>
+          <a:bodyPr rtlCol="0" anchor="ctr"/>
+          <a:lstStyle/>
+          <a:p>
+            <a:pPr algn="ctr"/>
+          </a:p>
+        </p:txBody>
+      </p:sp>
+      <p:sp>
+        <p:nvSpPr>
+          <p:cNvPr id="19" name="Oval 18"/>
+          <p:cNvSpPr/>
+          <p:nvPr/>
+        </p:nvSpPr>
+        <p:spPr>
+          <a:xfrm>
+            <a:off x="946556" y="1664208"/>
+            <a:ext cx="274320" cy="274320"/>
+          </a:xfrm>
+          <a:prstGeom prst="ellipse">
+            <a:avLst/>
+          </a:prstGeom>
+          <a:solidFill>
+            <a:srgbClr val="667487"/>
+          </a:solidFill>
+          <a:ln>
+            <a:noFill/>
+          </a:ln>
+          <a:effectLst>
+            <a:outerShdw blurRad="82296" dist="25603" dir="5400000" rotWithShape="0">
+              <a:srgbClr val="1B2A40">
+                <a:alpha val="11000"/>
+              </a:srgbClr>
+            </a:outerShdw>
+          </a:effectLst>
+        </p:spPr>
+        <p:style>
+          <a:lnRef idx="1">
+            <a:schemeClr val="accent1"/>
+          </a:lnRef>
+          <a:fillRef idx="3">
+            <a:schemeClr val="accent1"/>
+          </a:fillRef>
+          <a:effectRef idx="2">
+            <a:schemeClr val="accent1"/>
+          </a:effectRef>
+          <a:fontRef idx="minor">
+            <a:schemeClr val="lt1"/>
+          </a:fontRef>
+        </p:style>
+        <p:txBody>
+          <a:bodyPr rtlCol="0" anchor="ctr"/>
+          <a:lstStyle/>
+          <a:p>
+            <a:pPr algn="ctr"/>
+          </a:p>
+        </p:txBody>
+      </p:sp>
+      <p:sp>
+        <p:nvSpPr>
+          <p:cNvPr id="20" name="TextBox 19"/>
+          <p:cNvSpPr txBox="1"/>
+          <p:nvPr/>
+        </p:nvSpPr>
+        <p:spPr>
+          <a:xfrm>
+            <a:off x="946556" y="1664208"/>
+            <a:ext cx="274320" cy="274320"/>
+          </a:xfrm>
+          <a:prstGeom prst="rect">
+            <a:avLst/>
+          </a:prstGeom>
+          <a:noFill/>
+        </p:spPr>
+        <p:txBody>
+          <a:bodyPr wrap="square" lIns="0" rIns="0" tIns="0" bIns="0" anchor="ctr">
+            <a:spAutoFit/>
+          </a:bodyPr>
+          <a:lstStyle/>
+          <a:p>
+            <a:pPr algn="ctr">
+              <a:lnSpc>
+                <a:spcPct val="100000"/>
+              </a:lnSpc>
+            </a:pPr>
+            <a:r>
+              <a:rPr sz="1000" b="1">
+                <a:solidFill>
+                  <a:srgbClr val="FFFFFF"/>
+                </a:solidFill>
+                <a:latin typeface="Helvetica Neue"/>
+              </a:rPr>
+              <a:t>1</a:t>
+            </a:r>
+          </a:p>
+        </p:txBody>
+      </p:sp>
+      <p:sp>
+        <p:nvSpPr>
+          <p:cNvPr id="21" name="TextBox 20"/>
+          <p:cNvSpPr txBox="1"/>
+          <p:nvPr/>
+        </p:nvSpPr>
+        <p:spPr>
+          <a:xfrm>
+            <a:off x="1646224" y="1700784"/>
+            <a:ext cx="128016" cy="201168"/>
+          </a:xfrm>
+          <a:prstGeom prst="rect">
+            <a:avLst/>
+          </a:prstGeom>
+          <a:noFill/>
+        </p:spPr>
+        <p:txBody>
+          <a:bodyPr wrap="square" lIns="0" rIns="0" tIns="0" bIns="0" anchor="ctr">
+            <a:spAutoFit/>
+          </a:bodyPr>
+          <a:lstStyle/>
+          <a:p>
+            <a:pPr algn="ctr">
+              <a:lnSpc>
+                <a:spcPct val="100000"/>
+              </a:lnSpc>
+            </a:pPr>
+            <a:r>
+              <a:rPr sz="1100" b="1">
+                <a:solidFill>
+                  <a:srgbClr val="93A0B2"/>
+                </a:solidFill>
+                <a:latin typeface="Helvetica Neue"/>
+              </a:rPr>
+              <a:t>›</a:t>
+            </a:r>
+          </a:p>
+        </p:txBody>
+      </p:sp>
+      <p:sp>
+        <p:nvSpPr>
+          <p:cNvPr id="22" name="Oval 21"/>
+          <p:cNvSpPr/>
+          <p:nvPr/>
+        </p:nvSpPr>
+        <p:spPr>
+          <a:xfrm>
+            <a:off x="2199589" y="1664208"/>
+            <a:ext cx="274320" cy="274320"/>
+          </a:xfrm>
+          <a:prstGeom prst="ellipse">
+            <a:avLst/>
+          </a:prstGeom>
+          <a:solidFill>
+            <a:srgbClr val="6E5AA6"/>
+          </a:solidFill>
+          <a:ln>
+            <a:noFill/>
+          </a:ln>
+          <a:effectLst>
+            <a:outerShdw blurRad="82296" dist="25603" dir="5400000" rotWithShape="0">
+              <a:srgbClr val="1B2A40">
+                <a:alpha val="11000"/>
+              </a:srgbClr>
+            </a:outerShdw>
+          </a:effectLst>
+        </p:spPr>
+        <p:style>
+          <a:lnRef idx="1">
+            <a:schemeClr val="accent1"/>
+          </a:lnRef>
+          <a:fillRef idx="3">
+            <a:schemeClr val="accent1"/>
+          </a:fillRef>
+          <a:effectRef idx="2">
+            <a:schemeClr val="accent1"/>
+          </a:effectRef>
+          <a:fontRef idx="minor">
+            <a:schemeClr val="lt1"/>
+          </a:fontRef>
+        </p:style>
+        <p:txBody>
+          <a:bodyPr rtlCol="0" anchor="ctr"/>
+          <a:lstStyle/>
+          <a:p>
+            <a:pPr algn="ctr"/>
+          </a:p>
+        </p:txBody>
+      </p:sp>
+      <p:sp>
+        <p:nvSpPr>
+          <p:cNvPr id="23" name="TextBox 22"/>
+          <p:cNvSpPr txBox="1"/>
+          <p:nvPr/>
+        </p:nvSpPr>
+        <p:spPr>
+          <a:xfrm>
+            <a:off x="2199589" y="1664208"/>
+            <a:ext cx="274320" cy="274320"/>
+          </a:xfrm>
+          <a:prstGeom prst="rect">
+            <a:avLst/>
+          </a:prstGeom>
+          <a:noFill/>
+        </p:spPr>
+        <p:txBody>
+          <a:bodyPr wrap="square" lIns="0" rIns="0" tIns="0" bIns="0" anchor="ctr">
+            <a:spAutoFit/>
+          </a:bodyPr>
+          <a:lstStyle/>
+          <a:p>
+            <a:pPr algn="ctr">
+              <a:lnSpc>
+                <a:spcPct val="100000"/>
+              </a:lnSpc>
+            </a:pPr>
+            <a:r>
+              <a:rPr sz="1000" b="1">
+                <a:solidFill>
+                  <a:srgbClr val="FFFFFF"/>
+                </a:solidFill>
+                <a:latin typeface="Helvetica Neue"/>
+              </a:rPr>
+              <a:t>2</a:t>
+            </a:r>
+          </a:p>
+        </p:txBody>
+      </p:sp>
+      <p:sp>
+        <p:nvSpPr>
+          <p:cNvPr id="24" name="TextBox 23"/>
+          <p:cNvSpPr txBox="1"/>
+          <p:nvPr/>
+        </p:nvSpPr>
+        <p:spPr>
+          <a:xfrm>
+            <a:off x="2899257" y="1700784"/>
+            <a:ext cx="128016" cy="201168"/>
+          </a:xfrm>
+          <a:prstGeom prst="rect">
+            <a:avLst/>
+          </a:prstGeom>
+          <a:noFill/>
+        </p:spPr>
+        <p:txBody>
+          <a:bodyPr wrap="square" lIns="0" rIns="0" tIns="0" bIns="0" anchor="ctr">
+            <a:spAutoFit/>
+          </a:bodyPr>
+          <a:lstStyle/>
+          <a:p>
+            <a:pPr algn="ctr">
+              <a:lnSpc>
+                <a:spcPct val="100000"/>
+              </a:lnSpc>
+            </a:pPr>
+            <a:r>
+              <a:rPr sz="1100" b="1">
+                <a:solidFill>
+                  <a:srgbClr val="93A0B2"/>
+                </a:solidFill>
+                <a:latin typeface="Helvetica Neue"/>
+              </a:rPr>
+              <a:t>›</a:t>
+            </a:r>
+          </a:p>
+        </p:txBody>
+      </p:sp>
+      <p:sp>
+        <p:nvSpPr>
+          <p:cNvPr id="25" name="Oval 24"/>
+          <p:cNvSpPr/>
+          <p:nvPr/>
+        </p:nvSpPr>
+        <p:spPr>
+          <a:xfrm>
+            <a:off x="3452622" y="1664208"/>
+            <a:ext cx="274320" cy="274320"/>
+          </a:xfrm>
+          <a:prstGeom prst="ellipse">
+            <a:avLst/>
+          </a:prstGeom>
+          <a:solidFill>
+            <a:srgbClr val="AE7526"/>
+          </a:solidFill>
+          <a:ln>
+            <a:noFill/>
+          </a:ln>
+          <a:effectLst>
+            <a:outerShdw blurRad="82296" dist="25603" dir="5400000" rotWithShape="0">
+              <a:srgbClr val="1B2A40">
+                <a:alpha val="11000"/>
+              </a:srgbClr>
+            </a:outerShdw>
+          </a:effectLst>
+        </p:spPr>
+        <p:style>
+          <a:lnRef idx="1">
+            <a:schemeClr val="accent1"/>
+          </a:lnRef>
+          <a:fillRef idx="3">
+            <a:schemeClr val="accent1"/>
+          </a:fillRef>
+          <a:effectRef idx="2">
+            <a:schemeClr val="accent1"/>
+          </a:effectRef>
+          <a:fontRef idx="minor">
+            <a:schemeClr val="lt1"/>
+          </a:fontRef>
+        </p:style>
+        <p:txBody>
+          <a:bodyPr rtlCol="0" anchor="ctr"/>
+          <a:lstStyle/>
+          <a:p>
+            <a:pPr algn="ctr"/>
+          </a:p>
+        </p:txBody>
+      </p:sp>
+      <p:sp>
+        <p:nvSpPr>
+          <p:cNvPr id="26" name="TextBox 25"/>
+          <p:cNvSpPr txBox="1"/>
+          <p:nvPr/>
+        </p:nvSpPr>
+        <p:spPr>
+          <a:xfrm>
+            <a:off x="3452622" y="1664208"/>
+            <a:ext cx="274320" cy="274320"/>
+          </a:xfrm>
+          <a:prstGeom prst="rect">
+            <a:avLst/>
+          </a:prstGeom>
+          <a:noFill/>
+        </p:spPr>
+        <p:txBody>
+          <a:bodyPr wrap="square" lIns="0" rIns="0" tIns="0" bIns="0" anchor="ctr">
+            <a:spAutoFit/>
+          </a:bodyPr>
+          <a:lstStyle/>
+          <a:p>
+            <a:pPr algn="ctr">
+              <a:lnSpc>
+                <a:spcPct val="100000"/>
+              </a:lnSpc>
+            </a:pPr>
+            <a:r>
+              <a:rPr sz="1000" b="1">
+                <a:solidFill>
+                  <a:srgbClr val="FFFFFF"/>
+                </a:solidFill>
+                <a:latin typeface="Helvetica Neue"/>
+              </a:rPr>
+              <a:t>3</a:t>
+            </a:r>
+          </a:p>
+        </p:txBody>
+      </p:sp>
+      <p:sp>
+        <p:nvSpPr>
+          <p:cNvPr id="27" name="TextBox 26"/>
+          <p:cNvSpPr txBox="1"/>
+          <p:nvPr/>
+        </p:nvSpPr>
+        <p:spPr>
+          <a:xfrm>
+            <a:off x="4152290" y="1700784"/>
+            <a:ext cx="128016" cy="201168"/>
+          </a:xfrm>
+          <a:prstGeom prst="rect">
+            <a:avLst/>
+          </a:prstGeom>
+          <a:noFill/>
+        </p:spPr>
+        <p:txBody>
+          <a:bodyPr wrap="square" lIns="0" rIns="0" tIns="0" bIns="0" anchor="ctr">
+            <a:spAutoFit/>
+          </a:bodyPr>
+          <a:lstStyle/>
+          <a:p>
+            <a:pPr algn="ctr">
+              <a:lnSpc>
+                <a:spcPct val="100000"/>
+              </a:lnSpc>
+            </a:pPr>
+            <a:r>
+              <a:rPr sz="1100" b="1">
+                <a:solidFill>
+                  <a:srgbClr val="93A0B2"/>
+                </a:solidFill>
+                <a:latin typeface="Helvetica Neue"/>
+              </a:rPr>
+              <a:t>›</a:t>
+            </a:r>
+          </a:p>
+        </p:txBody>
+      </p:sp>
+      <p:sp>
+        <p:nvSpPr>
+          <p:cNvPr id="28" name="Oval 27"/>
+          <p:cNvSpPr/>
+          <p:nvPr/>
+        </p:nvSpPr>
+        <p:spPr>
+          <a:xfrm>
+            <a:off x="4705654" y="1664208"/>
+            <a:ext cx="274320" cy="274320"/>
+          </a:xfrm>
+          <a:prstGeom prst="ellipse">
+            <a:avLst/>
+          </a:prstGeom>
+          <a:solidFill>
+            <a:srgbClr val="1657B0"/>
+          </a:solidFill>
+          <a:ln>
+            <a:noFill/>
+          </a:ln>
+          <a:effectLst>
+            <a:outerShdw blurRad="82296" dist="25603" dir="5400000" rotWithShape="0">
+              <a:srgbClr val="1B2A40">
+                <a:alpha val="11000"/>
+              </a:srgbClr>
+            </a:outerShdw>
+          </a:effectLst>
+        </p:spPr>
+        <p:style>
+          <a:lnRef idx="1">
+            <a:schemeClr val="accent1"/>
+          </a:lnRef>
+          <a:fillRef idx="3">
+            <a:schemeClr val="accent1"/>
+          </a:fillRef>
+          <a:effectRef idx="2">
+            <a:schemeClr val="accent1"/>
+          </a:effectRef>
+          <a:fontRef idx="minor">
+            <a:schemeClr val="lt1"/>
+          </a:fontRef>
+        </p:style>
+        <p:txBody>
+          <a:bodyPr rtlCol="0" anchor="ctr"/>
+          <a:lstStyle/>
+          <a:p>
+            <a:pPr algn="ctr"/>
+          </a:p>
+        </p:txBody>
+      </p:sp>
+      <p:sp>
+        <p:nvSpPr>
+          <p:cNvPr id="29" name="TextBox 28"/>
+          <p:cNvSpPr txBox="1"/>
+          <p:nvPr/>
+        </p:nvSpPr>
+        <p:spPr>
+          <a:xfrm>
+            <a:off x="4705654" y="1664208"/>
+            <a:ext cx="274320" cy="274320"/>
+          </a:xfrm>
+          <a:prstGeom prst="rect">
+            <a:avLst/>
+          </a:prstGeom>
+          <a:noFill/>
+        </p:spPr>
+        <p:txBody>
+          <a:bodyPr wrap="square" lIns="0" rIns="0" tIns="0" bIns="0" anchor="ctr">
+            <a:spAutoFit/>
+          </a:bodyPr>
+          <a:lstStyle/>
+          <a:p>
+            <a:pPr algn="ctr">
+              <a:lnSpc>
+                <a:spcPct val="100000"/>
+              </a:lnSpc>
+            </a:pPr>
+            <a:r>
+              <a:rPr sz="1000" b="1">
+                <a:solidFill>
+                  <a:srgbClr val="FFFFFF"/>
+                </a:solidFill>
+                <a:latin typeface="Helvetica Neue"/>
+              </a:rPr>
+              <a:t>4</a:t>
+            </a:r>
+          </a:p>
+        </p:txBody>
+      </p:sp>
+      <p:sp>
+        <p:nvSpPr>
+          <p:cNvPr id="30" name="TextBox 29"/>
+          <p:cNvSpPr txBox="1"/>
+          <p:nvPr/>
+        </p:nvSpPr>
+        <p:spPr>
+          <a:xfrm>
+            <a:off x="5405323" y="1700784"/>
+            <a:ext cx="128016" cy="201168"/>
+          </a:xfrm>
+          <a:prstGeom prst="rect">
+            <a:avLst/>
+          </a:prstGeom>
+          <a:noFill/>
+        </p:spPr>
+        <p:txBody>
+          <a:bodyPr wrap="square" lIns="0" rIns="0" tIns="0" bIns="0" anchor="ctr">
+            <a:spAutoFit/>
+          </a:bodyPr>
+          <a:lstStyle/>
+          <a:p>
+            <a:pPr algn="ctr">
+              <a:lnSpc>
+                <a:spcPct val="100000"/>
+              </a:lnSpc>
+            </a:pPr>
+            <a:r>
+              <a:rPr sz="1100" b="1">
+                <a:solidFill>
+                  <a:srgbClr val="93A0B2"/>
+                </a:solidFill>
+                <a:latin typeface="Helvetica Neue"/>
+              </a:rPr>
+              <a:t>›</a:t>
+            </a:r>
+          </a:p>
+        </p:txBody>
+      </p:sp>
+      <p:sp>
+        <p:nvSpPr>
+          <p:cNvPr id="31" name="Rounded Rectangle 30"/>
+          <p:cNvSpPr/>
+          <p:nvPr/>
+        </p:nvSpPr>
+        <p:spPr>
+          <a:xfrm>
+            <a:off x="5958687" y="1664208"/>
+            <a:ext cx="274320" cy="274320"/>
+          </a:xfrm>
+          <a:prstGeom prst="roundRect">
+            <a:avLst>
+              <a:gd name="adj" fmla="val 30000"/>
+            </a:avLst>
+          </a:prstGeom>
+          <a:solidFill>
+            <a:srgbClr val="BF515B"/>
+          </a:solidFill>
+          <a:ln>
+            <a:noFill/>
+          </a:ln>
+          <a:effectLst>
+            <a:outerShdw blurRad="82296" dist="25603" dir="5400000" rotWithShape="0">
+              <a:srgbClr val="1B2A40">
+                <a:alpha val="11000"/>
+              </a:srgbClr>
+            </a:outerShdw>
+          </a:effectLst>
+        </p:spPr>
+        <p:style>
+          <a:lnRef idx="1">
+            <a:schemeClr val="accent1"/>
+          </a:lnRef>
+          <a:fillRef idx="3">
+            <a:schemeClr val="accent1"/>
+          </a:fillRef>
+          <a:effectRef idx="2">
+            <a:schemeClr val="accent1"/>
+          </a:effectRef>
+          <a:fontRef idx="minor">
+            <a:schemeClr val="lt1"/>
+          </a:fontRef>
+        </p:style>
+        <p:txBody>
+          <a:bodyPr rtlCol="0" anchor="ctr"/>
+          <a:lstStyle/>
+          <a:p>
+            <a:pPr algn="ctr"/>
+          </a:p>
+        </p:txBody>
+      </p:sp>
+      <p:sp>
+        <p:nvSpPr>
+          <p:cNvPr id="32" name="TextBox 31"/>
+          <p:cNvSpPr txBox="1"/>
+          <p:nvPr/>
+        </p:nvSpPr>
+        <p:spPr>
+          <a:xfrm>
+            <a:off x="5958687" y="1664208"/>
+            <a:ext cx="274320" cy="274320"/>
+          </a:xfrm>
+          <a:prstGeom prst="rect">
+            <a:avLst/>
+          </a:prstGeom>
+          <a:noFill/>
+        </p:spPr>
+        <p:txBody>
+          <a:bodyPr wrap="square" lIns="0" rIns="0" tIns="0" bIns="0" anchor="ctr">
+            <a:spAutoFit/>
+          </a:bodyPr>
+          <a:lstStyle/>
+          <a:p>
+            <a:pPr algn="ctr">
+              <a:lnSpc>
+                <a:spcPct val="100000"/>
+              </a:lnSpc>
+            </a:pPr>
+            <a:r>
+              <a:rPr sz="1000" b="1">
+                <a:solidFill>
+                  <a:srgbClr val="FFFFFF"/>
+                </a:solidFill>
+                <a:latin typeface="Helvetica Neue"/>
+              </a:rPr>
+              <a:t>5</a:t>
+            </a:r>
+          </a:p>
+        </p:txBody>
+      </p:sp>
+      <p:sp>
+        <p:nvSpPr>
+          <p:cNvPr id="33" name="TextBox 32"/>
+          <p:cNvSpPr txBox="1"/>
+          <p:nvPr/>
+        </p:nvSpPr>
+        <p:spPr>
+          <a:xfrm>
+            <a:off x="6658356" y="1700784"/>
+            <a:ext cx="128016" cy="201168"/>
+          </a:xfrm>
+          <a:prstGeom prst="rect">
+            <a:avLst/>
+          </a:prstGeom>
+          <a:noFill/>
+        </p:spPr>
+        <p:txBody>
+          <a:bodyPr wrap="square" lIns="0" rIns="0" tIns="0" bIns="0" anchor="ctr">
+            <a:spAutoFit/>
+          </a:bodyPr>
+          <a:lstStyle/>
+          <a:p>
+            <a:pPr algn="ctr">
+              <a:lnSpc>
+                <a:spcPct val="100000"/>
+              </a:lnSpc>
+            </a:pPr>
+            <a:r>
+              <a:rPr sz="1100" b="1">
+                <a:solidFill>
+                  <a:srgbClr val="93A0B2"/>
+                </a:solidFill>
+                <a:latin typeface="Helvetica Neue"/>
+              </a:rPr>
+              <a:t>›</a:t>
+            </a:r>
+          </a:p>
+        </p:txBody>
+      </p:sp>
+      <p:sp>
+        <p:nvSpPr>
+          <p:cNvPr id="34" name="Oval 33"/>
+          <p:cNvSpPr/>
+          <p:nvPr/>
+        </p:nvSpPr>
+        <p:spPr>
+          <a:xfrm>
+            <a:off x="7211720" y="1664208"/>
+            <a:ext cx="274320" cy="274320"/>
+          </a:xfrm>
+          <a:prstGeom prst="ellipse">
+            <a:avLst/>
+          </a:prstGeom>
+          <a:solidFill>
+            <a:srgbClr val="1657B0"/>
+          </a:solidFill>
+          <a:ln>
+            <a:noFill/>
+          </a:ln>
+          <a:effectLst>
+            <a:outerShdw blurRad="82296" dist="25603" dir="5400000" rotWithShape="0">
+              <a:srgbClr val="1B2A40">
+                <a:alpha val="11000"/>
+              </a:srgbClr>
+            </a:outerShdw>
+          </a:effectLst>
+        </p:spPr>
+        <p:style>
+          <a:lnRef idx="1">
+            <a:schemeClr val="accent1"/>
+          </a:lnRef>
+          <a:fillRef idx="3">
+            <a:schemeClr val="accent1"/>
+          </a:fillRef>
+          <a:effectRef idx="2">
+            <a:schemeClr val="accent1"/>
+          </a:effectRef>
+          <a:fontRef idx="minor">
+            <a:schemeClr val="lt1"/>
+          </a:fontRef>
+        </p:style>
+        <p:txBody>
+          <a:bodyPr rtlCol="0" anchor="ctr"/>
+          <a:lstStyle/>
+          <a:p>
+            <a:pPr algn="ctr"/>
+          </a:p>
+        </p:txBody>
+      </p:sp>
+      <p:sp>
+        <p:nvSpPr>
+          <p:cNvPr id="35" name="TextBox 34"/>
+          <p:cNvSpPr txBox="1"/>
+          <p:nvPr/>
+        </p:nvSpPr>
+        <p:spPr>
+          <a:xfrm>
+            <a:off x="7211720" y="1664208"/>
+            <a:ext cx="274320" cy="274320"/>
+          </a:xfrm>
+          <a:prstGeom prst="rect">
+            <a:avLst/>
+          </a:prstGeom>
+          <a:noFill/>
+        </p:spPr>
+        <p:txBody>
+          <a:bodyPr wrap="square" lIns="0" rIns="0" tIns="0" bIns="0" anchor="ctr">
+            <a:spAutoFit/>
+          </a:bodyPr>
+          <a:lstStyle/>
+          <a:p>
+            <a:pPr algn="ctr">
+              <a:lnSpc>
+                <a:spcPct val="100000"/>
+              </a:lnSpc>
+            </a:pPr>
+            <a:r>
+              <a:rPr sz="1000" b="1">
+                <a:solidFill>
+                  <a:srgbClr val="FFFFFF"/>
+                </a:solidFill>
+                <a:latin typeface="Helvetica Neue"/>
+              </a:rPr>
+              <a:t>6</a:t>
+            </a:r>
+          </a:p>
+        </p:txBody>
+      </p:sp>
+      <p:sp>
+        <p:nvSpPr>
+          <p:cNvPr id="36" name="TextBox 35"/>
+          <p:cNvSpPr txBox="1"/>
+          <p:nvPr/>
+        </p:nvSpPr>
+        <p:spPr>
+          <a:xfrm>
+            <a:off x="7911388" y="1700784"/>
+            <a:ext cx="128016" cy="201168"/>
+          </a:xfrm>
+          <a:prstGeom prst="rect">
+            <a:avLst/>
+          </a:prstGeom>
+          <a:noFill/>
+        </p:spPr>
+        <p:txBody>
+          <a:bodyPr wrap="square" lIns="0" rIns="0" tIns="0" bIns="0" anchor="ctr">
+            <a:spAutoFit/>
+          </a:bodyPr>
+          <a:lstStyle/>
+          <a:p>
+            <a:pPr algn="ctr">
+              <a:lnSpc>
+                <a:spcPct val="100000"/>
+              </a:lnSpc>
+            </a:pPr>
+            <a:r>
+              <a:rPr sz="1100" b="1">
+                <a:solidFill>
+                  <a:srgbClr val="93A0B2"/>
+                </a:solidFill>
+                <a:latin typeface="Helvetica Neue"/>
+              </a:rPr>
+              <a:t>›</a:t>
+            </a:r>
+          </a:p>
+        </p:txBody>
+      </p:sp>
+      <p:sp>
+        <p:nvSpPr>
+          <p:cNvPr id="37" name="Rounded Rectangle 36"/>
+          <p:cNvSpPr/>
+          <p:nvPr/>
+        </p:nvSpPr>
+        <p:spPr>
+          <a:xfrm>
+            <a:off x="8464753" y="1664208"/>
+            <a:ext cx="274320" cy="274320"/>
+          </a:xfrm>
+          <a:prstGeom prst="roundRect">
+            <a:avLst>
+              <a:gd name="adj" fmla="val 30000"/>
+            </a:avLst>
+          </a:prstGeom>
+          <a:solidFill>
+            <a:srgbClr val="2E8C6A"/>
+          </a:solidFill>
+          <a:ln>
+            <a:noFill/>
+          </a:ln>
+          <a:effectLst>
+            <a:outerShdw blurRad="82296" dist="25603" dir="5400000" rotWithShape="0">
+              <a:srgbClr val="1B2A40">
+                <a:alpha val="11000"/>
+              </a:srgbClr>
+            </a:outerShdw>
+          </a:effectLst>
+        </p:spPr>
+        <p:style>
+          <a:lnRef idx="1">
+            <a:schemeClr val="accent1"/>
+          </a:lnRef>
+          <a:fillRef idx="3">
+            <a:schemeClr val="accent1"/>
+          </a:fillRef>
+          <a:effectRef idx="2">
+            <a:schemeClr val="accent1"/>
+          </a:effectRef>
+          <a:fontRef idx="minor">
+            <a:schemeClr val="lt1"/>
+          </a:fontRef>
+        </p:style>
+        <p:txBody>
+          <a:bodyPr rtlCol="0" anchor="ctr"/>
+          <a:lstStyle/>
+          <a:p>
+            <a:pPr algn="ctr"/>
+          </a:p>
+        </p:txBody>
+      </p:sp>
+      <p:sp>
+        <p:nvSpPr>
+          <p:cNvPr id="38" name="TextBox 37"/>
+          <p:cNvSpPr txBox="1"/>
+          <p:nvPr/>
+        </p:nvSpPr>
+        <p:spPr>
+          <a:xfrm>
+            <a:off x="8464753" y="1664208"/>
+            <a:ext cx="274320" cy="274320"/>
+          </a:xfrm>
+          <a:prstGeom prst="rect">
+            <a:avLst/>
+          </a:prstGeom>
+          <a:noFill/>
+        </p:spPr>
+        <p:txBody>
+          <a:bodyPr wrap="square" lIns="0" rIns="0" tIns="0" bIns="0" anchor="ctr">
+            <a:spAutoFit/>
+          </a:bodyPr>
+          <a:lstStyle/>
+          <a:p>
+            <a:pPr algn="ctr">
+              <a:lnSpc>
+                <a:spcPct val="100000"/>
+              </a:lnSpc>
+            </a:pPr>
+            <a:r>
+              <a:rPr sz="1000" b="1">
+                <a:solidFill>
+                  <a:srgbClr val="FFFFFF"/>
+                </a:solidFill>
+                <a:latin typeface="Helvetica Neue"/>
+              </a:rPr>
+              <a:t>7</a:t>
+            </a:r>
+          </a:p>
+        </p:txBody>
+      </p:sp>
+      <p:sp>
+        <p:nvSpPr>
+          <p:cNvPr id="39" name="TextBox 38"/>
+          <p:cNvSpPr txBox="1"/>
+          <p:nvPr/>
+        </p:nvSpPr>
+        <p:spPr>
+          <a:xfrm>
+            <a:off x="9164421" y="1700784"/>
+            <a:ext cx="128016" cy="201168"/>
+          </a:xfrm>
+          <a:prstGeom prst="rect">
+            <a:avLst/>
+          </a:prstGeom>
+          <a:noFill/>
+        </p:spPr>
+        <p:txBody>
+          <a:bodyPr wrap="square" lIns="0" rIns="0" tIns="0" bIns="0" anchor="ctr">
+            <a:spAutoFit/>
+          </a:bodyPr>
+          <a:lstStyle/>
+          <a:p>
+            <a:pPr algn="ctr">
+              <a:lnSpc>
+                <a:spcPct val="100000"/>
+              </a:lnSpc>
+            </a:pPr>
+            <a:r>
+              <a:rPr sz="1100" b="1">
+                <a:solidFill>
+                  <a:srgbClr val="93A0B2"/>
+                </a:solidFill>
+                <a:latin typeface="Helvetica Neue"/>
+              </a:rPr>
+              <a:t>›</a:t>
+            </a:r>
+          </a:p>
+        </p:txBody>
+      </p:sp>
+      <p:sp>
+        <p:nvSpPr>
+          <p:cNvPr id="40" name="Oval 39"/>
+          <p:cNvSpPr/>
+          <p:nvPr/>
+        </p:nvSpPr>
+        <p:spPr>
+          <a:xfrm>
+            <a:off x="9717786" y="1664208"/>
+            <a:ext cx="274320" cy="274320"/>
+          </a:xfrm>
+          <a:prstGeom prst="ellipse">
+            <a:avLst/>
+          </a:prstGeom>
+          <a:solidFill>
+            <a:srgbClr val="AE7526"/>
+          </a:solidFill>
+          <a:ln>
+            <a:noFill/>
+          </a:ln>
+          <a:effectLst>
+            <a:outerShdw blurRad="82296" dist="25603" dir="5400000" rotWithShape="0">
+              <a:srgbClr val="1B2A40">
+                <a:alpha val="11000"/>
+              </a:srgbClr>
+            </a:outerShdw>
+          </a:effectLst>
+        </p:spPr>
+        <p:style>
+          <a:lnRef idx="1">
+            <a:schemeClr val="accent1"/>
+          </a:lnRef>
+          <a:fillRef idx="3">
+            <a:schemeClr val="accent1"/>
+          </a:fillRef>
+          <a:effectRef idx="2">
+            <a:schemeClr val="accent1"/>
+          </a:effectRef>
+          <a:fontRef idx="minor">
+            <a:schemeClr val="lt1"/>
+          </a:fontRef>
+        </p:style>
+        <p:txBody>
+          <a:bodyPr rtlCol="0" anchor="ctr"/>
+          <a:lstStyle/>
+          <a:p>
+            <a:pPr algn="ctr"/>
+          </a:p>
+        </p:txBody>
+      </p:sp>
+      <p:sp>
+        <p:nvSpPr>
+          <p:cNvPr id="41" name="TextBox 40"/>
+          <p:cNvSpPr txBox="1"/>
+          <p:nvPr/>
+        </p:nvSpPr>
+        <p:spPr>
+          <a:xfrm>
+            <a:off x="9717786" y="1664208"/>
+            <a:ext cx="274320" cy="274320"/>
+          </a:xfrm>
+          <a:prstGeom prst="rect">
+            <a:avLst/>
+          </a:prstGeom>
+          <a:noFill/>
+        </p:spPr>
+        <p:txBody>
+          <a:bodyPr wrap="square" lIns="0" rIns="0" tIns="0" bIns="0" anchor="ctr">
+            <a:spAutoFit/>
+          </a:bodyPr>
+          <a:lstStyle/>
+          <a:p>
+            <a:pPr algn="ctr">
+              <a:lnSpc>
+                <a:spcPct val="100000"/>
+              </a:lnSpc>
+            </a:pPr>
+            <a:r>
+              <a:rPr sz="1000" b="1">
+                <a:solidFill>
+                  <a:srgbClr val="FFFFFF"/>
+                </a:solidFill>
+                <a:latin typeface="Helvetica Neue"/>
+              </a:rPr>
+              <a:t>8</a:t>
+            </a:r>
+          </a:p>
+        </p:txBody>
+      </p:sp>
+      <p:sp>
+        <p:nvSpPr>
+          <p:cNvPr id="42" name="TextBox 41"/>
+          <p:cNvSpPr txBox="1"/>
+          <p:nvPr/>
+        </p:nvSpPr>
+        <p:spPr>
+          <a:xfrm>
+            <a:off x="10417454" y="1700784"/>
+            <a:ext cx="128016" cy="201168"/>
+          </a:xfrm>
+          <a:prstGeom prst="rect">
+            <a:avLst/>
+          </a:prstGeom>
+          <a:noFill/>
+        </p:spPr>
+        <p:txBody>
+          <a:bodyPr wrap="square" lIns="0" rIns="0" tIns="0" bIns="0" anchor="ctr">
+            <a:spAutoFit/>
+          </a:bodyPr>
+          <a:lstStyle/>
+          <a:p>
+            <a:pPr algn="ctr">
+              <a:lnSpc>
+                <a:spcPct val="100000"/>
+              </a:lnSpc>
+            </a:pPr>
+            <a:r>
+              <a:rPr sz="1100" b="1">
+                <a:solidFill>
+                  <a:srgbClr val="93A0B2"/>
+                </a:solidFill>
+                <a:latin typeface="Helvetica Neue"/>
+              </a:rPr>
+              <a:t>›</a:t>
+            </a:r>
+          </a:p>
+        </p:txBody>
+      </p:sp>
+      <p:sp>
+        <p:nvSpPr>
+          <p:cNvPr id="43" name="Oval 42"/>
+          <p:cNvSpPr/>
+          <p:nvPr/>
+        </p:nvSpPr>
+        <p:spPr>
+          <a:xfrm>
+            <a:off x="10970818" y="1664208"/>
+            <a:ext cx="274320" cy="274320"/>
+          </a:xfrm>
+          <a:prstGeom prst="ellipse">
+            <a:avLst/>
+          </a:prstGeom>
+          <a:solidFill>
+            <a:srgbClr val="2E8C6A"/>
+          </a:solidFill>
+          <a:ln>
+            <a:noFill/>
+          </a:ln>
+          <a:effectLst>
+            <a:outerShdw blurRad="82296" dist="25603" dir="5400000" rotWithShape="0">
+              <a:srgbClr val="1B2A40">
+                <a:alpha val="11000"/>
+              </a:srgbClr>
+            </a:outerShdw>
+          </a:effectLst>
+        </p:spPr>
+        <p:style>
+          <a:lnRef idx="1">
+            <a:schemeClr val="accent1"/>
+          </a:lnRef>
+          <a:fillRef idx="3">
+            <a:schemeClr val="accent1"/>
+          </a:fillRef>
+          <a:effectRef idx="2">
+            <a:schemeClr val="accent1"/>
+          </a:effectRef>
+          <a:fontRef idx="minor">
+            <a:schemeClr val="lt1"/>
+          </a:fontRef>
+        </p:style>
+        <p:txBody>
+          <a:bodyPr rtlCol="0" anchor="ctr"/>
+          <a:lstStyle/>
+          <a:p>
+            <a:pPr algn="ctr"/>
+          </a:p>
+        </p:txBody>
+      </p:sp>
+      <p:sp>
+        <p:nvSpPr>
+          <p:cNvPr id="44" name="TextBox 43"/>
+          <p:cNvSpPr txBox="1"/>
+          <p:nvPr/>
+        </p:nvSpPr>
+        <p:spPr>
+          <a:xfrm>
+            <a:off x="10970818" y="1664208"/>
+            <a:ext cx="274320" cy="274320"/>
+          </a:xfrm>
+          <a:prstGeom prst="rect">
+            <a:avLst/>
+          </a:prstGeom>
+          <a:noFill/>
+        </p:spPr>
+        <p:txBody>
+          <a:bodyPr wrap="square" lIns="0" rIns="0" tIns="0" bIns="0" anchor="ctr">
+            <a:spAutoFit/>
+          </a:bodyPr>
+          <a:lstStyle/>
+          <a:p>
+            <a:pPr algn="ctr">
+              <a:lnSpc>
+                <a:spcPct val="100000"/>
+              </a:lnSpc>
+            </a:pPr>
+            <a:r>
+              <a:rPr sz="1000" b="1">
+                <a:solidFill>
+                  <a:srgbClr val="FFFFFF"/>
+                </a:solidFill>
+                <a:latin typeface="Helvetica Neue"/>
+              </a:rPr>
+              <a:t>9</a:t>
+            </a:r>
+          </a:p>
+        </p:txBody>
+      </p:sp>
+      <p:sp>
+        <p:nvSpPr>
+          <p:cNvPr id="45" name="TextBox 44"/>
+          <p:cNvSpPr txBox="1"/>
+          <p:nvPr/>
+        </p:nvSpPr>
+        <p:spPr>
+          <a:xfrm>
+            <a:off x="457200" y="1993392"/>
+            <a:ext cx="5410047" cy="182880"/>
+          </a:xfrm>
+          <a:prstGeom prst="rect">
+            <a:avLst/>
+          </a:prstGeom>
+          <a:noFill/>
+        </p:spPr>
+        <p:txBody>
+          <a:bodyPr wrap="square" lIns="0" rIns="0" tIns="0" bIns="0" anchor="t">
+            <a:spAutoFit/>
+          </a:bodyPr>
+          <a:lstStyle/>
+          <a:p>
+            <a:pPr algn="l">
+              <a:lnSpc>
+                <a:spcPct val="100000"/>
+              </a:lnSpc>
+            </a:pPr>
+            <a:r>
+              <a:rPr sz="850" b="1" spc="100">
+                <a:solidFill>
+                  <a:srgbClr val="1657B0"/>
+                </a:solidFill>
+                <a:latin typeface="Menlo"/>
+              </a:rPr>
+              <a:t>PART 1</a:t>
+            </a:r>
+            <a:r>
+              <a:rPr sz="850" b="0" spc="60">
+                <a:solidFill>
+                  <a:srgbClr val="93A0B2"/>
+                </a:solidFill>
+                <a:latin typeface="Menlo"/>
+              </a:rPr>
+              <a:t>   INGEST · PLAN · GUARD  (stages 1–5)</a:t>
+            </a:r>
+          </a:p>
+        </p:txBody>
+      </p:sp>
+      <p:sp>
+        <p:nvSpPr>
+          <p:cNvPr id="46" name="TextBox 45"/>
+          <p:cNvSpPr txBox="1"/>
+          <p:nvPr/>
+        </p:nvSpPr>
+        <p:spPr>
+          <a:xfrm>
+            <a:off x="6324447" y="1993392"/>
+            <a:ext cx="5410047" cy="182880"/>
+          </a:xfrm>
+          <a:prstGeom prst="rect">
+            <a:avLst/>
+          </a:prstGeom>
+          <a:noFill/>
+        </p:spPr>
+        <p:txBody>
+          <a:bodyPr wrap="square" lIns="0" rIns="0" tIns="0" bIns="0" anchor="t">
+            <a:spAutoFit/>
+          </a:bodyPr>
+          <a:lstStyle/>
+          <a:p>
+            <a:pPr algn="l">
+              <a:lnSpc>
+                <a:spcPct val="100000"/>
+              </a:lnSpc>
+            </a:pPr>
+            <a:r>
+              <a:rPr sz="850" b="1" spc="100">
+                <a:solidFill>
+                  <a:srgbClr val="1657B0"/>
+                </a:solidFill>
+                <a:latin typeface="Menlo"/>
+              </a:rPr>
+              <a:t>PART 2</a:t>
+            </a:r>
+            <a:r>
+              <a:rPr sz="850" b="0" spc="60">
+                <a:solidFill>
+                  <a:srgbClr val="93A0B2"/>
+                </a:solidFill>
+                <a:latin typeface="Menlo"/>
+              </a:rPr>
+              <a:t>   BUILD · VERIFY · DELIVER  (stages 5–9)</a:t>
+            </a:r>
+          </a:p>
+        </p:txBody>
+      </p:sp>
+      <p:sp>
+        <p:nvSpPr>
+          <p:cNvPr id="47" name="Rounded Rectangle 46"/>
+          <p:cNvSpPr/>
+          <p:nvPr/>
+        </p:nvSpPr>
+        <p:spPr>
+          <a:xfrm>
+            <a:off x="457200" y="2231136"/>
+            <a:ext cx="5410047" cy="786384"/>
+          </a:xfrm>
+          <a:prstGeom prst="roundRect">
+            <a:avLst>
+              <a:gd name="adj" fmla="val 5000"/>
+            </a:avLst>
+          </a:prstGeom>
+          <a:solidFill>
+            <a:srgbClr val="FFFFFF"/>
+          </a:solidFill>
+          <a:ln w="11430">
+            <a:solidFill>
+              <a:srgbClr val="E7ECF3"/>
+            </a:solidFill>
+          </a:ln>
+          <a:effectLst>
+            <a:outerShdw blurRad="82296" dist="25603" dir="5400000" rotWithShape="0">
+              <a:srgbClr val="1B2A40">
+                <a:alpha val="11000"/>
+              </a:srgbClr>
+            </a:outerShdw>
+          </a:effectLst>
+        </p:spPr>
+        <p:style>
+          <a:lnRef idx="1">
+            <a:schemeClr val="accent1"/>
+          </a:lnRef>
+          <a:fillRef idx="3">
+            <a:schemeClr val="accent1"/>
+          </a:fillRef>
+          <a:effectRef idx="2">
+            <a:schemeClr val="accent1"/>
+          </a:effectRef>
+          <a:fontRef idx="minor">
+            <a:schemeClr val="lt1"/>
+          </a:fontRef>
+        </p:style>
+        <p:txBody>
+          <a:bodyPr rtlCol="0" anchor="ctr"/>
+          <a:lstStyle/>
+          <a:p>
+            <a:pPr algn="ctr"/>
+          </a:p>
+        </p:txBody>
+      </p:sp>
+      <p:sp>
+        <p:nvSpPr>
+          <p:cNvPr id="48" name="Oval 47"/>
+          <p:cNvSpPr/>
+          <p:nvPr/>
+        </p:nvSpPr>
+        <p:spPr>
+          <a:xfrm>
+            <a:off x="585216" y="2340864"/>
+            <a:ext cx="210312" cy="210312"/>
+          </a:xfrm>
+          <a:prstGeom prst="ellipse">
+            <a:avLst/>
+          </a:prstGeom>
+          <a:solidFill>
+            <a:srgbClr val="667487"/>
+          </a:solidFill>
+          <a:ln>
+            <a:noFill/>
+          </a:ln>
+          <a:effectLst/>
+        </p:spPr>
+        <p:style>
+          <a:lnRef idx="1">
+            <a:schemeClr val="accent1"/>
+          </a:lnRef>
+          <a:fillRef idx="3">
+            <a:schemeClr val="accent1"/>
+          </a:fillRef>
+          <a:effectRef idx="2">
+            <a:schemeClr val="accent1"/>
+          </a:effectRef>
+          <a:fontRef idx="minor">
+            <a:schemeClr val="lt1"/>
+          </a:fontRef>
+        </p:style>
+        <p:txBody>
+          <a:bodyPr rtlCol="0" anchor="ctr"/>
+          <a:lstStyle/>
+          <a:p>
+            <a:pPr algn="ctr"/>
+          </a:p>
+        </p:txBody>
+      </p:sp>
+      <p:sp>
+        <p:nvSpPr>
+          <p:cNvPr id="49" name="TextBox 48"/>
+          <p:cNvSpPr txBox="1"/>
+          <p:nvPr/>
+        </p:nvSpPr>
+        <p:spPr>
+          <a:xfrm>
+            <a:off x="585216" y="2340864"/>
+            <a:ext cx="210312" cy="210312"/>
+          </a:xfrm>
+          <a:prstGeom prst="rect">
+            <a:avLst/>
+          </a:prstGeom>
+          <a:noFill/>
+        </p:spPr>
+        <p:txBody>
+          <a:bodyPr wrap="square" lIns="0" rIns="0" tIns="0" bIns="0" anchor="ctr">
+            <a:spAutoFit/>
+          </a:bodyPr>
+          <a:lstStyle/>
+          <a:p>
+            <a:pPr algn="ctr">
+              <a:lnSpc>
+                <a:spcPct val="100000"/>
+              </a:lnSpc>
+            </a:pPr>
+            <a:r>
+              <a:rPr sz="950" b="1">
+                <a:solidFill>
+                  <a:srgbClr val="FFFFFF"/>
+                </a:solidFill>
+                <a:latin typeface="Helvetica Neue"/>
+              </a:rPr>
+              <a:t>1</a:t>
+            </a:r>
+          </a:p>
+        </p:txBody>
+      </p:sp>
+      <p:sp>
+        <p:nvSpPr>
+          <p:cNvPr id="50" name="TextBox 49"/>
+          <p:cNvSpPr txBox="1"/>
+          <p:nvPr/>
+        </p:nvSpPr>
+        <p:spPr>
+          <a:xfrm>
+            <a:off x="813816" y="2340864"/>
+            <a:ext cx="155448" cy="210312"/>
+          </a:xfrm>
+          <a:prstGeom prst="rect">
+            <a:avLst/>
+          </a:prstGeom>
+          <a:noFill/>
+        </p:spPr>
+        <p:txBody>
+          <a:bodyPr wrap="square" lIns="0" rIns="0" tIns="0" bIns="0" anchor="ctr">
+            <a:spAutoFit/>
+          </a:bodyPr>
+          <a:lstStyle/>
+          <a:p>
+            <a:pPr algn="ctr">
+              <a:lnSpc>
+                <a:spcPct val="100000"/>
+              </a:lnSpc>
+            </a:pPr>
+            <a:r>
+              <a:rPr sz="1000" b="1">
+                <a:solidFill>
+                  <a:srgbClr val="93A0B2"/>
+                </a:solidFill>
+                <a:latin typeface="Helvetica Neue"/>
+              </a:rPr>
+              <a:t>→</a:t>
+            </a:r>
+          </a:p>
+        </p:txBody>
+      </p:sp>
+      <p:sp>
+        <p:nvSpPr>
+          <p:cNvPr id="51" name="Oval 50"/>
+          <p:cNvSpPr/>
+          <p:nvPr/>
+        </p:nvSpPr>
+        <p:spPr>
+          <a:xfrm>
+            <a:off x="969264" y="2340864"/>
+            <a:ext cx="210312" cy="210312"/>
+          </a:xfrm>
+          <a:prstGeom prst="ellipse">
+            <a:avLst/>
+          </a:prstGeom>
+          <a:solidFill>
+            <a:srgbClr val="6E5AA6"/>
+          </a:solidFill>
+          <a:ln>
+            <a:noFill/>
+          </a:ln>
+          <a:effectLst/>
+        </p:spPr>
+        <p:style>
+          <a:lnRef idx="1">
+            <a:schemeClr val="accent1"/>
+          </a:lnRef>
+          <a:fillRef idx="3">
+            <a:schemeClr val="accent1"/>
+          </a:fillRef>
+          <a:effectRef idx="2">
+            <a:schemeClr val="accent1"/>
+          </a:effectRef>
+          <a:fontRef idx="minor">
+            <a:schemeClr val="lt1"/>
+          </a:fontRef>
+        </p:style>
+        <p:txBody>
+          <a:bodyPr rtlCol="0" anchor="ctr"/>
+          <a:lstStyle/>
+          <a:p>
+            <a:pPr algn="ctr"/>
+          </a:p>
+        </p:txBody>
+      </p:sp>
+      <p:sp>
+        <p:nvSpPr>
+          <p:cNvPr id="52" name="TextBox 51"/>
+          <p:cNvSpPr txBox="1"/>
+          <p:nvPr/>
+        </p:nvSpPr>
+        <p:spPr>
+          <a:xfrm>
+            <a:off x="969264" y="2340864"/>
+            <a:ext cx="210312" cy="210312"/>
+          </a:xfrm>
+          <a:prstGeom prst="rect">
+            <a:avLst/>
+          </a:prstGeom>
+          <a:noFill/>
+        </p:spPr>
+        <p:txBody>
+          <a:bodyPr wrap="square" lIns="0" rIns="0" tIns="0" bIns="0" anchor="ctr">
+            <a:spAutoFit/>
+          </a:bodyPr>
+          <a:lstStyle/>
+          <a:p>
+            <a:pPr algn="ctr">
+              <a:lnSpc>
+                <a:spcPct val="100000"/>
+              </a:lnSpc>
+            </a:pPr>
+            <a:r>
+              <a:rPr sz="950" b="1">
+                <a:solidFill>
+                  <a:srgbClr val="FFFFFF"/>
+                </a:solidFill>
+                <a:latin typeface="Helvetica Neue"/>
+              </a:rPr>
+              <a:t>2</a:t>
+            </a:r>
+          </a:p>
+        </p:txBody>
+      </p:sp>
+      <p:sp>
+        <p:nvSpPr>
+          <p:cNvPr id="53" name="TextBox 52"/>
+          <p:cNvSpPr txBox="1"/>
+          <p:nvPr/>
+        </p:nvSpPr>
+        <p:spPr>
+          <a:xfrm>
+            <a:off x="1280160" y="2331720"/>
+            <a:ext cx="2712567" cy="228600"/>
+          </a:xfrm>
+          <a:prstGeom prst="rect">
+            <a:avLst/>
+          </a:prstGeom>
+          <a:noFill/>
+        </p:spPr>
+        <p:txBody>
+          <a:bodyPr wrap="square" lIns="0" rIns="0" tIns="0" bIns="0" anchor="ctr">
+            <a:spAutoFit/>
+          </a:bodyPr>
+          <a:lstStyle/>
+          <a:p>
+            <a:pPr algn="l">
+              <a:lnSpc>
+                <a:spcPct val="100000"/>
+              </a:lnSpc>
+            </a:pPr>
+            <a:r>
+              <a:rPr sz="1050" b="1">
+                <a:solidFill>
+                  <a:srgbClr val="16202E"/>
+                </a:solidFill>
+                <a:latin typeface="Helvetica Neue"/>
+              </a:rPr>
+              <a:t>Input → Route</a:t>
+            </a:r>
+          </a:p>
+        </p:txBody>
+      </p:sp>
+      <p:sp>
+        <p:nvSpPr>
+          <p:cNvPr id="54" name="TextBox 53"/>
+          <p:cNvSpPr txBox="1"/>
+          <p:nvPr/>
+        </p:nvSpPr>
+        <p:spPr>
+          <a:xfrm>
+            <a:off x="4111599" y="2331720"/>
+            <a:ext cx="1627632" cy="228600"/>
+          </a:xfrm>
+          <a:prstGeom prst="rect">
+            <a:avLst/>
+          </a:prstGeom>
+          <a:noFill/>
+        </p:spPr>
+        <p:txBody>
+          <a:bodyPr wrap="square" lIns="0" rIns="0" tIns="0" bIns="0" anchor="ctr">
+            <a:spAutoFit/>
+          </a:bodyPr>
+          <a:lstStyle/>
+          <a:p>
+            <a:pPr algn="r">
+              <a:lnSpc>
+                <a:spcPct val="100000"/>
+              </a:lnSpc>
+            </a:pPr>
+            <a:r>
+              <a:rPr sz="750" b="0">
+                <a:solidFill>
+                  <a:srgbClr val="93A0B2"/>
+                </a:solidFill>
+                <a:latin typeface="Menlo"/>
+              </a:rPr>
+              <a:t>Human → Copilot</a:t>
+            </a:r>
+          </a:p>
+        </p:txBody>
+      </p:sp>
+      <p:sp>
+        <p:nvSpPr>
+          <p:cNvPr id="55" name="TextBox 54"/>
+          <p:cNvSpPr txBox="1"/>
+          <p:nvPr/>
+        </p:nvSpPr>
+        <p:spPr>
+          <a:xfrm>
+            <a:off x="612648" y="2633472"/>
+            <a:ext cx="5117439" cy="155448"/>
+          </a:xfrm>
+          <a:prstGeom prst="rect">
+            <a:avLst/>
+          </a:prstGeom>
+          <a:noFill/>
+        </p:spPr>
+        <p:txBody>
+          <a:bodyPr wrap="square" lIns="0" rIns="0" tIns="0" bIns="0" anchor="t">
+            <a:spAutoFit/>
+          </a:bodyPr>
+          <a:lstStyle/>
+          <a:p>
+            <a:pPr algn="l">
+              <a:lnSpc>
+                <a:spcPct val="100000"/>
+              </a:lnSpc>
+            </a:pPr>
+            <a:r>
+              <a:rPr sz="730" b="1">
+                <a:solidFill>
+                  <a:srgbClr val="1657B0"/>
+                </a:solidFill>
+                <a:latin typeface="Menlo"/>
+              </a:rPr>
+              <a:t>trigger  </a:t>
+            </a:r>
+            <a:r>
+              <a:rPr sz="800" b="0">
+                <a:solidFill>
+                  <a:srgbClr val="51617A"/>
+                </a:solidFill>
+                <a:latin typeface="Helvetica Neue"/>
+              </a:rPr>
+              <a:t>one-line shorthand in Copilot Chat</a:t>
+            </a:r>
+          </a:p>
+        </p:txBody>
+      </p:sp>
+      <p:sp>
+        <p:nvSpPr>
+          <p:cNvPr id="56" name="TextBox 55"/>
+          <p:cNvSpPr txBox="1"/>
+          <p:nvPr/>
+        </p:nvSpPr>
+        <p:spPr>
+          <a:xfrm>
+            <a:off x="612648" y="2775203"/>
+            <a:ext cx="5117439" cy="155448"/>
+          </a:xfrm>
+          <a:prstGeom prst="rect">
+            <a:avLst/>
+          </a:prstGeom>
+          <a:noFill/>
+        </p:spPr>
+        <p:txBody>
+          <a:bodyPr wrap="square" lIns="0" rIns="0" tIns="0" bIns="0" anchor="t">
+            <a:spAutoFit/>
+          </a:bodyPr>
+          <a:lstStyle/>
+          <a:p>
+            <a:pPr algn="l">
+              <a:lnSpc>
+                <a:spcPct val="100000"/>
+              </a:lnSpc>
+            </a:pPr>
+            <a:r>
+              <a:rPr sz="730" b="1">
+                <a:solidFill>
+                  <a:srgbClr val="1657B0"/>
+                </a:solidFill>
+                <a:latin typeface="Menlo"/>
+              </a:rPr>
+              <a:t>passes  </a:t>
+            </a:r>
+            <a:r>
+              <a:rPr sz="800" b="0">
+                <a:solidFill>
+                  <a:srgbClr val="51617A"/>
+                </a:solidFill>
+                <a:latin typeface="Helvetica Neue"/>
+              </a:rPr>
+              <a:t>jira-stories/&lt;KEY&gt;.txt</a:t>
+            </a:r>
+          </a:p>
+        </p:txBody>
+      </p:sp>
+      <p:sp>
+        <p:nvSpPr>
+          <p:cNvPr id="57" name="TextBox 56"/>
+          <p:cNvSpPr txBox="1"/>
+          <p:nvPr/>
+        </p:nvSpPr>
+        <p:spPr>
+          <a:xfrm>
+            <a:off x="612648" y="2916935"/>
+            <a:ext cx="5117439" cy="155448"/>
+          </a:xfrm>
+          <a:prstGeom prst="rect">
+            <a:avLst/>
+          </a:prstGeom>
+          <a:noFill/>
+        </p:spPr>
+        <p:txBody>
+          <a:bodyPr wrap="square" lIns="0" rIns="0" tIns="0" bIns="0" anchor="t">
+            <a:spAutoFit/>
+          </a:bodyPr>
+          <a:lstStyle/>
+          <a:p>
+            <a:pPr algn="l">
+              <a:lnSpc>
+                <a:spcPct val="100000"/>
+              </a:lnSpc>
+            </a:pPr>
+            <a:r>
+              <a:rPr sz="730" b="1">
+                <a:solidFill>
+                  <a:srgbClr val="1657B0"/>
+                </a:solidFill>
+                <a:latin typeface="Menlo"/>
+              </a:rPr>
+              <a:t>does  </a:t>
+            </a:r>
+            <a:r>
+              <a:rPr sz="800" b="0">
+                <a:solidFill>
+                  <a:srgbClr val="51617A"/>
+                </a:solidFill>
+                <a:latin typeface="Helvetica Neue"/>
+              </a:rPr>
+              <a:t>read copilot rules · derive create/update · pick prompt</a:t>
+            </a:r>
+          </a:p>
+        </p:txBody>
+      </p:sp>
+      <p:sp>
+        <p:nvSpPr>
+          <p:cNvPr id="58" name="Rounded Rectangle 57"/>
+          <p:cNvSpPr/>
+          <p:nvPr/>
+        </p:nvSpPr>
+        <p:spPr>
+          <a:xfrm>
+            <a:off x="457200" y="3076956"/>
+            <a:ext cx="5410047" cy="786384"/>
+          </a:xfrm>
+          <a:prstGeom prst="roundRect">
+            <a:avLst>
+              <a:gd name="adj" fmla="val 5000"/>
+            </a:avLst>
+          </a:prstGeom>
+          <a:solidFill>
+            <a:srgbClr val="FFFFFF"/>
+          </a:solidFill>
+          <a:ln w="11430">
+            <a:solidFill>
+              <a:srgbClr val="E7ECF3"/>
+            </a:solidFill>
+          </a:ln>
+          <a:effectLst>
+            <a:outerShdw blurRad="82296" dist="25603" dir="5400000" rotWithShape="0">
+              <a:srgbClr val="1B2A40">
+                <a:alpha val="11000"/>
+              </a:srgbClr>
+            </a:outerShdw>
+          </a:effectLst>
+        </p:spPr>
+        <p:style>
+          <a:lnRef idx="1">
+            <a:schemeClr val="accent1"/>
+          </a:lnRef>
+          <a:fillRef idx="3">
+            <a:schemeClr val="accent1"/>
+          </a:fillRef>
+          <a:effectRef idx="2">
+            <a:schemeClr val="accent1"/>
+          </a:effectRef>
+          <a:fontRef idx="minor">
+            <a:schemeClr val="lt1"/>
+          </a:fontRef>
+        </p:style>
+        <p:txBody>
+          <a:bodyPr rtlCol="0" anchor="ctr"/>
+          <a:lstStyle/>
+          <a:p>
+            <a:pPr algn="ctr"/>
+          </a:p>
+        </p:txBody>
+      </p:sp>
+      <p:sp>
+        <p:nvSpPr>
+          <p:cNvPr id="59" name="Oval 58"/>
+          <p:cNvSpPr/>
+          <p:nvPr/>
+        </p:nvSpPr>
+        <p:spPr>
+          <a:xfrm>
+            <a:off x="585216" y="3186684"/>
+            <a:ext cx="210312" cy="210312"/>
+          </a:xfrm>
+          <a:prstGeom prst="ellipse">
+            <a:avLst/>
+          </a:prstGeom>
+          <a:solidFill>
+            <a:srgbClr val="6E5AA6"/>
+          </a:solidFill>
+          <a:ln>
+            <a:noFill/>
+          </a:ln>
+          <a:effectLst/>
+        </p:spPr>
+        <p:style>
+          <a:lnRef idx="1">
+            <a:schemeClr val="accent1"/>
+          </a:lnRef>
+          <a:fillRef idx="3">
+            <a:schemeClr val="accent1"/>
+          </a:fillRef>
+          <a:effectRef idx="2">
+            <a:schemeClr val="accent1"/>
+          </a:effectRef>
+          <a:fontRef idx="minor">
+            <a:schemeClr val="lt1"/>
+          </a:fontRef>
+        </p:style>
+        <p:txBody>
+          <a:bodyPr rtlCol="0" anchor="ctr"/>
+          <a:lstStyle/>
+          <a:p>
+            <a:pPr algn="ctr"/>
+          </a:p>
+        </p:txBody>
+      </p:sp>
+      <p:sp>
+        <p:nvSpPr>
+          <p:cNvPr id="60" name="TextBox 59"/>
+          <p:cNvSpPr txBox="1"/>
+          <p:nvPr/>
+        </p:nvSpPr>
+        <p:spPr>
+          <a:xfrm>
+            <a:off x="585216" y="3186684"/>
+            <a:ext cx="210312" cy="210312"/>
+          </a:xfrm>
+          <a:prstGeom prst="rect">
+            <a:avLst/>
+          </a:prstGeom>
+          <a:noFill/>
+        </p:spPr>
+        <p:txBody>
+          <a:bodyPr wrap="square" lIns="0" rIns="0" tIns="0" bIns="0" anchor="ctr">
+            <a:spAutoFit/>
+          </a:bodyPr>
+          <a:lstStyle/>
+          <a:p>
+            <a:pPr algn="ctr">
+              <a:lnSpc>
+                <a:spcPct val="100000"/>
+              </a:lnSpc>
+            </a:pPr>
+            <a:r>
+              <a:rPr sz="950" b="1">
+                <a:solidFill>
+                  <a:srgbClr val="FFFFFF"/>
+                </a:solidFill>
+                <a:latin typeface="Helvetica Neue"/>
+              </a:rPr>
+              <a:t>2</a:t>
+            </a:r>
+          </a:p>
+        </p:txBody>
+      </p:sp>
+      <p:sp>
+        <p:nvSpPr>
+          <p:cNvPr id="61" name="TextBox 60"/>
+          <p:cNvSpPr txBox="1"/>
+          <p:nvPr/>
+        </p:nvSpPr>
+        <p:spPr>
+          <a:xfrm>
+            <a:off x="813816" y="3186684"/>
+            <a:ext cx="155448" cy="210312"/>
+          </a:xfrm>
+          <a:prstGeom prst="rect">
+            <a:avLst/>
+          </a:prstGeom>
+          <a:noFill/>
+        </p:spPr>
+        <p:txBody>
+          <a:bodyPr wrap="square" lIns="0" rIns="0" tIns="0" bIns="0" anchor="ctr">
+            <a:spAutoFit/>
+          </a:bodyPr>
+          <a:lstStyle/>
+          <a:p>
+            <a:pPr algn="ctr">
+              <a:lnSpc>
+                <a:spcPct val="100000"/>
+              </a:lnSpc>
+            </a:pPr>
+            <a:r>
+              <a:rPr sz="1000" b="1">
+                <a:solidFill>
+                  <a:srgbClr val="93A0B2"/>
+                </a:solidFill>
+                <a:latin typeface="Helvetica Neue"/>
+              </a:rPr>
+              <a:t>→</a:t>
+            </a:r>
+          </a:p>
+        </p:txBody>
+      </p:sp>
+      <p:sp>
+        <p:nvSpPr>
+          <p:cNvPr id="62" name="Oval 61"/>
+          <p:cNvSpPr/>
+          <p:nvPr/>
+        </p:nvSpPr>
+        <p:spPr>
+          <a:xfrm>
+            <a:off x="969264" y="3186684"/>
+            <a:ext cx="210312" cy="210312"/>
+          </a:xfrm>
+          <a:prstGeom prst="ellipse">
+            <a:avLst/>
+          </a:prstGeom>
+          <a:solidFill>
+            <a:srgbClr val="AE7526"/>
+          </a:solidFill>
+          <a:ln>
+            <a:noFill/>
+          </a:ln>
+          <a:effectLst/>
+        </p:spPr>
+        <p:style>
+          <a:lnRef idx="1">
+            <a:schemeClr val="accent1"/>
+          </a:lnRef>
+          <a:fillRef idx="3">
+            <a:schemeClr val="accent1"/>
+          </a:fillRef>
+          <a:effectRef idx="2">
+            <a:schemeClr val="accent1"/>
+          </a:effectRef>
+          <a:fontRef idx="minor">
+            <a:schemeClr val="lt1"/>
+          </a:fontRef>
+        </p:style>
+        <p:txBody>
+          <a:bodyPr rtlCol="0" anchor="ctr"/>
+          <a:lstStyle/>
+          <a:p>
+            <a:pPr algn="ctr"/>
+          </a:p>
+        </p:txBody>
+      </p:sp>
+      <p:sp>
+        <p:nvSpPr>
+          <p:cNvPr id="63" name="TextBox 62"/>
+          <p:cNvSpPr txBox="1"/>
+          <p:nvPr/>
+        </p:nvSpPr>
+        <p:spPr>
+          <a:xfrm>
+            <a:off x="969264" y="3186684"/>
+            <a:ext cx="210312" cy="210312"/>
+          </a:xfrm>
+          <a:prstGeom prst="rect">
+            <a:avLst/>
+          </a:prstGeom>
+          <a:noFill/>
+        </p:spPr>
+        <p:txBody>
+          <a:bodyPr wrap="square" lIns="0" rIns="0" tIns="0" bIns="0" anchor="ctr">
+            <a:spAutoFit/>
+          </a:bodyPr>
+          <a:lstStyle/>
+          <a:p>
+            <a:pPr algn="ctr">
+              <a:lnSpc>
+                <a:spcPct val="100000"/>
+              </a:lnSpc>
+            </a:pPr>
+            <a:r>
+              <a:rPr sz="950" b="1">
+                <a:solidFill>
+                  <a:srgbClr val="FFFFFF"/>
+                </a:solidFill>
+                <a:latin typeface="Helvetica Neue"/>
+              </a:rPr>
+              <a:t>3</a:t>
+            </a:r>
+          </a:p>
+        </p:txBody>
+      </p:sp>
+      <p:sp>
+        <p:nvSpPr>
+          <p:cNvPr id="64" name="TextBox 63"/>
+          <p:cNvSpPr txBox="1"/>
+          <p:nvPr/>
+        </p:nvSpPr>
+        <p:spPr>
+          <a:xfrm>
+            <a:off x="1280160" y="3177540"/>
+            <a:ext cx="2712567" cy="228600"/>
+          </a:xfrm>
+          <a:prstGeom prst="rect">
+            <a:avLst/>
+          </a:prstGeom>
+          <a:noFill/>
+        </p:spPr>
+        <p:txBody>
+          <a:bodyPr wrap="square" lIns="0" rIns="0" tIns="0" bIns="0" anchor="ctr">
+            <a:spAutoFit/>
+          </a:bodyPr>
+          <a:lstStyle/>
+          <a:p>
+            <a:pPr algn="l">
+              <a:lnSpc>
+                <a:spcPct val="100000"/>
+              </a:lnSpc>
+            </a:pPr>
+            <a:r>
+              <a:rPr sz="1050" b="1">
+                <a:solidFill>
+                  <a:srgbClr val="16202E"/>
+                </a:solidFill>
+                <a:latin typeface="Helvetica Neue"/>
+              </a:rPr>
+              <a:t>Route → Normalize</a:t>
+            </a:r>
+          </a:p>
+        </p:txBody>
+      </p:sp>
+      <p:sp>
+        <p:nvSpPr>
+          <p:cNvPr id="65" name="TextBox 64"/>
+          <p:cNvSpPr txBox="1"/>
+          <p:nvPr/>
+        </p:nvSpPr>
+        <p:spPr>
+          <a:xfrm>
+            <a:off x="4111599" y="3177540"/>
+            <a:ext cx="1627632" cy="228600"/>
+          </a:xfrm>
+          <a:prstGeom prst="rect">
+            <a:avLst/>
+          </a:prstGeom>
+          <a:noFill/>
+        </p:spPr>
+        <p:txBody>
+          <a:bodyPr wrap="square" lIns="0" rIns="0" tIns="0" bIns="0" anchor="ctr">
+            <a:spAutoFit/>
+          </a:bodyPr>
+          <a:lstStyle/>
+          <a:p>
+            <a:pPr algn="r">
+              <a:lnSpc>
+                <a:spcPct val="100000"/>
+              </a:lnSpc>
+            </a:pPr>
+            <a:r>
+              <a:rPr sz="750" b="0">
+                <a:solidFill>
+                  <a:srgbClr val="93A0B2"/>
+                </a:solidFill>
+                <a:latin typeface="Menlo"/>
+              </a:rPr>
+              <a:t>Copilot → Terminal</a:t>
+            </a:r>
+          </a:p>
+        </p:txBody>
+      </p:sp>
+      <p:sp>
+        <p:nvSpPr>
+          <p:cNvPr id="66" name="TextBox 65"/>
+          <p:cNvSpPr txBox="1"/>
+          <p:nvPr/>
+        </p:nvSpPr>
+        <p:spPr>
+          <a:xfrm>
+            <a:off x="612648" y="3479292"/>
+            <a:ext cx="5117439" cy="155448"/>
+          </a:xfrm>
+          <a:prstGeom prst="rect">
+            <a:avLst/>
+          </a:prstGeom>
+          <a:noFill/>
+        </p:spPr>
+        <p:txBody>
+          <a:bodyPr wrap="square" lIns="0" rIns="0" tIns="0" bIns="0" anchor="t">
+            <a:spAutoFit/>
+          </a:bodyPr>
+          <a:lstStyle/>
+          <a:p>
+            <a:pPr algn="l">
+              <a:lnSpc>
+                <a:spcPct val="100000"/>
+              </a:lnSpc>
+            </a:pPr>
+            <a:r>
+              <a:rPr sz="730" b="1">
+                <a:solidFill>
+                  <a:srgbClr val="1657B0"/>
+                </a:solidFill>
+                <a:latin typeface="Menlo"/>
+              </a:rPr>
+              <a:t>trigger  </a:t>
+            </a:r>
+            <a:r>
+              <a:rPr sz="800" b="0">
+                <a:solidFill>
+                  <a:srgbClr val="51617A"/>
+                </a:solidFill>
+                <a:latin typeface="Helvetica Neue"/>
+              </a:rPr>
+              <a:t>prompt step 0 → normalize_jira_story.py</a:t>
+            </a:r>
+          </a:p>
+        </p:txBody>
+      </p:sp>
+      <p:sp>
+        <p:nvSpPr>
+          <p:cNvPr id="67" name="TextBox 66"/>
+          <p:cNvSpPr txBox="1"/>
+          <p:nvPr/>
+        </p:nvSpPr>
+        <p:spPr>
+          <a:xfrm>
+            <a:off x="612648" y="3621024"/>
+            <a:ext cx="5117439" cy="155448"/>
+          </a:xfrm>
+          <a:prstGeom prst="rect">
+            <a:avLst/>
+          </a:prstGeom>
+          <a:noFill/>
+        </p:spPr>
+        <p:txBody>
+          <a:bodyPr wrap="square" lIns="0" rIns="0" tIns="0" bIns="0" anchor="t">
+            <a:spAutoFit/>
+          </a:bodyPr>
+          <a:lstStyle/>
+          <a:p>
+            <a:pPr algn="l">
+              <a:lnSpc>
+                <a:spcPct val="100000"/>
+              </a:lnSpc>
+            </a:pPr>
+            <a:r>
+              <a:rPr sz="730" b="1">
+                <a:solidFill>
+                  <a:srgbClr val="1657B0"/>
+                </a:solidFill>
+                <a:latin typeface="Menlo"/>
+              </a:rPr>
+              <a:t>passes  </a:t>
+            </a:r>
+            <a:r>
+              <a:rPr sz="800" b="0">
+                <a:solidFill>
+                  <a:srgbClr val="51617A"/>
+                </a:solidFill>
+                <a:latin typeface="Helvetica Neue"/>
+              </a:rPr>
+              <a:t>&lt;KEY&gt;.txt + surgical template</a:t>
+            </a:r>
+          </a:p>
+        </p:txBody>
+      </p:sp>
+      <p:sp>
+        <p:nvSpPr>
+          <p:cNvPr id="68" name="TextBox 67"/>
+          <p:cNvSpPr txBox="1"/>
+          <p:nvPr/>
+        </p:nvSpPr>
+        <p:spPr>
+          <a:xfrm>
+            <a:off x="612648" y="3762756"/>
+            <a:ext cx="5117439" cy="155448"/>
+          </a:xfrm>
+          <a:prstGeom prst="rect">
+            <a:avLst/>
+          </a:prstGeom>
+          <a:noFill/>
+        </p:spPr>
+        <p:txBody>
+          <a:bodyPr wrap="square" lIns="0" rIns="0" tIns="0" bIns="0" anchor="t">
+            <a:spAutoFit/>
+          </a:bodyPr>
+          <a:lstStyle/>
+          <a:p>
+            <a:pPr algn="l">
+              <a:lnSpc>
+                <a:spcPct val="100000"/>
+              </a:lnSpc>
+            </a:pPr>
+            <a:r>
+              <a:rPr sz="730" b="1">
+                <a:solidFill>
+                  <a:srgbClr val="1657B0"/>
+                </a:solidFill>
+                <a:latin typeface="Menlo"/>
+              </a:rPr>
+              <a:t>does  </a:t>
+            </a:r>
+            <a:r>
+              <a:rPr sz="800" b="0">
+                <a:solidFill>
+                  <a:srgbClr val="51617A"/>
+                </a:solidFill>
+                <a:latin typeface="Helvetica Neue"/>
+              </a:rPr>
+              <a:t>rewrite raw prose → canonical 11-section brief</a:t>
+            </a:r>
+          </a:p>
+        </p:txBody>
+      </p:sp>
+      <p:sp>
+        <p:nvSpPr>
+          <p:cNvPr id="69" name="Rounded Rectangle 68"/>
+          <p:cNvSpPr/>
+          <p:nvPr/>
+        </p:nvSpPr>
+        <p:spPr>
+          <a:xfrm>
+            <a:off x="457200" y="3922776"/>
+            <a:ext cx="5410047" cy="786384"/>
+          </a:xfrm>
+          <a:prstGeom prst="roundRect">
+            <a:avLst>
+              <a:gd name="adj" fmla="val 5000"/>
+            </a:avLst>
+          </a:prstGeom>
+          <a:solidFill>
+            <a:srgbClr val="FFFFFF"/>
+          </a:solidFill>
+          <a:ln w="11430">
+            <a:solidFill>
+              <a:srgbClr val="E7ECF3"/>
+            </a:solidFill>
+          </a:ln>
+          <a:effectLst>
+            <a:outerShdw blurRad="82296" dist="25603" dir="5400000" rotWithShape="0">
+              <a:srgbClr val="1B2A40">
+                <a:alpha val="11000"/>
+              </a:srgbClr>
+            </a:outerShdw>
+          </a:effectLst>
+        </p:spPr>
+        <p:style>
+          <a:lnRef idx="1">
+            <a:schemeClr val="accent1"/>
+          </a:lnRef>
+          <a:fillRef idx="3">
+            <a:schemeClr val="accent1"/>
+          </a:fillRef>
+          <a:effectRef idx="2">
+            <a:schemeClr val="accent1"/>
+          </a:effectRef>
+          <a:fontRef idx="minor">
+            <a:schemeClr val="lt1"/>
+          </a:fontRef>
+        </p:style>
+        <p:txBody>
+          <a:bodyPr rtlCol="0" anchor="ctr"/>
+          <a:lstStyle/>
+          <a:p>
+            <a:pPr algn="ctr"/>
+          </a:p>
+        </p:txBody>
+      </p:sp>
+      <p:sp>
+        <p:nvSpPr>
+          <p:cNvPr id="70" name="Oval 69"/>
+          <p:cNvSpPr/>
+          <p:nvPr/>
+        </p:nvSpPr>
+        <p:spPr>
+          <a:xfrm>
+            <a:off x="585216" y="4032504"/>
+            <a:ext cx="210312" cy="210312"/>
+          </a:xfrm>
+          <a:prstGeom prst="ellipse">
+            <a:avLst/>
+          </a:prstGeom>
+          <a:solidFill>
+            <a:srgbClr val="AE7526"/>
+          </a:solidFill>
+          <a:ln>
+            <a:noFill/>
+          </a:ln>
+          <a:effectLst/>
+        </p:spPr>
+        <p:style>
+          <a:lnRef idx="1">
+            <a:schemeClr val="accent1"/>
+          </a:lnRef>
+          <a:fillRef idx="3">
+            <a:schemeClr val="accent1"/>
+          </a:fillRef>
+          <a:effectRef idx="2">
+            <a:schemeClr val="accent1"/>
+          </a:effectRef>
+          <a:fontRef idx="minor">
+            <a:schemeClr val="lt1"/>
+          </a:fontRef>
+        </p:style>
+        <p:txBody>
+          <a:bodyPr rtlCol="0" anchor="ctr"/>
+          <a:lstStyle/>
+          <a:p>
+            <a:pPr algn="ctr"/>
+          </a:p>
+        </p:txBody>
+      </p:sp>
+      <p:sp>
+        <p:nvSpPr>
+          <p:cNvPr id="71" name="TextBox 70"/>
+          <p:cNvSpPr txBox="1"/>
+          <p:nvPr/>
+        </p:nvSpPr>
+        <p:spPr>
+          <a:xfrm>
+            <a:off x="585216" y="4032504"/>
+            <a:ext cx="210312" cy="210312"/>
+          </a:xfrm>
+          <a:prstGeom prst="rect">
+            <a:avLst/>
+          </a:prstGeom>
+          <a:noFill/>
+        </p:spPr>
+        <p:txBody>
+          <a:bodyPr wrap="square" lIns="0" rIns="0" tIns="0" bIns="0" anchor="ctr">
+            <a:spAutoFit/>
+          </a:bodyPr>
+          <a:lstStyle/>
+          <a:p>
+            <a:pPr algn="ctr">
+              <a:lnSpc>
+                <a:spcPct val="100000"/>
+              </a:lnSpc>
+            </a:pPr>
+            <a:r>
+              <a:rPr sz="950" b="1">
+                <a:solidFill>
+                  <a:srgbClr val="FFFFFF"/>
+                </a:solidFill>
+                <a:latin typeface="Helvetica Neue"/>
+              </a:rPr>
+              <a:t>3</a:t>
+            </a:r>
+          </a:p>
+        </p:txBody>
+      </p:sp>
+      <p:sp>
+        <p:nvSpPr>
+          <p:cNvPr id="72" name="TextBox 71"/>
+          <p:cNvSpPr txBox="1"/>
+          <p:nvPr/>
+        </p:nvSpPr>
+        <p:spPr>
+          <a:xfrm>
+            <a:off x="813816" y="4032504"/>
+            <a:ext cx="155448" cy="210312"/>
+          </a:xfrm>
+          <a:prstGeom prst="rect">
+            <a:avLst/>
+          </a:prstGeom>
+          <a:noFill/>
+        </p:spPr>
+        <p:txBody>
+          <a:bodyPr wrap="square" lIns="0" rIns="0" tIns="0" bIns="0" anchor="ctr">
+            <a:spAutoFit/>
+          </a:bodyPr>
+          <a:lstStyle/>
+          <a:p>
+            <a:pPr algn="ctr">
+              <a:lnSpc>
+                <a:spcPct val="100000"/>
+              </a:lnSpc>
+            </a:pPr>
+            <a:r>
+              <a:rPr sz="1000" b="1">
+                <a:solidFill>
+                  <a:srgbClr val="93A0B2"/>
+                </a:solidFill>
+                <a:latin typeface="Helvetica Neue"/>
+              </a:rPr>
+              <a:t>→</a:t>
+            </a:r>
+          </a:p>
+        </p:txBody>
+      </p:sp>
+      <p:sp>
+        <p:nvSpPr>
+          <p:cNvPr id="73" name="Oval 72"/>
+          <p:cNvSpPr/>
+          <p:nvPr/>
+        </p:nvSpPr>
+        <p:spPr>
+          <a:xfrm>
+            <a:off x="969264" y="4032504"/>
+            <a:ext cx="210312" cy="210312"/>
+          </a:xfrm>
+          <a:prstGeom prst="ellipse">
+            <a:avLst/>
+          </a:prstGeom>
+          <a:solidFill>
+            <a:srgbClr val="1657B0"/>
+          </a:solidFill>
+          <a:ln>
+            <a:noFill/>
+          </a:ln>
+          <a:effectLst/>
+        </p:spPr>
+        <p:style>
+          <a:lnRef idx="1">
+            <a:schemeClr val="accent1"/>
+          </a:lnRef>
+          <a:fillRef idx="3">
+            <a:schemeClr val="accent1"/>
+          </a:fillRef>
+          <a:effectRef idx="2">
+            <a:schemeClr val="accent1"/>
+          </a:effectRef>
+          <a:fontRef idx="minor">
+            <a:schemeClr val="lt1"/>
+          </a:fontRef>
+        </p:style>
+        <p:txBody>
+          <a:bodyPr rtlCol="0" anchor="ctr"/>
+          <a:lstStyle/>
+          <a:p>
+            <a:pPr algn="ctr"/>
+          </a:p>
+        </p:txBody>
+      </p:sp>
+      <p:sp>
+        <p:nvSpPr>
+          <p:cNvPr id="74" name="TextBox 73"/>
+          <p:cNvSpPr txBox="1"/>
+          <p:nvPr/>
+        </p:nvSpPr>
+        <p:spPr>
+          <a:xfrm>
+            <a:off x="969264" y="4032504"/>
+            <a:ext cx="210312" cy="210312"/>
+          </a:xfrm>
+          <a:prstGeom prst="rect">
+            <a:avLst/>
+          </a:prstGeom>
+          <a:noFill/>
+        </p:spPr>
+        <p:txBody>
+          <a:bodyPr wrap="square" lIns="0" rIns="0" tIns="0" bIns="0" anchor="ctr">
+            <a:spAutoFit/>
+          </a:bodyPr>
+          <a:lstStyle/>
+          <a:p>
+            <a:pPr algn="ctr">
+              <a:lnSpc>
+                <a:spcPct val="100000"/>
+              </a:lnSpc>
+            </a:pPr>
+            <a:r>
+              <a:rPr sz="950" b="1">
+                <a:solidFill>
+                  <a:srgbClr val="FFFFFF"/>
+                </a:solidFill>
+                <a:latin typeface="Helvetica Neue"/>
+              </a:rPr>
+              <a:t>4</a:t>
+            </a:r>
+          </a:p>
+        </p:txBody>
+      </p:sp>
+      <p:sp>
+        <p:nvSpPr>
+          <p:cNvPr id="75" name="TextBox 74"/>
+          <p:cNvSpPr txBox="1"/>
+          <p:nvPr/>
+        </p:nvSpPr>
+        <p:spPr>
+          <a:xfrm>
+            <a:off x="1280160" y="4023360"/>
+            <a:ext cx="2712567" cy="228600"/>
+          </a:xfrm>
+          <a:prstGeom prst="rect">
+            <a:avLst/>
+          </a:prstGeom>
+          <a:noFill/>
+        </p:spPr>
+        <p:txBody>
+          <a:bodyPr wrap="square" lIns="0" rIns="0" tIns="0" bIns="0" anchor="ctr">
+            <a:spAutoFit/>
+          </a:bodyPr>
+          <a:lstStyle/>
+          <a:p>
+            <a:pPr algn="l">
+              <a:lnSpc>
+                <a:spcPct val="100000"/>
+              </a:lnSpc>
+            </a:pPr>
+            <a:r>
+              <a:rPr sz="1050" b="1">
+                <a:solidFill>
+                  <a:srgbClr val="16202E"/>
+                </a:solidFill>
+                <a:latin typeface="Helvetica Neue"/>
+              </a:rPr>
+              <a:t>Normalize → Understand</a:t>
+            </a:r>
+          </a:p>
+        </p:txBody>
+      </p:sp>
+      <p:sp>
+        <p:nvSpPr>
+          <p:cNvPr id="76" name="TextBox 75"/>
+          <p:cNvSpPr txBox="1"/>
+          <p:nvPr/>
+        </p:nvSpPr>
+        <p:spPr>
+          <a:xfrm>
+            <a:off x="4111599" y="4023360"/>
+            <a:ext cx="1627632" cy="228600"/>
+          </a:xfrm>
+          <a:prstGeom prst="rect">
+            <a:avLst/>
+          </a:prstGeom>
+          <a:noFill/>
+        </p:spPr>
+        <p:txBody>
+          <a:bodyPr wrap="square" lIns="0" rIns="0" tIns="0" bIns="0" anchor="ctr">
+            <a:spAutoFit/>
+          </a:bodyPr>
+          <a:lstStyle/>
+          <a:p>
+            <a:pPr algn="r">
+              <a:lnSpc>
+                <a:spcPct val="100000"/>
+              </a:lnSpc>
+            </a:pPr>
+            <a:r>
+              <a:rPr sz="750" b="0">
+                <a:solidFill>
+                  <a:srgbClr val="93A0B2"/>
+                </a:solidFill>
+                <a:latin typeface="Menlo"/>
+              </a:rPr>
+              <a:t>Terminal → MCP</a:t>
+            </a:r>
+          </a:p>
+        </p:txBody>
+      </p:sp>
+      <p:sp>
+        <p:nvSpPr>
+          <p:cNvPr id="77" name="TextBox 76"/>
+          <p:cNvSpPr txBox="1"/>
+          <p:nvPr/>
+        </p:nvSpPr>
+        <p:spPr>
+          <a:xfrm>
+            <a:off x="612648" y="4325112"/>
+            <a:ext cx="5117439" cy="155448"/>
+          </a:xfrm>
+          <a:prstGeom prst="rect">
+            <a:avLst/>
+          </a:prstGeom>
+          <a:noFill/>
+        </p:spPr>
+        <p:txBody>
+          <a:bodyPr wrap="square" lIns="0" rIns="0" tIns="0" bIns="0" anchor="t">
+            <a:spAutoFit/>
+          </a:bodyPr>
+          <a:lstStyle/>
+          <a:p>
+            <a:pPr algn="l">
+              <a:lnSpc>
+                <a:spcPct val="100000"/>
+              </a:lnSpc>
+            </a:pPr>
+            <a:r>
+              <a:rPr sz="730" b="1">
+                <a:solidFill>
+                  <a:srgbClr val="1657B0"/>
+                </a:solidFill>
+                <a:latin typeface="Menlo"/>
+              </a:rPr>
+              <a:t>trigger  </a:t>
+            </a:r>
+            <a:r>
+              <a:rPr sz="800" b="0">
+                <a:solidFill>
+                  <a:srgbClr val="51617A"/>
+                </a:solidFill>
+                <a:latin typeface="Helvetica Neue"/>
+              </a:rPr>
+              <a:t>read_story("&lt;KEY&gt;-surgical.txt")</a:t>
+            </a:r>
+          </a:p>
+        </p:txBody>
+      </p:sp>
+      <p:sp>
+        <p:nvSpPr>
+          <p:cNvPr id="78" name="TextBox 77"/>
+          <p:cNvSpPr txBox="1"/>
+          <p:nvPr/>
+        </p:nvSpPr>
+        <p:spPr>
+          <a:xfrm>
+            <a:off x="612648" y="4466844"/>
+            <a:ext cx="5117439" cy="155448"/>
+          </a:xfrm>
+          <a:prstGeom prst="rect">
+            <a:avLst/>
+          </a:prstGeom>
+          <a:noFill/>
+        </p:spPr>
+        <p:txBody>
+          <a:bodyPr wrap="square" lIns="0" rIns="0" tIns="0" bIns="0" anchor="t">
+            <a:spAutoFit/>
+          </a:bodyPr>
+          <a:lstStyle/>
+          <a:p>
+            <a:pPr algn="l">
+              <a:lnSpc>
+                <a:spcPct val="100000"/>
+              </a:lnSpc>
+            </a:pPr>
+            <a:r>
+              <a:rPr sz="730" b="1">
+                <a:solidFill>
+                  <a:srgbClr val="1657B0"/>
+                </a:solidFill>
+                <a:latin typeface="Menlo"/>
+              </a:rPr>
+              <a:t>passes  </a:t>
+            </a:r>
+            <a:r>
+              <a:rPr sz="800" b="0">
+                <a:solidFill>
+                  <a:srgbClr val="51617A"/>
+                </a:solidFill>
+                <a:latin typeface="Helvetica Neue"/>
+              </a:rPr>
+              <a:t>&lt;KEY&gt;-surgical.txt</a:t>
+            </a:r>
+          </a:p>
+        </p:txBody>
+      </p:sp>
+      <p:sp>
+        <p:nvSpPr>
+          <p:cNvPr id="79" name="TextBox 78"/>
+          <p:cNvSpPr txBox="1"/>
+          <p:nvPr/>
+        </p:nvSpPr>
+        <p:spPr>
+          <a:xfrm>
+            <a:off x="612648" y="4608576"/>
+            <a:ext cx="5117439" cy="155448"/>
+          </a:xfrm>
+          <a:prstGeom prst="rect">
+            <a:avLst/>
+          </a:prstGeom>
+          <a:noFill/>
+        </p:spPr>
+        <p:txBody>
+          <a:bodyPr wrap="square" lIns="0" rIns="0" tIns="0" bIns="0" anchor="t">
+            <a:spAutoFit/>
+          </a:bodyPr>
+          <a:lstStyle/>
+          <a:p>
+            <a:pPr algn="l">
+              <a:lnSpc>
+                <a:spcPct val="100000"/>
+              </a:lnSpc>
+            </a:pPr>
+            <a:r>
+              <a:rPr sz="730" b="1">
+                <a:solidFill>
+                  <a:srgbClr val="1657B0"/>
+                </a:solidFill>
+                <a:latin typeface="Menlo"/>
+              </a:rPr>
+              <a:t>does  </a:t>
+            </a:r>
+            <a:r>
+              <a:rPr sz="800" b="0">
+                <a:solidFill>
+                  <a:srgbClr val="51617A"/>
+                </a:solidFill>
+                <a:latin typeface="Helvetica Neue"/>
+              </a:rPr>
+              <a:t>identify components · layers · data-flow order</a:t>
+            </a:r>
+          </a:p>
+        </p:txBody>
+      </p:sp>
+      <p:sp>
+        <p:nvSpPr>
+          <p:cNvPr id="80" name="Rounded Rectangle 79"/>
+          <p:cNvSpPr/>
+          <p:nvPr/>
+        </p:nvSpPr>
+        <p:spPr>
+          <a:xfrm>
+            <a:off x="457200" y="4768596"/>
+            <a:ext cx="5410047" cy="786384"/>
+          </a:xfrm>
+          <a:prstGeom prst="roundRect">
+            <a:avLst>
+              <a:gd name="adj" fmla="val 5000"/>
+            </a:avLst>
+          </a:prstGeom>
+          <a:solidFill>
+            <a:srgbClr val="FFFFFF"/>
+          </a:solidFill>
+          <a:ln w="11430">
+            <a:solidFill>
+              <a:srgbClr val="E7ECF3"/>
+            </a:solidFill>
+          </a:ln>
+          <a:effectLst>
+            <a:outerShdw blurRad="82296" dist="25603" dir="5400000" rotWithShape="0">
+              <a:srgbClr val="1B2A40">
+                <a:alpha val="11000"/>
+              </a:srgbClr>
+            </a:outerShdw>
+          </a:effectLst>
+        </p:spPr>
+        <p:style>
+          <a:lnRef idx="1">
+            <a:schemeClr val="accent1"/>
+          </a:lnRef>
+          <a:fillRef idx="3">
+            <a:schemeClr val="accent1"/>
+          </a:fillRef>
+          <a:effectRef idx="2">
+            <a:schemeClr val="accent1"/>
+          </a:effectRef>
+          <a:fontRef idx="minor">
+            <a:schemeClr val="lt1"/>
+          </a:fontRef>
+        </p:style>
+        <p:txBody>
+          <a:bodyPr rtlCol="0" anchor="ctr"/>
+          <a:lstStyle/>
+          <a:p>
+            <a:pPr algn="ctr"/>
+          </a:p>
+        </p:txBody>
+      </p:sp>
+      <p:sp>
+        <p:nvSpPr>
+          <p:cNvPr id="81" name="Oval 80"/>
+          <p:cNvSpPr/>
+          <p:nvPr/>
+        </p:nvSpPr>
+        <p:spPr>
+          <a:xfrm>
+            <a:off x="585216" y="4878324"/>
+            <a:ext cx="210312" cy="210312"/>
+          </a:xfrm>
+          <a:prstGeom prst="ellipse">
+            <a:avLst/>
+          </a:prstGeom>
+          <a:solidFill>
+            <a:srgbClr val="1657B0"/>
+          </a:solidFill>
+          <a:ln>
+            <a:noFill/>
+          </a:ln>
+          <a:effectLst/>
+        </p:spPr>
+        <p:style>
+          <a:lnRef idx="1">
+            <a:schemeClr val="accent1"/>
+          </a:lnRef>
+          <a:fillRef idx="3">
+            <a:schemeClr val="accent1"/>
+          </a:fillRef>
+          <a:effectRef idx="2">
+            <a:schemeClr val="accent1"/>
+          </a:effectRef>
+          <a:fontRef idx="minor">
+            <a:schemeClr val="lt1"/>
+          </a:fontRef>
+        </p:style>
+        <p:txBody>
+          <a:bodyPr rtlCol="0" anchor="ctr"/>
+          <a:lstStyle/>
+          <a:p>
+            <a:pPr algn="ctr"/>
+          </a:p>
+        </p:txBody>
+      </p:sp>
+      <p:sp>
+        <p:nvSpPr>
+          <p:cNvPr id="82" name="TextBox 81"/>
+          <p:cNvSpPr txBox="1"/>
+          <p:nvPr/>
+        </p:nvSpPr>
+        <p:spPr>
+          <a:xfrm>
+            <a:off x="585216" y="4878324"/>
+            <a:ext cx="210312" cy="210312"/>
+          </a:xfrm>
+          <a:prstGeom prst="rect">
+            <a:avLst/>
+          </a:prstGeom>
+          <a:noFill/>
+        </p:spPr>
+        <p:txBody>
+          <a:bodyPr wrap="square" lIns="0" rIns="0" tIns="0" bIns="0" anchor="ctr">
+            <a:spAutoFit/>
+          </a:bodyPr>
+          <a:lstStyle/>
+          <a:p>
+            <a:pPr algn="ctr">
+              <a:lnSpc>
+                <a:spcPct val="100000"/>
+              </a:lnSpc>
+            </a:pPr>
+            <a:r>
+              <a:rPr sz="950" b="1">
+                <a:solidFill>
+                  <a:srgbClr val="FFFFFF"/>
+                </a:solidFill>
+                <a:latin typeface="Helvetica Neue"/>
+              </a:rPr>
+              <a:t>4</a:t>
+            </a:r>
+          </a:p>
+        </p:txBody>
+      </p:sp>
+      <p:sp>
+        <p:nvSpPr>
+          <p:cNvPr id="83" name="TextBox 82"/>
+          <p:cNvSpPr txBox="1"/>
+          <p:nvPr/>
+        </p:nvSpPr>
+        <p:spPr>
+          <a:xfrm>
+            <a:off x="813816" y="4878324"/>
+            <a:ext cx="155448" cy="210312"/>
+          </a:xfrm>
+          <a:prstGeom prst="rect">
+            <a:avLst/>
+          </a:prstGeom>
+          <a:noFill/>
+        </p:spPr>
+        <p:txBody>
+          <a:bodyPr wrap="square" lIns="0" rIns="0" tIns="0" bIns="0" anchor="ctr">
+            <a:spAutoFit/>
+          </a:bodyPr>
+          <a:lstStyle/>
+          <a:p>
+            <a:pPr algn="ctr">
+              <a:lnSpc>
+                <a:spcPct val="100000"/>
+              </a:lnSpc>
+            </a:pPr>
+            <a:r>
+              <a:rPr sz="1000" b="1">
+                <a:solidFill>
+                  <a:srgbClr val="93A0B2"/>
+                </a:solidFill>
+                <a:latin typeface="Helvetica Neue"/>
+              </a:rPr>
+              <a:t>→</a:t>
+            </a:r>
+          </a:p>
+        </p:txBody>
+      </p:sp>
+      <p:sp>
+        <p:nvSpPr>
+          <p:cNvPr id="84" name="Oval 83"/>
+          <p:cNvSpPr/>
+          <p:nvPr/>
+        </p:nvSpPr>
+        <p:spPr>
+          <a:xfrm>
+            <a:off x="969264" y="4878324"/>
+            <a:ext cx="210312" cy="210312"/>
+          </a:xfrm>
+          <a:prstGeom prst="ellipse">
+            <a:avLst/>
+          </a:prstGeom>
+          <a:solidFill>
+            <a:srgbClr val="BF515B"/>
+          </a:solidFill>
+          <a:ln>
+            <a:noFill/>
+          </a:ln>
+          <a:effectLst/>
+        </p:spPr>
+        <p:style>
+          <a:lnRef idx="1">
+            <a:schemeClr val="accent1"/>
+          </a:lnRef>
+          <a:fillRef idx="3">
+            <a:schemeClr val="accent1"/>
+          </a:fillRef>
+          <a:effectRef idx="2">
+            <a:schemeClr val="accent1"/>
+          </a:effectRef>
+          <a:fontRef idx="minor">
+            <a:schemeClr val="lt1"/>
+          </a:fontRef>
+        </p:style>
+        <p:txBody>
+          <a:bodyPr rtlCol="0" anchor="ctr"/>
+          <a:lstStyle/>
+          <a:p>
+            <a:pPr algn="ctr"/>
+          </a:p>
+        </p:txBody>
+      </p:sp>
+      <p:sp>
+        <p:nvSpPr>
+          <p:cNvPr id="85" name="TextBox 84"/>
+          <p:cNvSpPr txBox="1"/>
+          <p:nvPr/>
+        </p:nvSpPr>
+        <p:spPr>
+          <a:xfrm>
+            <a:off x="969264" y="4878324"/>
+            <a:ext cx="210312" cy="210312"/>
+          </a:xfrm>
+          <a:prstGeom prst="rect">
+            <a:avLst/>
+          </a:prstGeom>
+          <a:noFill/>
+        </p:spPr>
+        <p:txBody>
+          <a:bodyPr wrap="square" lIns="0" rIns="0" tIns="0" bIns="0" anchor="ctr">
+            <a:spAutoFit/>
+          </a:bodyPr>
+          <a:lstStyle/>
+          <a:p>
+            <a:pPr algn="ctr">
+              <a:lnSpc>
+                <a:spcPct val="100000"/>
+              </a:lnSpc>
+            </a:pPr>
+            <a:r>
+              <a:rPr sz="950" b="1">
+                <a:solidFill>
+                  <a:srgbClr val="FFFFFF"/>
+                </a:solidFill>
+                <a:latin typeface="Helvetica Neue"/>
+              </a:rPr>
+              <a:t>5</a:t>
+            </a:r>
+          </a:p>
+        </p:txBody>
+      </p:sp>
+      <p:sp>
+        <p:nvSpPr>
+          <p:cNvPr id="86" name="TextBox 85"/>
+          <p:cNvSpPr txBox="1"/>
+          <p:nvPr/>
+        </p:nvSpPr>
+        <p:spPr>
+          <a:xfrm>
+            <a:off x="1280160" y="4869180"/>
+            <a:ext cx="2712567" cy="228600"/>
+          </a:xfrm>
+          <a:prstGeom prst="rect">
+            <a:avLst/>
+          </a:prstGeom>
+          <a:noFill/>
+        </p:spPr>
+        <p:txBody>
+          <a:bodyPr wrap="square" lIns="0" rIns="0" tIns="0" bIns="0" anchor="ctr">
+            <a:spAutoFit/>
+          </a:bodyPr>
+          <a:lstStyle/>
+          <a:p>
+            <a:pPr algn="l">
+              <a:lnSpc>
+                <a:spcPct val="100000"/>
+              </a:lnSpc>
+            </a:pPr>
+            <a:r>
+              <a:rPr sz="1050" b="1">
+                <a:solidFill>
+                  <a:srgbClr val="16202E"/>
+                </a:solidFill>
+                <a:latin typeface="Helvetica Neue"/>
+              </a:rPr>
+              <a:t>Understand → Guardrail</a:t>
+            </a:r>
+          </a:p>
+        </p:txBody>
+      </p:sp>
+      <p:sp>
+        <p:nvSpPr>
+          <p:cNvPr id="87" name="TextBox 86"/>
+          <p:cNvSpPr txBox="1"/>
+          <p:nvPr/>
+        </p:nvSpPr>
+        <p:spPr>
+          <a:xfrm>
+            <a:off x="4111599" y="4869180"/>
+            <a:ext cx="1627632" cy="228600"/>
+          </a:xfrm>
+          <a:prstGeom prst="rect">
+            <a:avLst/>
+          </a:prstGeom>
+          <a:noFill/>
+        </p:spPr>
+        <p:txBody>
+          <a:bodyPr wrap="square" lIns="0" rIns="0" tIns="0" bIns="0" anchor="ctr">
+            <a:spAutoFit/>
+          </a:bodyPr>
+          <a:lstStyle/>
+          <a:p>
+            <a:pPr algn="r">
+              <a:lnSpc>
+                <a:spcPct val="100000"/>
+              </a:lnSpc>
+            </a:pPr>
+            <a:r>
+              <a:rPr sz="750" b="0">
+                <a:solidFill>
+                  <a:srgbClr val="93A0B2"/>
+                </a:solidFill>
+                <a:latin typeface="Menlo"/>
+              </a:rPr>
+              <a:t>Copilot → Gate</a:t>
+            </a:r>
+          </a:p>
+        </p:txBody>
+      </p:sp>
+      <p:sp>
+        <p:nvSpPr>
+          <p:cNvPr id="88" name="TextBox 87"/>
+          <p:cNvSpPr txBox="1"/>
+          <p:nvPr/>
+        </p:nvSpPr>
+        <p:spPr>
+          <a:xfrm>
+            <a:off x="612648" y="5170932"/>
+            <a:ext cx="5117439" cy="155448"/>
+          </a:xfrm>
+          <a:prstGeom prst="rect">
+            <a:avLst/>
+          </a:prstGeom>
+          <a:noFill/>
+        </p:spPr>
+        <p:txBody>
+          <a:bodyPr wrap="square" lIns="0" rIns="0" tIns="0" bIns="0" anchor="t">
+            <a:spAutoFit/>
+          </a:bodyPr>
+          <a:lstStyle/>
+          <a:p>
+            <a:pPr algn="l">
+              <a:lnSpc>
+                <a:spcPct val="100000"/>
+              </a:lnSpc>
+            </a:pPr>
+            <a:r>
+              <a:rPr sz="730" b="1">
+                <a:solidFill>
+                  <a:srgbClr val="1657B0"/>
+                </a:solidFill>
+                <a:latin typeface="Menlo"/>
+              </a:rPr>
+              <a:t>trigger  </a:t>
+            </a:r>
+            <a:r>
+              <a:rPr sz="800" b="0">
+                <a:solidFill>
+                  <a:srgbClr val="51617A"/>
+                </a:solidFill>
+                <a:latin typeface="Helvetica Neue"/>
+              </a:rPr>
+              <a:t>check every component + its gcp_icon</a:t>
+            </a:r>
+          </a:p>
+        </p:txBody>
+      </p:sp>
+      <p:sp>
+        <p:nvSpPr>
+          <p:cNvPr id="89" name="TextBox 88"/>
+          <p:cNvSpPr txBox="1"/>
+          <p:nvPr/>
+        </p:nvSpPr>
+        <p:spPr>
+          <a:xfrm>
+            <a:off x="612648" y="5312664"/>
+            <a:ext cx="5117439" cy="155448"/>
+          </a:xfrm>
+          <a:prstGeom prst="rect">
+            <a:avLst/>
+          </a:prstGeom>
+          <a:noFill/>
+        </p:spPr>
+        <p:txBody>
+          <a:bodyPr wrap="square" lIns="0" rIns="0" tIns="0" bIns="0" anchor="t">
+            <a:spAutoFit/>
+          </a:bodyPr>
+          <a:lstStyle/>
+          <a:p>
+            <a:pPr algn="l">
+              <a:lnSpc>
+                <a:spcPct val="100000"/>
+              </a:lnSpc>
+            </a:pPr>
+            <a:r>
+              <a:rPr sz="730" b="1">
+                <a:solidFill>
+                  <a:srgbClr val="1657B0"/>
+                </a:solidFill>
+                <a:latin typeface="Menlo"/>
+              </a:rPr>
+              <a:t>passes  </a:t>
+            </a:r>
+            <a:r>
+              <a:rPr sz="800" b="0">
+                <a:solidFill>
+                  <a:srgbClr val="51617A"/>
+                </a:solidFill>
+                <a:latin typeface="Helvetica Neue"/>
+              </a:rPr>
+              <a:t>the planned component list</a:t>
+            </a:r>
+          </a:p>
+        </p:txBody>
+      </p:sp>
+      <p:sp>
+        <p:nvSpPr>
+          <p:cNvPr id="90" name="TextBox 89"/>
+          <p:cNvSpPr txBox="1"/>
+          <p:nvPr/>
+        </p:nvSpPr>
+        <p:spPr>
+          <a:xfrm>
+            <a:off x="612648" y="5454396"/>
+            <a:ext cx="5117439" cy="155448"/>
+          </a:xfrm>
+          <a:prstGeom prst="rect">
+            <a:avLst/>
+          </a:prstGeom>
+          <a:noFill/>
+        </p:spPr>
+        <p:txBody>
+          <a:bodyPr wrap="square" lIns="0" rIns="0" tIns="0" bIns="0" anchor="t">
+            <a:spAutoFit/>
+          </a:bodyPr>
+          <a:lstStyle/>
+          <a:p>
+            <a:pPr algn="l">
+              <a:lnSpc>
+                <a:spcPct val="100000"/>
+              </a:lnSpc>
+            </a:pPr>
+            <a:r>
+              <a:rPr sz="730" b="1">
+                <a:solidFill>
+                  <a:srgbClr val="1657B0"/>
+                </a:solidFill>
+                <a:latin typeface="Menlo"/>
+              </a:rPr>
+              <a:t>does  </a:t>
+            </a:r>
+            <a:r>
+              <a:rPr sz="800" b="0">
+                <a:solidFill>
+                  <a:srgbClr val="51617A"/>
+                </a:solidFill>
+                <a:latin typeface="Helvetica Neue"/>
+              </a:rPr>
+              <a:t>match vs policy/unavailable_services.md</a:t>
+            </a:r>
+          </a:p>
+        </p:txBody>
+      </p:sp>
+      <p:sp>
+        <p:nvSpPr>
+          <p:cNvPr id="91" name="Rounded Rectangle 90"/>
+          <p:cNvSpPr/>
+          <p:nvPr/>
+        </p:nvSpPr>
+        <p:spPr>
+          <a:xfrm>
+            <a:off x="457200" y="5614416"/>
+            <a:ext cx="5410047" cy="786384"/>
+          </a:xfrm>
+          <a:prstGeom prst="roundRect">
+            <a:avLst>
+              <a:gd name="adj" fmla="val 5000"/>
+            </a:avLst>
+          </a:prstGeom>
+          <a:solidFill>
+            <a:srgbClr val="FFFFFF"/>
+          </a:solidFill>
+          <a:ln w="21590">
+            <a:solidFill>
+              <a:srgbClr val="BF515B"/>
+            </a:solidFill>
+          </a:ln>
+          <a:effectLst>
+            <a:outerShdw blurRad="82296" dist="25603" dir="5400000" rotWithShape="0">
+              <a:srgbClr val="1B2A40">
+                <a:alpha val="11000"/>
+              </a:srgbClr>
+            </a:outerShdw>
+          </a:effectLst>
+        </p:spPr>
+        <p:style>
+          <a:lnRef idx="1">
+            <a:schemeClr val="accent1"/>
+          </a:lnRef>
+          <a:fillRef idx="3">
+            <a:schemeClr val="accent1"/>
+          </a:fillRef>
+          <a:effectRef idx="2">
+            <a:schemeClr val="accent1"/>
+          </a:effectRef>
+          <a:fontRef idx="minor">
+            <a:schemeClr val="lt1"/>
+          </a:fontRef>
+        </p:style>
+        <p:txBody>
+          <a:bodyPr rtlCol="0" anchor="ctr"/>
+          <a:lstStyle/>
+          <a:p>
+            <a:pPr algn="ctr"/>
+          </a:p>
+        </p:txBody>
+      </p:sp>
+      <p:sp>
+        <p:nvSpPr>
+          <p:cNvPr id="92" name="TextBox 91"/>
+          <p:cNvSpPr txBox="1"/>
+          <p:nvPr/>
+        </p:nvSpPr>
+        <p:spPr>
+          <a:xfrm>
+            <a:off x="612648" y="5715000"/>
+            <a:ext cx="5117439" cy="219456"/>
+          </a:xfrm>
+          <a:prstGeom prst="rect">
+            <a:avLst/>
+          </a:prstGeom>
+          <a:noFill/>
+        </p:spPr>
+        <p:txBody>
+          <a:bodyPr wrap="square" lIns="0" rIns="0" tIns="0" bIns="0" anchor="ctr">
+            <a:spAutoFit/>
+          </a:bodyPr>
+          <a:lstStyle/>
+          <a:p>
+            <a:pPr algn="l">
+              <a:lnSpc>
+                <a:spcPct val="100000"/>
+              </a:lnSpc>
+            </a:pPr>
+            <a:r>
+              <a:rPr sz="1000" b="1" spc="50">
+                <a:solidFill>
+                  <a:srgbClr val="BF515B"/>
+                </a:solidFill>
+                <a:latin typeface="Menlo"/>
+              </a:rPr>
+              <a:t>◆ GATE · Guardrail (stage 5)</a:t>
+            </a:r>
+          </a:p>
+        </p:txBody>
+      </p:sp>
+      <p:sp>
+        <p:nvSpPr>
+          <p:cNvPr id="93" name="TextBox 92"/>
+          <p:cNvSpPr txBox="1"/>
+          <p:nvPr/>
+        </p:nvSpPr>
+        <p:spPr>
+          <a:xfrm>
+            <a:off x="612648" y="6007608"/>
+            <a:ext cx="5117439" cy="164592"/>
+          </a:xfrm>
+          <a:prstGeom prst="rect">
+            <a:avLst/>
+          </a:prstGeom>
+          <a:noFill/>
+        </p:spPr>
+        <p:txBody>
+          <a:bodyPr wrap="square" lIns="0" rIns="0" tIns="0" bIns="0" anchor="t">
+            <a:spAutoFit/>
+          </a:bodyPr>
+          <a:lstStyle/>
+          <a:p>
+            <a:pPr algn="l">
+              <a:lnSpc>
+                <a:spcPct val="100000"/>
+              </a:lnSpc>
+            </a:pPr>
+            <a:r>
+              <a:rPr sz="750" b="1">
+                <a:solidFill>
+                  <a:srgbClr val="2E8C6A"/>
+                </a:solidFill>
+                <a:latin typeface="Menlo"/>
+              </a:rPr>
+              <a:t>PASS  </a:t>
+            </a:r>
+            <a:r>
+              <a:rPr sz="800" b="0">
+                <a:solidFill>
+                  <a:srgbClr val="51617A"/>
+                </a:solidFill>
+                <a:latin typeface="Helvetica Neue"/>
+              </a:rPr>
+              <a:t>no restricted service → build proceeds silently</a:t>
+            </a:r>
+          </a:p>
+        </p:txBody>
+      </p:sp>
+      <p:sp>
+        <p:nvSpPr>
+          <p:cNvPr id="94" name="TextBox 93"/>
+          <p:cNvSpPr txBox="1"/>
+          <p:nvPr/>
+        </p:nvSpPr>
+        <p:spPr>
+          <a:xfrm>
+            <a:off x="612648" y="6190488"/>
+            <a:ext cx="5117439" cy="164592"/>
+          </a:xfrm>
+          <a:prstGeom prst="rect">
+            <a:avLst/>
+          </a:prstGeom>
+          <a:noFill/>
+        </p:spPr>
+        <p:txBody>
+          <a:bodyPr wrap="square" lIns="0" rIns="0" tIns="0" bIns="0" anchor="t">
+            <a:spAutoFit/>
+          </a:bodyPr>
+          <a:lstStyle/>
+          <a:p>
+            <a:pPr algn="l">
+              <a:lnSpc>
+                <a:spcPct val="100000"/>
+              </a:lnSpc>
+            </a:pPr>
+            <a:r>
+              <a:rPr sz="750" b="1">
+                <a:solidFill>
+                  <a:srgbClr val="BF515B"/>
+                </a:solidFill>
+                <a:latin typeface="Menlo"/>
+              </a:rPr>
+              <a:t>FAIL  </a:t>
+            </a:r>
+            <a:r>
+              <a:rPr sz="800" b="0">
+                <a:solidFill>
+                  <a:srgbClr val="51617A"/>
+                </a:solidFill>
+                <a:latin typeface="Helvetica Neue"/>
+              </a:rPr>
+              <a:t>STOP · rank approved alternatives · you pick · substitute</a:t>
+            </a:r>
+          </a:p>
+        </p:txBody>
+      </p:sp>
+      <p:sp>
+        <p:nvSpPr>
+          <p:cNvPr id="95" name="Rounded Rectangle 94"/>
+          <p:cNvSpPr/>
+          <p:nvPr/>
+        </p:nvSpPr>
+        <p:spPr>
+          <a:xfrm>
+            <a:off x="6324447" y="2231136"/>
+            <a:ext cx="5410047" cy="786384"/>
+          </a:xfrm>
+          <a:prstGeom prst="roundRect">
+            <a:avLst>
+              <a:gd name="adj" fmla="val 5000"/>
+            </a:avLst>
+          </a:prstGeom>
+          <a:solidFill>
+            <a:srgbClr val="FFFFFF"/>
+          </a:solidFill>
+          <a:ln w="11430">
+            <a:solidFill>
+              <a:srgbClr val="E7ECF3"/>
+            </a:solidFill>
+          </a:ln>
+          <a:effectLst>
+            <a:outerShdw blurRad="82296" dist="25603" dir="5400000" rotWithShape="0">
+              <a:srgbClr val="1B2A40">
+                <a:alpha val="11000"/>
+              </a:srgbClr>
+            </a:outerShdw>
+          </a:effectLst>
+        </p:spPr>
+        <p:style>
+          <a:lnRef idx="1">
+            <a:schemeClr val="accent1"/>
+          </a:lnRef>
+          <a:fillRef idx="3">
+            <a:schemeClr val="accent1"/>
+          </a:fillRef>
+          <a:effectRef idx="2">
+            <a:schemeClr val="accent1"/>
+          </a:effectRef>
+          <a:fontRef idx="minor">
+            <a:schemeClr val="lt1"/>
+          </a:fontRef>
+        </p:style>
+        <p:txBody>
+          <a:bodyPr rtlCol="0" anchor="ctr"/>
+          <a:lstStyle/>
+          <a:p>
+            <a:pPr algn="ctr"/>
+          </a:p>
+        </p:txBody>
+      </p:sp>
+      <p:sp>
+        <p:nvSpPr>
+          <p:cNvPr id="96" name="Oval 95"/>
+          <p:cNvSpPr/>
+          <p:nvPr/>
+        </p:nvSpPr>
+        <p:spPr>
+          <a:xfrm>
+            <a:off x="6452463" y="2340864"/>
+            <a:ext cx="210312" cy="210312"/>
+          </a:xfrm>
+          <a:prstGeom prst="ellipse">
+            <a:avLst/>
+          </a:prstGeom>
+          <a:solidFill>
+            <a:srgbClr val="BF515B"/>
+          </a:solidFill>
+          <a:ln>
+            <a:noFill/>
+          </a:ln>
+          <a:effectLst/>
+        </p:spPr>
+        <p:style>
+          <a:lnRef idx="1">
+            <a:schemeClr val="accent1"/>
+          </a:lnRef>
+          <a:fillRef idx="3">
+            <a:schemeClr val="accent1"/>
+          </a:fillRef>
+          <a:effectRef idx="2">
+            <a:schemeClr val="accent1"/>
+          </a:effectRef>
+          <a:fontRef idx="minor">
+            <a:schemeClr val="lt1"/>
+          </a:fontRef>
+        </p:style>
+        <p:txBody>
+          <a:bodyPr rtlCol="0" anchor="ctr"/>
+          <a:lstStyle/>
+          <a:p>
+            <a:pPr algn="ctr"/>
+          </a:p>
+        </p:txBody>
+      </p:sp>
+      <p:sp>
+        <p:nvSpPr>
+          <p:cNvPr id="97" name="TextBox 96"/>
+          <p:cNvSpPr txBox="1"/>
+          <p:nvPr/>
+        </p:nvSpPr>
+        <p:spPr>
+          <a:xfrm>
+            <a:off x="6452463" y="2340864"/>
+            <a:ext cx="210312" cy="210312"/>
+          </a:xfrm>
+          <a:prstGeom prst="rect">
+            <a:avLst/>
+          </a:prstGeom>
+          <a:noFill/>
+        </p:spPr>
+        <p:txBody>
+          <a:bodyPr wrap="square" lIns="0" rIns="0" tIns="0" bIns="0" anchor="ctr">
+            <a:spAutoFit/>
+          </a:bodyPr>
+          <a:lstStyle/>
+          <a:p>
+            <a:pPr algn="ctr">
+              <a:lnSpc>
+                <a:spcPct val="100000"/>
+              </a:lnSpc>
+            </a:pPr>
+            <a:r>
+              <a:rPr sz="950" b="1">
+                <a:solidFill>
+                  <a:srgbClr val="FFFFFF"/>
+                </a:solidFill>
+                <a:latin typeface="Helvetica Neue"/>
+              </a:rPr>
+              <a:t>5</a:t>
+            </a:r>
+          </a:p>
+        </p:txBody>
+      </p:sp>
+      <p:sp>
+        <p:nvSpPr>
+          <p:cNvPr id="98" name="TextBox 97"/>
+          <p:cNvSpPr txBox="1"/>
+          <p:nvPr/>
+        </p:nvSpPr>
+        <p:spPr>
+          <a:xfrm>
+            <a:off x="6681063" y="2340864"/>
+            <a:ext cx="155448" cy="210312"/>
+          </a:xfrm>
+          <a:prstGeom prst="rect">
+            <a:avLst/>
+          </a:prstGeom>
+          <a:noFill/>
+        </p:spPr>
+        <p:txBody>
+          <a:bodyPr wrap="square" lIns="0" rIns="0" tIns="0" bIns="0" anchor="ctr">
+            <a:spAutoFit/>
+          </a:bodyPr>
+          <a:lstStyle/>
+          <a:p>
+            <a:pPr algn="ctr">
+              <a:lnSpc>
+                <a:spcPct val="100000"/>
+              </a:lnSpc>
+            </a:pPr>
+            <a:r>
+              <a:rPr sz="1000" b="1">
+                <a:solidFill>
+                  <a:srgbClr val="93A0B2"/>
+                </a:solidFill>
+                <a:latin typeface="Helvetica Neue"/>
+              </a:rPr>
+              <a:t>→</a:t>
+            </a:r>
+          </a:p>
+        </p:txBody>
+      </p:sp>
+      <p:sp>
+        <p:nvSpPr>
+          <p:cNvPr id="99" name="Oval 98"/>
+          <p:cNvSpPr/>
+          <p:nvPr/>
+        </p:nvSpPr>
+        <p:spPr>
+          <a:xfrm>
+            <a:off x="6836511" y="2340864"/>
+            <a:ext cx="210312" cy="210312"/>
+          </a:xfrm>
+          <a:prstGeom prst="ellipse">
+            <a:avLst/>
+          </a:prstGeom>
+          <a:solidFill>
+            <a:srgbClr val="1657B0"/>
+          </a:solidFill>
+          <a:ln>
+            <a:noFill/>
+          </a:ln>
+          <a:effectLst/>
+        </p:spPr>
+        <p:style>
+          <a:lnRef idx="1">
+            <a:schemeClr val="accent1"/>
+          </a:lnRef>
+          <a:fillRef idx="3">
+            <a:schemeClr val="accent1"/>
+          </a:fillRef>
+          <a:effectRef idx="2">
+            <a:schemeClr val="accent1"/>
+          </a:effectRef>
+          <a:fontRef idx="minor">
+            <a:schemeClr val="lt1"/>
+          </a:fontRef>
+        </p:style>
+        <p:txBody>
+          <a:bodyPr rtlCol="0" anchor="ctr"/>
+          <a:lstStyle/>
+          <a:p>
+            <a:pPr algn="ctr"/>
+          </a:p>
+        </p:txBody>
+      </p:sp>
+      <p:sp>
+        <p:nvSpPr>
+          <p:cNvPr id="100" name="TextBox 99"/>
+          <p:cNvSpPr txBox="1"/>
+          <p:nvPr/>
+        </p:nvSpPr>
+        <p:spPr>
+          <a:xfrm>
+            <a:off x="6836511" y="2340864"/>
+            <a:ext cx="210312" cy="210312"/>
+          </a:xfrm>
+          <a:prstGeom prst="rect">
+            <a:avLst/>
+          </a:prstGeom>
+          <a:noFill/>
+        </p:spPr>
+        <p:txBody>
+          <a:bodyPr wrap="square" lIns="0" rIns="0" tIns="0" bIns="0" anchor="ctr">
+            <a:spAutoFit/>
+          </a:bodyPr>
+          <a:lstStyle/>
+          <a:p>
+            <a:pPr algn="ctr">
+              <a:lnSpc>
+                <a:spcPct val="100000"/>
+              </a:lnSpc>
+            </a:pPr>
+            <a:r>
+              <a:rPr sz="950" b="1">
+                <a:solidFill>
+                  <a:srgbClr val="FFFFFF"/>
+                </a:solidFill>
+                <a:latin typeface="Helvetica Neue"/>
+              </a:rPr>
+              <a:t>6</a:t>
+            </a:r>
+          </a:p>
+        </p:txBody>
+      </p:sp>
+      <p:sp>
+        <p:nvSpPr>
+          <p:cNvPr id="101" name="TextBox 100"/>
+          <p:cNvSpPr txBox="1"/>
+          <p:nvPr/>
+        </p:nvSpPr>
+        <p:spPr>
+          <a:xfrm>
+            <a:off x="7147407" y="2331720"/>
+            <a:ext cx="2712567" cy="228600"/>
+          </a:xfrm>
+          <a:prstGeom prst="rect">
+            <a:avLst/>
+          </a:prstGeom>
+          <a:noFill/>
+        </p:spPr>
+        <p:txBody>
+          <a:bodyPr wrap="square" lIns="0" rIns="0" tIns="0" bIns="0" anchor="ctr">
+            <a:spAutoFit/>
+          </a:bodyPr>
+          <a:lstStyle/>
+          <a:p>
+            <a:pPr algn="l">
+              <a:lnSpc>
+                <a:spcPct val="100000"/>
+              </a:lnSpc>
+            </a:pPr>
+            <a:r>
+              <a:rPr sz="1050" b="1">
+                <a:solidFill>
+                  <a:srgbClr val="16202E"/>
+                </a:solidFill>
+                <a:latin typeface="Helvetica Neue"/>
+              </a:rPr>
+              <a:t>Guardrail → Build</a:t>
+            </a:r>
+          </a:p>
+        </p:txBody>
+      </p:sp>
+      <p:sp>
+        <p:nvSpPr>
+          <p:cNvPr id="102" name="TextBox 101"/>
+          <p:cNvSpPr txBox="1"/>
+          <p:nvPr/>
+        </p:nvSpPr>
+        <p:spPr>
+          <a:xfrm>
+            <a:off x="9978847" y="2331720"/>
+            <a:ext cx="1627632" cy="228600"/>
+          </a:xfrm>
+          <a:prstGeom prst="rect">
+            <a:avLst/>
+          </a:prstGeom>
+          <a:noFill/>
+        </p:spPr>
+        <p:txBody>
+          <a:bodyPr wrap="square" lIns="0" rIns="0" tIns="0" bIns="0" anchor="ctr">
+            <a:spAutoFit/>
+          </a:bodyPr>
+          <a:lstStyle/>
+          <a:p>
+            <a:pPr algn="r">
+              <a:lnSpc>
+                <a:spcPct val="100000"/>
+              </a:lnSpc>
+            </a:pPr>
+            <a:r>
+              <a:rPr sz="750" b="0">
+                <a:solidFill>
+                  <a:srgbClr val="93A0B2"/>
+                </a:solidFill>
+                <a:latin typeface="Menlo"/>
+              </a:rPr>
+              <a:t>Gate → MCP</a:t>
+            </a:r>
+          </a:p>
+        </p:txBody>
+      </p:sp>
+      <p:sp>
+        <p:nvSpPr>
+          <p:cNvPr id="103" name="TextBox 102"/>
+          <p:cNvSpPr txBox="1"/>
+          <p:nvPr/>
+        </p:nvSpPr>
+        <p:spPr>
+          <a:xfrm>
+            <a:off x="6479895" y="2633472"/>
+            <a:ext cx="5117439" cy="155448"/>
+          </a:xfrm>
+          <a:prstGeom prst="rect">
+            <a:avLst/>
+          </a:prstGeom>
+          <a:noFill/>
+        </p:spPr>
+        <p:txBody>
+          <a:bodyPr wrap="square" lIns="0" rIns="0" tIns="0" bIns="0" anchor="t">
+            <a:spAutoFit/>
+          </a:bodyPr>
+          <a:lstStyle/>
+          <a:p>
+            <a:pPr algn="l">
+              <a:lnSpc>
+                <a:spcPct val="100000"/>
+              </a:lnSpc>
+            </a:pPr>
+            <a:r>
+              <a:rPr sz="730" b="1">
+                <a:solidFill>
+                  <a:srgbClr val="1657B0"/>
+                </a:solidFill>
+                <a:latin typeface="Menlo"/>
+              </a:rPr>
+              <a:t>trigger  </a:t>
+            </a:r>
+            <a:r>
+              <a:rPr sz="800" b="0">
+                <a:solidFill>
+                  <a:srgbClr val="51617A"/>
+                </a:solidFill>
+                <a:latin typeface="Helvetica Neue"/>
+              </a:rPr>
+              <a:t>your approved plan</a:t>
+            </a:r>
+          </a:p>
+        </p:txBody>
+      </p:sp>
+      <p:sp>
+        <p:nvSpPr>
+          <p:cNvPr id="104" name="TextBox 103"/>
+          <p:cNvSpPr txBox="1"/>
+          <p:nvPr/>
+        </p:nvSpPr>
+        <p:spPr>
+          <a:xfrm>
+            <a:off x="6479895" y="2775203"/>
+            <a:ext cx="5117439" cy="155448"/>
+          </a:xfrm>
+          <a:prstGeom prst="rect">
+            <a:avLst/>
+          </a:prstGeom>
+          <a:noFill/>
+        </p:spPr>
+        <p:txBody>
+          <a:bodyPr wrap="square" lIns="0" rIns="0" tIns="0" bIns="0" anchor="t">
+            <a:spAutoFit/>
+          </a:bodyPr>
+          <a:lstStyle/>
+          <a:p>
+            <a:pPr algn="l">
+              <a:lnSpc>
+                <a:spcPct val="100000"/>
+              </a:lnSpc>
+            </a:pPr>
+            <a:r>
+              <a:rPr sz="730" b="1">
+                <a:solidFill>
+                  <a:srgbClr val="1657B0"/>
+                </a:solidFill>
+                <a:latin typeface="Menlo"/>
+              </a:rPr>
+              <a:t>passes  </a:t>
+            </a:r>
+            <a:r>
+              <a:rPr sz="800" b="0">
+                <a:solidFill>
+                  <a:srgbClr val="51617A"/>
+                </a:solidFill>
+                <a:latin typeface="Helvetica Neue"/>
+              </a:rPr>
+              <a:t>confirmed components + layers</a:t>
+            </a:r>
+          </a:p>
+        </p:txBody>
+      </p:sp>
+      <p:sp>
+        <p:nvSpPr>
+          <p:cNvPr id="105" name="TextBox 104"/>
+          <p:cNvSpPr txBox="1"/>
+          <p:nvPr/>
+        </p:nvSpPr>
+        <p:spPr>
+          <a:xfrm>
+            <a:off x="6479895" y="2916935"/>
+            <a:ext cx="5117439" cy="155448"/>
+          </a:xfrm>
+          <a:prstGeom prst="rect">
+            <a:avLst/>
+          </a:prstGeom>
+          <a:noFill/>
+        </p:spPr>
+        <p:txBody>
+          <a:bodyPr wrap="square" lIns="0" rIns="0" tIns="0" bIns="0" anchor="t">
+            <a:spAutoFit/>
+          </a:bodyPr>
+          <a:lstStyle/>
+          <a:p>
+            <a:pPr algn="l">
+              <a:lnSpc>
+                <a:spcPct val="100000"/>
+              </a:lnSpc>
+            </a:pPr>
+            <a:r>
+              <a:rPr sz="730" b="1">
+                <a:solidFill>
+                  <a:srgbClr val="1657B0"/>
+                </a:solidFill>
+                <a:latin typeface="Menlo"/>
+              </a:rPr>
+              <a:t>does  </a:t>
+            </a:r>
+            <a:r>
+              <a:rPr sz="800" b="0">
+                <a:solidFill>
+                  <a:srgbClr val="51617A"/>
+                </a:solidFill>
+                <a:latin typeface="Helvetica Neue"/>
+              </a:rPr>
+              <a:t>create_diagram → add_container → add_node → add_edge</a:t>
+            </a:r>
+          </a:p>
+        </p:txBody>
+      </p:sp>
+      <p:sp>
+        <p:nvSpPr>
+          <p:cNvPr id="106" name="Rounded Rectangle 105"/>
+          <p:cNvSpPr/>
+          <p:nvPr/>
+        </p:nvSpPr>
+        <p:spPr>
+          <a:xfrm>
+            <a:off x="6324447" y="3076956"/>
+            <a:ext cx="5410047" cy="786384"/>
+          </a:xfrm>
+          <a:prstGeom prst="roundRect">
+            <a:avLst>
+              <a:gd name="adj" fmla="val 5000"/>
+            </a:avLst>
+          </a:prstGeom>
+          <a:solidFill>
+            <a:srgbClr val="FFFFFF"/>
+          </a:solidFill>
+          <a:ln w="11430">
+            <a:solidFill>
+              <a:srgbClr val="E7ECF3"/>
+            </a:solidFill>
+          </a:ln>
+          <a:effectLst>
+            <a:outerShdw blurRad="82296" dist="25603" dir="5400000" rotWithShape="0">
+              <a:srgbClr val="1B2A40">
+                <a:alpha val="11000"/>
+              </a:srgbClr>
+            </a:outerShdw>
+          </a:effectLst>
+        </p:spPr>
+        <p:style>
+          <a:lnRef idx="1">
+            <a:schemeClr val="accent1"/>
+          </a:lnRef>
+          <a:fillRef idx="3">
+            <a:schemeClr val="accent1"/>
+          </a:fillRef>
+          <a:effectRef idx="2">
+            <a:schemeClr val="accent1"/>
+          </a:effectRef>
+          <a:fontRef idx="minor">
+            <a:schemeClr val="lt1"/>
+          </a:fontRef>
+        </p:style>
+        <p:txBody>
+          <a:bodyPr rtlCol="0" anchor="ctr"/>
+          <a:lstStyle/>
+          <a:p>
+            <a:pPr algn="ctr"/>
+          </a:p>
+        </p:txBody>
+      </p:sp>
+      <p:sp>
+        <p:nvSpPr>
+          <p:cNvPr id="107" name="Oval 106"/>
+          <p:cNvSpPr/>
+          <p:nvPr/>
+        </p:nvSpPr>
+        <p:spPr>
+          <a:xfrm>
+            <a:off x="6452463" y="3186684"/>
+            <a:ext cx="210312" cy="210312"/>
+          </a:xfrm>
+          <a:prstGeom prst="ellipse">
+            <a:avLst/>
+          </a:prstGeom>
+          <a:solidFill>
+            <a:srgbClr val="1657B0"/>
+          </a:solidFill>
+          <a:ln>
+            <a:noFill/>
+          </a:ln>
+          <a:effectLst/>
+        </p:spPr>
+        <p:style>
+          <a:lnRef idx="1">
+            <a:schemeClr val="accent1"/>
+          </a:lnRef>
+          <a:fillRef idx="3">
+            <a:schemeClr val="accent1"/>
+          </a:fillRef>
+          <a:effectRef idx="2">
+            <a:schemeClr val="accent1"/>
+          </a:effectRef>
+          <a:fontRef idx="minor">
+            <a:schemeClr val="lt1"/>
+          </a:fontRef>
+        </p:style>
+        <p:txBody>
+          <a:bodyPr rtlCol="0" anchor="ctr"/>
+          <a:lstStyle/>
+          <a:p>
+            <a:pPr algn="ctr"/>
+          </a:p>
+        </p:txBody>
+      </p:sp>
+      <p:sp>
+        <p:nvSpPr>
+          <p:cNvPr id="108" name="TextBox 107"/>
+          <p:cNvSpPr txBox="1"/>
+          <p:nvPr/>
+        </p:nvSpPr>
+        <p:spPr>
+          <a:xfrm>
+            <a:off x="6452463" y="3186684"/>
+            <a:ext cx="210312" cy="210312"/>
+          </a:xfrm>
+          <a:prstGeom prst="rect">
+            <a:avLst/>
+          </a:prstGeom>
+          <a:noFill/>
+        </p:spPr>
+        <p:txBody>
+          <a:bodyPr wrap="square" lIns="0" rIns="0" tIns="0" bIns="0" anchor="ctr">
+            <a:spAutoFit/>
+          </a:bodyPr>
+          <a:lstStyle/>
+          <a:p>
+            <a:pPr algn="ctr">
+              <a:lnSpc>
+                <a:spcPct val="100000"/>
+              </a:lnSpc>
+            </a:pPr>
+            <a:r>
+              <a:rPr sz="950" b="1">
+                <a:solidFill>
+                  <a:srgbClr val="FFFFFF"/>
+                </a:solidFill>
+                <a:latin typeface="Helvetica Neue"/>
+              </a:rPr>
+              <a:t>6</a:t>
+            </a:r>
+          </a:p>
+        </p:txBody>
+      </p:sp>
+      <p:sp>
+        <p:nvSpPr>
+          <p:cNvPr id="109" name="TextBox 108"/>
+          <p:cNvSpPr txBox="1"/>
+          <p:nvPr/>
+        </p:nvSpPr>
+        <p:spPr>
+          <a:xfrm>
+            <a:off x="6681063" y="3186684"/>
+            <a:ext cx="155448" cy="210312"/>
+          </a:xfrm>
+          <a:prstGeom prst="rect">
+            <a:avLst/>
+          </a:prstGeom>
+          <a:noFill/>
+        </p:spPr>
+        <p:txBody>
+          <a:bodyPr wrap="square" lIns="0" rIns="0" tIns="0" bIns="0" anchor="ctr">
+            <a:spAutoFit/>
+          </a:bodyPr>
+          <a:lstStyle/>
+          <a:p>
+            <a:pPr algn="ctr">
+              <a:lnSpc>
+                <a:spcPct val="100000"/>
+              </a:lnSpc>
+            </a:pPr>
+            <a:r>
+              <a:rPr sz="1000" b="1">
+                <a:solidFill>
+                  <a:srgbClr val="93A0B2"/>
+                </a:solidFill>
+                <a:latin typeface="Helvetica Neue"/>
+              </a:rPr>
+              <a:t>→</a:t>
+            </a:r>
+          </a:p>
+        </p:txBody>
+      </p:sp>
+      <p:sp>
+        <p:nvSpPr>
+          <p:cNvPr id="110" name="Oval 109"/>
+          <p:cNvSpPr/>
+          <p:nvPr/>
+        </p:nvSpPr>
+        <p:spPr>
+          <a:xfrm>
+            <a:off x="6836511" y="3186684"/>
+            <a:ext cx="210312" cy="210312"/>
+          </a:xfrm>
+          <a:prstGeom prst="ellipse">
+            <a:avLst/>
+          </a:prstGeom>
+          <a:solidFill>
+            <a:srgbClr val="2E8C6A"/>
+          </a:solidFill>
+          <a:ln>
+            <a:noFill/>
+          </a:ln>
+          <a:effectLst/>
+        </p:spPr>
+        <p:style>
+          <a:lnRef idx="1">
+            <a:schemeClr val="accent1"/>
+          </a:lnRef>
+          <a:fillRef idx="3">
+            <a:schemeClr val="accent1"/>
+          </a:fillRef>
+          <a:effectRef idx="2">
+            <a:schemeClr val="accent1"/>
+          </a:effectRef>
+          <a:fontRef idx="minor">
+            <a:schemeClr val="lt1"/>
+          </a:fontRef>
+        </p:style>
+        <p:txBody>
+          <a:bodyPr rtlCol="0" anchor="ctr"/>
+          <a:lstStyle/>
+          <a:p>
+            <a:pPr algn="ctr"/>
+          </a:p>
+        </p:txBody>
+      </p:sp>
+      <p:sp>
+        <p:nvSpPr>
+          <p:cNvPr id="111" name="TextBox 110"/>
+          <p:cNvSpPr txBox="1"/>
+          <p:nvPr/>
+        </p:nvSpPr>
+        <p:spPr>
+          <a:xfrm>
+            <a:off x="6836511" y="3186684"/>
+            <a:ext cx="210312" cy="210312"/>
+          </a:xfrm>
+          <a:prstGeom prst="rect">
+            <a:avLst/>
+          </a:prstGeom>
+          <a:noFill/>
+        </p:spPr>
+        <p:txBody>
+          <a:bodyPr wrap="square" lIns="0" rIns="0" tIns="0" bIns="0" anchor="ctr">
+            <a:spAutoFit/>
+          </a:bodyPr>
+          <a:lstStyle/>
+          <a:p>
+            <a:pPr algn="ctr">
+              <a:lnSpc>
+                <a:spcPct val="100000"/>
+              </a:lnSpc>
+            </a:pPr>
+            <a:r>
+              <a:rPr sz="950" b="1">
+                <a:solidFill>
+                  <a:srgbClr val="FFFFFF"/>
+                </a:solidFill>
+                <a:latin typeface="Helvetica Neue"/>
+              </a:rPr>
+              <a:t>7</a:t>
+            </a:r>
+          </a:p>
+        </p:txBody>
+      </p:sp>
+      <p:sp>
+        <p:nvSpPr>
+          <p:cNvPr id="112" name="TextBox 111"/>
+          <p:cNvSpPr txBox="1"/>
+          <p:nvPr/>
+        </p:nvSpPr>
+        <p:spPr>
+          <a:xfrm>
+            <a:off x="7147407" y="3177540"/>
+            <a:ext cx="2712567" cy="228600"/>
+          </a:xfrm>
+          <a:prstGeom prst="rect">
+            <a:avLst/>
+          </a:prstGeom>
+          <a:noFill/>
+        </p:spPr>
+        <p:txBody>
+          <a:bodyPr wrap="square" lIns="0" rIns="0" tIns="0" bIns="0" anchor="ctr">
+            <a:spAutoFit/>
+          </a:bodyPr>
+          <a:lstStyle/>
+          <a:p>
+            <a:pPr algn="l">
+              <a:lnSpc>
+                <a:spcPct val="100000"/>
+              </a:lnSpc>
+            </a:pPr>
+            <a:r>
+              <a:rPr sz="1050" b="1">
+                <a:solidFill>
+                  <a:srgbClr val="16202E"/>
+                </a:solidFill>
+                <a:latin typeface="Helvetica Neue"/>
+              </a:rPr>
+              <a:t>Build → Verify</a:t>
+            </a:r>
+          </a:p>
+        </p:txBody>
+      </p:sp>
+      <p:sp>
+        <p:nvSpPr>
+          <p:cNvPr id="113" name="TextBox 112"/>
+          <p:cNvSpPr txBox="1"/>
+          <p:nvPr/>
+        </p:nvSpPr>
+        <p:spPr>
+          <a:xfrm>
+            <a:off x="9978847" y="3177540"/>
+            <a:ext cx="1627632" cy="228600"/>
+          </a:xfrm>
+          <a:prstGeom prst="rect">
+            <a:avLst/>
+          </a:prstGeom>
+          <a:noFill/>
+        </p:spPr>
+        <p:txBody>
+          <a:bodyPr wrap="square" lIns="0" rIns="0" tIns="0" bIns="0" anchor="ctr">
+            <a:spAutoFit/>
+          </a:bodyPr>
+          <a:lstStyle/>
+          <a:p>
+            <a:pPr algn="r">
+              <a:lnSpc>
+                <a:spcPct val="100000"/>
+              </a:lnSpc>
+            </a:pPr>
+            <a:r>
+              <a:rPr sz="750" b="0">
+                <a:solidFill>
+                  <a:srgbClr val="93A0B2"/>
+                </a:solidFill>
+                <a:latin typeface="Menlo"/>
+              </a:rPr>
+              <a:t>MCP → Terminal</a:t>
+            </a:r>
+          </a:p>
+        </p:txBody>
+      </p:sp>
+      <p:sp>
+        <p:nvSpPr>
+          <p:cNvPr id="114" name="TextBox 113"/>
+          <p:cNvSpPr txBox="1"/>
+          <p:nvPr/>
+        </p:nvSpPr>
+        <p:spPr>
+          <a:xfrm>
+            <a:off x="6479895" y="3479292"/>
+            <a:ext cx="5117439" cy="155448"/>
+          </a:xfrm>
+          <a:prstGeom prst="rect">
+            <a:avLst/>
+          </a:prstGeom>
+          <a:noFill/>
+        </p:spPr>
+        <p:txBody>
+          <a:bodyPr wrap="square" lIns="0" rIns="0" tIns="0" bIns="0" anchor="t">
+            <a:spAutoFit/>
+          </a:bodyPr>
+          <a:lstStyle/>
+          <a:p>
+            <a:pPr algn="l">
+              <a:lnSpc>
+                <a:spcPct val="100000"/>
+              </a:lnSpc>
+            </a:pPr>
+            <a:r>
+              <a:rPr sz="730" b="1">
+                <a:solidFill>
+                  <a:srgbClr val="1657B0"/>
+                </a:solidFill>
+                <a:latin typeface="Menlo"/>
+              </a:rPr>
+              <a:t>trigger  </a:t>
+            </a:r>
+            <a:r>
+              <a:rPr sz="800" b="0">
+                <a:solidFill>
+                  <a:srgbClr val="51617A"/>
+                </a:solidFill>
+                <a:latin typeface="Helvetica Neue"/>
+              </a:rPr>
+              <a:t>verify_mcp.py --diagram &lt;file&gt;</a:t>
+            </a:r>
+          </a:p>
+        </p:txBody>
+      </p:sp>
+      <p:sp>
+        <p:nvSpPr>
+          <p:cNvPr id="115" name="TextBox 114"/>
+          <p:cNvSpPr txBox="1"/>
+          <p:nvPr/>
+        </p:nvSpPr>
+        <p:spPr>
+          <a:xfrm>
+            <a:off x="6479895" y="3621024"/>
+            <a:ext cx="5117439" cy="155448"/>
+          </a:xfrm>
+          <a:prstGeom prst="rect">
+            <a:avLst/>
+          </a:prstGeom>
+          <a:noFill/>
+        </p:spPr>
+        <p:txBody>
+          <a:bodyPr wrap="square" lIns="0" rIns="0" tIns="0" bIns="0" anchor="t">
+            <a:spAutoFit/>
+          </a:bodyPr>
+          <a:lstStyle/>
+          <a:p>
+            <a:pPr algn="l">
+              <a:lnSpc>
+                <a:spcPct val="100000"/>
+              </a:lnSpc>
+            </a:pPr>
+            <a:r>
+              <a:rPr sz="730" b="1">
+                <a:solidFill>
+                  <a:srgbClr val="1657B0"/>
+                </a:solidFill>
+                <a:latin typeface="Menlo"/>
+              </a:rPr>
+              <a:t>passes  </a:t>
+            </a:r>
+            <a:r>
+              <a:rPr sz="800" b="0">
+                <a:solidFill>
+                  <a:srgbClr val="51617A"/>
+                </a:solidFill>
+                <a:latin typeface="Helvetica Neue"/>
+              </a:rPr>
+              <a:t>draft &lt;KEY&gt;-&lt;ts&gt;.drawio</a:t>
+            </a:r>
+          </a:p>
+        </p:txBody>
+      </p:sp>
+      <p:sp>
+        <p:nvSpPr>
+          <p:cNvPr id="116" name="TextBox 115"/>
+          <p:cNvSpPr txBox="1"/>
+          <p:nvPr/>
+        </p:nvSpPr>
+        <p:spPr>
+          <a:xfrm>
+            <a:off x="6479895" y="3762756"/>
+            <a:ext cx="5117439" cy="155448"/>
+          </a:xfrm>
+          <a:prstGeom prst="rect">
+            <a:avLst/>
+          </a:prstGeom>
+          <a:noFill/>
+        </p:spPr>
+        <p:txBody>
+          <a:bodyPr wrap="square" lIns="0" rIns="0" tIns="0" bIns="0" anchor="t">
+            <a:spAutoFit/>
+          </a:bodyPr>
+          <a:lstStyle/>
+          <a:p>
+            <a:pPr algn="l">
+              <a:lnSpc>
+                <a:spcPct val="100000"/>
+              </a:lnSpc>
+            </a:pPr>
+            <a:r>
+              <a:rPr sz="730" b="1">
+                <a:solidFill>
+                  <a:srgbClr val="1657B0"/>
+                </a:solidFill>
+                <a:latin typeface="Menlo"/>
+              </a:rPr>
+              <a:t>does  </a:t>
+            </a:r>
+            <a:r>
+              <a:rPr sz="800" b="0">
+                <a:solidFill>
+                  <a:srgbClr val="51617A"/>
+                </a:solidFill>
+                <a:latin typeface="Helvetica Neue"/>
+              </a:rPr>
+              <a:t>check edges · labels · icons · arrows · fan-out</a:t>
+            </a:r>
+          </a:p>
+        </p:txBody>
+      </p:sp>
+      <p:sp>
+        <p:nvSpPr>
+          <p:cNvPr id="117" name="Rounded Rectangle 116"/>
+          <p:cNvSpPr/>
+          <p:nvPr/>
+        </p:nvSpPr>
+        <p:spPr>
+          <a:xfrm>
+            <a:off x="6324447" y="3922776"/>
+            <a:ext cx="5410047" cy="786384"/>
+          </a:xfrm>
+          <a:prstGeom prst="roundRect">
+            <a:avLst>
+              <a:gd name="adj" fmla="val 5000"/>
+            </a:avLst>
+          </a:prstGeom>
+          <a:solidFill>
+            <a:srgbClr val="FFFFFF"/>
+          </a:solidFill>
+          <a:ln w="21590">
+            <a:solidFill>
+              <a:srgbClr val="2E8C6A"/>
+            </a:solidFill>
+          </a:ln>
+          <a:effectLst>
+            <a:outerShdw blurRad="82296" dist="25603" dir="5400000" rotWithShape="0">
+              <a:srgbClr val="1B2A40">
+                <a:alpha val="11000"/>
+              </a:srgbClr>
+            </a:outerShdw>
+          </a:effectLst>
+        </p:spPr>
+        <p:style>
+          <a:lnRef idx="1">
+            <a:schemeClr val="accent1"/>
+          </a:lnRef>
+          <a:fillRef idx="3">
+            <a:schemeClr val="accent1"/>
+          </a:fillRef>
+          <a:effectRef idx="2">
+            <a:schemeClr val="accent1"/>
+          </a:effectRef>
+          <a:fontRef idx="minor">
+            <a:schemeClr val="lt1"/>
+          </a:fontRef>
+        </p:style>
+        <p:txBody>
+          <a:bodyPr rtlCol="0" anchor="ctr"/>
+          <a:lstStyle/>
+          <a:p>
+            <a:pPr algn="ctr"/>
+          </a:p>
+        </p:txBody>
+      </p:sp>
+      <p:sp>
+        <p:nvSpPr>
+          <p:cNvPr id="118" name="TextBox 117"/>
+          <p:cNvSpPr txBox="1"/>
+          <p:nvPr/>
+        </p:nvSpPr>
+        <p:spPr>
+          <a:xfrm>
+            <a:off x="6479895" y="4023360"/>
+            <a:ext cx="5117439" cy="219456"/>
+          </a:xfrm>
+          <a:prstGeom prst="rect">
+            <a:avLst/>
+          </a:prstGeom>
+          <a:noFill/>
+        </p:spPr>
+        <p:txBody>
+          <a:bodyPr wrap="square" lIns="0" rIns="0" tIns="0" bIns="0" anchor="ctr">
+            <a:spAutoFit/>
+          </a:bodyPr>
+          <a:lstStyle/>
+          <a:p>
+            <a:pPr algn="l">
+              <a:lnSpc>
+                <a:spcPct val="100000"/>
+              </a:lnSpc>
+            </a:pPr>
+            <a:r>
+              <a:rPr sz="1000" b="1" spc="50">
+                <a:solidFill>
+                  <a:srgbClr val="2E8C6A"/>
+                </a:solidFill>
+                <a:latin typeface="Menlo"/>
+              </a:rPr>
+              <a:t>◆ GATE · Verify (stage 7)</a:t>
+            </a:r>
+          </a:p>
+        </p:txBody>
+      </p:sp>
+      <p:sp>
+        <p:nvSpPr>
+          <p:cNvPr id="119" name="TextBox 118"/>
+          <p:cNvSpPr txBox="1"/>
+          <p:nvPr/>
+        </p:nvSpPr>
+        <p:spPr>
+          <a:xfrm>
+            <a:off x="6479895" y="4315968"/>
+            <a:ext cx="5117439" cy="164592"/>
+          </a:xfrm>
+          <a:prstGeom prst="rect">
+            <a:avLst/>
+          </a:prstGeom>
+          <a:noFill/>
+        </p:spPr>
+        <p:txBody>
+          <a:bodyPr wrap="square" lIns="0" rIns="0" tIns="0" bIns="0" anchor="t">
+            <a:spAutoFit/>
+          </a:bodyPr>
+          <a:lstStyle/>
+          <a:p>
+            <a:pPr algn="l">
+              <a:lnSpc>
+                <a:spcPct val="100000"/>
+              </a:lnSpc>
+            </a:pPr>
+            <a:r>
+              <a:rPr sz="750" b="1">
+                <a:solidFill>
+                  <a:srgbClr val="2E8C6A"/>
+                </a:solidFill>
+                <a:latin typeface="Menlo"/>
+              </a:rPr>
+              <a:t>PASS  </a:t>
+            </a:r>
+            <a:r>
+              <a:rPr sz="800" b="0">
+                <a:solidFill>
+                  <a:srgbClr val="51617A"/>
+                </a:solidFill>
+                <a:latin typeface="Helvetica Neue"/>
+              </a:rPr>
+              <a:t>exit 0 → continue to Document</a:t>
+            </a:r>
+          </a:p>
+        </p:txBody>
+      </p:sp>
+      <p:sp>
+        <p:nvSpPr>
+          <p:cNvPr id="120" name="TextBox 119"/>
+          <p:cNvSpPr txBox="1"/>
+          <p:nvPr/>
+        </p:nvSpPr>
+        <p:spPr>
+          <a:xfrm>
+            <a:off x="6479895" y="4498848"/>
+            <a:ext cx="5117439" cy="164592"/>
+          </a:xfrm>
+          <a:prstGeom prst="rect">
+            <a:avLst/>
+          </a:prstGeom>
+          <a:noFill/>
+        </p:spPr>
+        <p:txBody>
+          <a:bodyPr wrap="square" lIns="0" rIns="0" tIns="0" bIns="0" anchor="t">
+            <a:spAutoFit/>
+          </a:bodyPr>
+          <a:lstStyle/>
+          <a:p>
+            <a:pPr algn="l">
+              <a:lnSpc>
+                <a:spcPct val="100000"/>
+              </a:lnSpc>
+            </a:pPr>
+            <a:r>
+              <a:rPr sz="750" b="1">
+                <a:solidFill>
+                  <a:srgbClr val="BF515B"/>
+                </a:solidFill>
+                <a:latin typeface="Menlo"/>
+              </a:rPr>
+              <a:t>FAIL  </a:t>
+            </a:r>
+            <a:r>
+              <a:rPr sz="800" b="0">
+                <a:solidFill>
+                  <a:srgbClr val="51617A"/>
+                </a:solidFill>
+                <a:latin typeface="Helvetica Neue"/>
+              </a:rPr>
+              <a:t>exit 2 → fix (update_node / remove_element) · re-verify (loop)</a:t>
+            </a:r>
+          </a:p>
+        </p:txBody>
+      </p:sp>
+      <p:sp>
+        <p:nvSpPr>
+          <p:cNvPr id="121" name="Rounded Rectangle 120"/>
+          <p:cNvSpPr/>
+          <p:nvPr/>
+        </p:nvSpPr>
+        <p:spPr>
+          <a:xfrm>
+            <a:off x="6324447" y="4768596"/>
+            <a:ext cx="5410047" cy="786384"/>
+          </a:xfrm>
+          <a:prstGeom prst="roundRect">
+            <a:avLst>
+              <a:gd name="adj" fmla="val 5000"/>
+            </a:avLst>
+          </a:prstGeom>
+          <a:solidFill>
+            <a:srgbClr val="FFFFFF"/>
+          </a:solidFill>
+          <a:ln w="11430">
+            <a:solidFill>
+              <a:srgbClr val="E7ECF3"/>
+            </a:solidFill>
+          </a:ln>
+          <a:effectLst>
+            <a:outerShdw blurRad="82296" dist="25603" dir="5400000" rotWithShape="0">
+              <a:srgbClr val="1B2A40">
+                <a:alpha val="11000"/>
+              </a:srgbClr>
+            </a:outerShdw>
+          </a:effectLst>
+        </p:spPr>
+        <p:style>
+          <a:lnRef idx="1">
+            <a:schemeClr val="accent1"/>
+          </a:lnRef>
+          <a:fillRef idx="3">
+            <a:schemeClr val="accent1"/>
+          </a:fillRef>
+          <a:effectRef idx="2">
+            <a:schemeClr val="accent1"/>
+          </a:effectRef>
+          <a:fontRef idx="minor">
+            <a:schemeClr val="lt1"/>
+          </a:fontRef>
+        </p:style>
+        <p:txBody>
+          <a:bodyPr rtlCol="0" anchor="ctr"/>
+          <a:lstStyle/>
+          <a:p>
+            <a:pPr algn="ctr"/>
+          </a:p>
+        </p:txBody>
+      </p:sp>
+      <p:sp>
+        <p:nvSpPr>
+          <p:cNvPr id="122" name="Oval 121"/>
+          <p:cNvSpPr/>
+          <p:nvPr/>
+        </p:nvSpPr>
+        <p:spPr>
+          <a:xfrm>
+            <a:off x="6452463" y="4878324"/>
+            <a:ext cx="210312" cy="210312"/>
+          </a:xfrm>
+          <a:prstGeom prst="ellipse">
+            <a:avLst/>
+          </a:prstGeom>
+          <a:solidFill>
+            <a:srgbClr val="2E8C6A"/>
+          </a:solidFill>
+          <a:ln>
+            <a:noFill/>
+          </a:ln>
+          <a:effectLst/>
+        </p:spPr>
+        <p:style>
+          <a:lnRef idx="1">
+            <a:schemeClr val="accent1"/>
+          </a:lnRef>
+          <a:fillRef idx="3">
+            <a:schemeClr val="accent1"/>
+          </a:fillRef>
+          <a:effectRef idx="2">
+            <a:schemeClr val="accent1"/>
+          </a:effectRef>
+          <a:fontRef idx="minor">
+            <a:schemeClr val="lt1"/>
+          </a:fontRef>
+        </p:style>
+        <p:txBody>
+          <a:bodyPr rtlCol="0" anchor="ctr"/>
+          <a:lstStyle/>
+          <a:p>
+            <a:pPr algn="ctr"/>
+          </a:p>
+        </p:txBody>
+      </p:sp>
+      <p:sp>
+        <p:nvSpPr>
+          <p:cNvPr id="123" name="TextBox 122"/>
+          <p:cNvSpPr txBox="1"/>
+          <p:nvPr/>
+        </p:nvSpPr>
+        <p:spPr>
+          <a:xfrm>
+            <a:off x="6452463" y="4878324"/>
+            <a:ext cx="210312" cy="210312"/>
+          </a:xfrm>
+          <a:prstGeom prst="rect">
+            <a:avLst/>
+          </a:prstGeom>
+          <a:noFill/>
+        </p:spPr>
+        <p:txBody>
+          <a:bodyPr wrap="square" lIns="0" rIns="0" tIns="0" bIns="0" anchor="ctr">
+            <a:spAutoFit/>
+          </a:bodyPr>
+          <a:lstStyle/>
+          <a:p>
+            <a:pPr algn="ctr">
+              <a:lnSpc>
+                <a:spcPct val="100000"/>
+              </a:lnSpc>
+            </a:pPr>
+            <a:r>
+              <a:rPr sz="950" b="1">
+                <a:solidFill>
+                  <a:srgbClr val="FFFFFF"/>
+                </a:solidFill>
+                <a:latin typeface="Helvetica Neue"/>
+              </a:rPr>
+              <a:t>7</a:t>
+            </a:r>
+          </a:p>
+        </p:txBody>
+      </p:sp>
+      <p:sp>
+        <p:nvSpPr>
+          <p:cNvPr id="124" name="TextBox 123"/>
+          <p:cNvSpPr txBox="1"/>
+          <p:nvPr/>
+        </p:nvSpPr>
+        <p:spPr>
+          <a:xfrm>
+            <a:off x="6681063" y="4878324"/>
+            <a:ext cx="155448" cy="210312"/>
+          </a:xfrm>
+          <a:prstGeom prst="rect">
+            <a:avLst/>
+          </a:prstGeom>
+          <a:noFill/>
+        </p:spPr>
+        <p:txBody>
+          <a:bodyPr wrap="square" lIns="0" rIns="0" tIns="0" bIns="0" anchor="ctr">
+            <a:spAutoFit/>
+          </a:bodyPr>
+          <a:lstStyle/>
+          <a:p>
+            <a:pPr algn="ctr">
+              <a:lnSpc>
+                <a:spcPct val="100000"/>
+              </a:lnSpc>
+            </a:pPr>
+            <a:r>
+              <a:rPr sz="1000" b="1">
+                <a:solidFill>
+                  <a:srgbClr val="93A0B2"/>
+                </a:solidFill>
+                <a:latin typeface="Helvetica Neue"/>
+              </a:rPr>
+              <a:t>→</a:t>
+            </a:r>
+          </a:p>
+        </p:txBody>
+      </p:sp>
+      <p:sp>
+        <p:nvSpPr>
+          <p:cNvPr id="125" name="Oval 124"/>
+          <p:cNvSpPr/>
+          <p:nvPr/>
+        </p:nvSpPr>
+        <p:spPr>
+          <a:xfrm>
+            <a:off x="6836511" y="4878324"/>
+            <a:ext cx="210312" cy="210312"/>
+          </a:xfrm>
+          <a:prstGeom prst="ellipse">
+            <a:avLst/>
+          </a:prstGeom>
+          <a:solidFill>
+            <a:srgbClr val="AE7526"/>
+          </a:solidFill>
+          <a:ln>
+            <a:noFill/>
+          </a:ln>
+          <a:effectLst/>
+        </p:spPr>
+        <p:style>
+          <a:lnRef idx="1">
+            <a:schemeClr val="accent1"/>
+          </a:lnRef>
+          <a:fillRef idx="3">
+            <a:schemeClr val="accent1"/>
+          </a:fillRef>
+          <a:effectRef idx="2">
+            <a:schemeClr val="accent1"/>
+          </a:effectRef>
+          <a:fontRef idx="minor">
+            <a:schemeClr val="lt1"/>
+          </a:fontRef>
+        </p:style>
+        <p:txBody>
+          <a:bodyPr rtlCol="0" anchor="ctr"/>
+          <a:lstStyle/>
+          <a:p>
+            <a:pPr algn="ctr"/>
+          </a:p>
+        </p:txBody>
+      </p:sp>
+      <p:sp>
+        <p:nvSpPr>
+          <p:cNvPr id="126" name="TextBox 125"/>
+          <p:cNvSpPr txBox="1"/>
+          <p:nvPr/>
+        </p:nvSpPr>
+        <p:spPr>
+          <a:xfrm>
+            <a:off x="6836511" y="4878324"/>
+            <a:ext cx="210312" cy="210312"/>
+          </a:xfrm>
+          <a:prstGeom prst="rect">
+            <a:avLst/>
+          </a:prstGeom>
+          <a:noFill/>
+        </p:spPr>
+        <p:txBody>
+          <a:bodyPr wrap="square" lIns="0" rIns="0" tIns="0" bIns="0" anchor="ctr">
+            <a:spAutoFit/>
+          </a:bodyPr>
+          <a:lstStyle/>
+          <a:p>
+            <a:pPr algn="ctr">
+              <a:lnSpc>
+                <a:spcPct val="100000"/>
+              </a:lnSpc>
+            </a:pPr>
+            <a:r>
+              <a:rPr sz="950" b="1">
+                <a:solidFill>
+                  <a:srgbClr val="FFFFFF"/>
+                </a:solidFill>
+                <a:latin typeface="Helvetica Neue"/>
+              </a:rPr>
+              <a:t>8</a:t>
+            </a:r>
+          </a:p>
+        </p:txBody>
+      </p:sp>
+      <p:sp>
+        <p:nvSpPr>
+          <p:cNvPr id="127" name="TextBox 126"/>
+          <p:cNvSpPr txBox="1"/>
+          <p:nvPr/>
+        </p:nvSpPr>
+        <p:spPr>
+          <a:xfrm>
+            <a:off x="7147407" y="4869180"/>
+            <a:ext cx="2712567" cy="228600"/>
+          </a:xfrm>
+          <a:prstGeom prst="rect">
+            <a:avLst/>
+          </a:prstGeom>
+          <a:noFill/>
+        </p:spPr>
+        <p:txBody>
+          <a:bodyPr wrap="square" lIns="0" rIns="0" tIns="0" bIns="0" anchor="ctr">
+            <a:spAutoFit/>
+          </a:bodyPr>
+          <a:lstStyle/>
+          <a:p>
+            <a:pPr algn="l">
+              <a:lnSpc>
+                <a:spcPct val="100000"/>
+              </a:lnSpc>
+            </a:pPr>
+            <a:r>
+              <a:rPr sz="1050" b="1">
+                <a:solidFill>
+                  <a:srgbClr val="16202E"/>
+                </a:solidFill>
+                <a:latin typeface="Helvetica Neue"/>
+              </a:rPr>
+              <a:t>Verify → Document</a:t>
+            </a:r>
+          </a:p>
+        </p:txBody>
+      </p:sp>
+      <p:sp>
+        <p:nvSpPr>
+          <p:cNvPr id="128" name="TextBox 127"/>
+          <p:cNvSpPr txBox="1"/>
+          <p:nvPr/>
+        </p:nvSpPr>
+        <p:spPr>
+          <a:xfrm>
+            <a:off x="9978847" y="4869180"/>
+            <a:ext cx="1627632" cy="228600"/>
+          </a:xfrm>
+          <a:prstGeom prst="rect">
+            <a:avLst/>
+          </a:prstGeom>
+          <a:noFill/>
+        </p:spPr>
+        <p:txBody>
+          <a:bodyPr wrap="square" lIns="0" rIns="0" tIns="0" bIns="0" anchor="ctr">
+            <a:spAutoFit/>
+          </a:bodyPr>
+          <a:lstStyle/>
+          <a:p>
+            <a:pPr algn="r">
+              <a:lnSpc>
+                <a:spcPct val="100000"/>
+              </a:lnSpc>
+            </a:pPr>
+            <a:r>
+              <a:rPr sz="750" b="0">
+                <a:solidFill>
+                  <a:srgbClr val="93A0B2"/>
+                </a:solidFill>
+                <a:latin typeface="Menlo"/>
+              </a:rPr>
+              <a:t>Terminal → Terminal</a:t>
+            </a:r>
+          </a:p>
+        </p:txBody>
+      </p:sp>
+      <p:sp>
+        <p:nvSpPr>
+          <p:cNvPr id="129" name="TextBox 128"/>
+          <p:cNvSpPr txBox="1"/>
+          <p:nvPr/>
+        </p:nvSpPr>
+        <p:spPr>
+          <a:xfrm>
+            <a:off x="6479895" y="5170932"/>
+            <a:ext cx="5117439" cy="155448"/>
+          </a:xfrm>
+          <a:prstGeom prst="rect">
+            <a:avLst/>
+          </a:prstGeom>
+          <a:noFill/>
+        </p:spPr>
+        <p:txBody>
+          <a:bodyPr wrap="square" lIns="0" rIns="0" tIns="0" bIns="0" anchor="t">
+            <a:spAutoFit/>
+          </a:bodyPr>
+          <a:lstStyle/>
+          <a:p>
+            <a:pPr algn="l">
+              <a:lnSpc>
+                <a:spcPct val="100000"/>
+              </a:lnSpc>
+            </a:pPr>
+            <a:r>
+              <a:rPr sz="730" b="1">
+                <a:solidFill>
+                  <a:srgbClr val="1657B0"/>
+                </a:solidFill>
+                <a:latin typeface="Menlo"/>
+              </a:rPr>
+              <a:t>trigger  </a:t>
+            </a:r>
+            <a:r>
+              <a:rPr sz="800" b="0">
+                <a:solidFill>
+                  <a:srgbClr val="51617A"/>
+                </a:solidFill>
+                <a:latin typeface="Helvetica Neue"/>
+              </a:rPr>
+              <a:t>generate_connector_details.py</a:t>
+            </a:r>
+          </a:p>
+        </p:txBody>
+      </p:sp>
+      <p:sp>
+        <p:nvSpPr>
+          <p:cNvPr id="130" name="TextBox 129"/>
+          <p:cNvSpPr txBox="1"/>
+          <p:nvPr/>
+        </p:nvSpPr>
+        <p:spPr>
+          <a:xfrm>
+            <a:off x="6479895" y="5312664"/>
+            <a:ext cx="5117439" cy="155448"/>
+          </a:xfrm>
+          <a:prstGeom prst="rect">
+            <a:avLst/>
+          </a:prstGeom>
+          <a:noFill/>
+        </p:spPr>
+        <p:txBody>
+          <a:bodyPr wrap="square" lIns="0" rIns="0" tIns="0" bIns="0" anchor="t">
+            <a:spAutoFit/>
+          </a:bodyPr>
+          <a:lstStyle/>
+          <a:p>
+            <a:pPr algn="l">
+              <a:lnSpc>
+                <a:spcPct val="100000"/>
+              </a:lnSpc>
+            </a:pPr>
+            <a:r>
+              <a:rPr sz="730" b="1">
+                <a:solidFill>
+                  <a:srgbClr val="1657B0"/>
+                </a:solidFill>
+                <a:latin typeface="Menlo"/>
+              </a:rPr>
+              <a:t>passes  </a:t>
+            </a:r>
+            <a:r>
+              <a:rPr sz="800" b="0">
+                <a:solidFill>
+                  <a:srgbClr val="51617A"/>
+                </a:solidFill>
+                <a:latin typeface="Helvetica Neue"/>
+              </a:rPr>
+              <a:t>verified diagram + surgical brief</a:t>
+            </a:r>
+          </a:p>
+        </p:txBody>
+      </p:sp>
+      <p:sp>
+        <p:nvSpPr>
+          <p:cNvPr id="131" name="TextBox 130"/>
+          <p:cNvSpPr txBox="1"/>
+          <p:nvPr/>
+        </p:nvSpPr>
+        <p:spPr>
+          <a:xfrm>
+            <a:off x="6479895" y="5454396"/>
+            <a:ext cx="5117439" cy="155448"/>
+          </a:xfrm>
+          <a:prstGeom prst="rect">
+            <a:avLst/>
+          </a:prstGeom>
+          <a:noFill/>
+        </p:spPr>
+        <p:txBody>
+          <a:bodyPr wrap="square" lIns="0" rIns="0" tIns="0" bIns="0" anchor="t">
+            <a:spAutoFit/>
+          </a:bodyPr>
+          <a:lstStyle/>
+          <a:p>
+            <a:pPr algn="l">
+              <a:lnSpc>
+                <a:spcPct val="100000"/>
+              </a:lnSpc>
+            </a:pPr>
+            <a:r>
+              <a:rPr sz="730" b="1">
+                <a:solidFill>
+                  <a:srgbClr val="1657B0"/>
+                </a:solidFill>
+                <a:latin typeface="Menlo"/>
+              </a:rPr>
+              <a:t>does  </a:t>
+            </a:r>
+            <a:r>
+              <a:rPr sz="800" b="0">
+                <a:solidFill>
+                  <a:srgbClr val="51617A"/>
+                </a:solidFill>
+                <a:latin typeface="Helvetica Neue"/>
+              </a:rPr>
+              <a:t>fill the 14-column connector contract · zero {TBD}</a:t>
+            </a:r>
+          </a:p>
+        </p:txBody>
+      </p:sp>
+      <p:sp>
+        <p:nvSpPr>
+          <p:cNvPr id="132" name="Rounded Rectangle 131"/>
+          <p:cNvSpPr/>
+          <p:nvPr/>
+        </p:nvSpPr>
+        <p:spPr>
+          <a:xfrm>
+            <a:off x="6324447" y="5614416"/>
+            <a:ext cx="5410047" cy="786384"/>
+          </a:xfrm>
+          <a:prstGeom prst="roundRect">
+            <a:avLst>
+              <a:gd name="adj" fmla="val 5000"/>
+            </a:avLst>
+          </a:prstGeom>
+          <a:solidFill>
+            <a:srgbClr val="FFFFFF"/>
+          </a:solidFill>
+          <a:ln w="11430">
+            <a:solidFill>
+              <a:srgbClr val="E7ECF3"/>
+            </a:solidFill>
+          </a:ln>
+          <a:effectLst>
+            <a:outerShdw blurRad="82296" dist="25603" dir="5400000" rotWithShape="0">
+              <a:srgbClr val="1B2A40">
+                <a:alpha val="11000"/>
+              </a:srgbClr>
+            </a:outerShdw>
+          </a:effectLst>
+        </p:spPr>
+        <p:style>
+          <a:lnRef idx="1">
+            <a:schemeClr val="accent1"/>
+          </a:lnRef>
+          <a:fillRef idx="3">
+            <a:schemeClr val="accent1"/>
+          </a:fillRef>
+          <a:effectRef idx="2">
+            <a:schemeClr val="accent1"/>
+          </a:effectRef>
+          <a:fontRef idx="minor">
+            <a:schemeClr val="lt1"/>
+          </a:fontRef>
+        </p:style>
+        <p:txBody>
+          <a:bodyPr rtlCol="0" anchor="ctr"/>
+          <a:lstStyle/>
+          <a:p>
+            <a:pPr algn="ctr"/>
+          </a:p>
+        </p:txBody>
+      </p:sp>
+      <p:sp>
+        <p:nvSpPr>
+          <p:cNvPr id="133" name="Oval 132"/>
+          <p:cNvSpPr/>
+          <p:nvPr/>
+        </p:nvSpPr>
+        <p:spPr>
+          <a:xfrm>
+            <a:off x="6452463" y="5724144"/>
+            <a:ext cx="210312" cy="210312"/>
+          </a:xfrm>
+          <a:prstGeom prst="ellipse">
+            <a:avLst/>
+          </a:prstGeom>
+          <a:solidFill>
+            <a:srgbClr val="AE7526"/>
+          </a:solidFill>
+          <a:ln>
+            <a:noFill/>
+          </a:ln>
+          <a:effectLst/>
+        </p:spPr>
+        <p:style>
+          <a:lnRef idx="1">
+            <a:schemeClr val="accent1"/>
+          </a:lnRef>
+          <a:fillRef idx="3">
+            <a:schemeClr val="accent1"/>
+          </a:fillRef>
+          <a:effectRef idx="2">
+            <a:schemeClr val="accent1"/>
+          </a:effectRef>
+          <a:fontRef idx="minor">
+            <a:schemeClr val="lt1"/>
+          </a:fontRef>
+        </p:style>
+        <p:txBody>
+          <a:bodyPr rtlCol="0" anchor="ctr"/>
+          <a:lstStyle/>
+          <a:p>
+            <a:pPr algn="ctr"/>
+          </a:p>
+        </p:txBody>
+      </p:sp>
+      <p:sp>
+        <p:nvSpPr>
+          <p:cNvPr id="134" name="TextBox 133"/>
+          <p:cNvSpPr txBox="1"/>
+          <p:nvPr/>
+        </p:nvSpPr>
+        <p:spPr>
+          <a:xfrm>
+            <a:off x="6452463" y="5724144"/>
+            <a:ext cx="210312" cy="210312"/>
+          </a:xfrm>
+          <a:prstGeom prst="rect">
+            <a:avLst/>
+          </a:prstGeom>
+          <a:noFill/>
+        </p:spPr>
+        <p:txBody>
+          <a:bodyPr wrap="square" lIns="0" rIns="0" tIns="0" bIns="0" anchor="ctr">
+            <a:spAutoFit/>
+          </a:bodyPr>
+          <a:lstStyle/>
+          <a:p>
+            <a:pPr algn="ctr">
+              <a:lnSpc>
+                <a:spcPct val="100000"/>
+              </a:lnSpc>
+            </a:pPr>
+            <a:r>
+              <a:rPr sz="950" b="1">
+                <a:solidFill>
+                  <a:srgbClr val="FFFFFF"/>
+                </a:solidFill>
+                <a:latin typeface="Helvetica Neue"/>
+              </a:rPr>
+              <a:t>8</a:t>
+            </a:r>
+          </a:p>
+        </p:txBody>
+      </p:sp>
+      <p:sp>
+        <p:nvSpPr>
+          <p:cNvPr id="135" name="TextBox 134"/>
+          <p:cNvSpPr txBox="1"/>
+          <p:nvPr/>
+        </p:nvSpPr>
+        <p:spPr>
+          <a:xfrm>
+            <a:off x="6681063" y="5724144"/>
+            <a:ext cx="155448" cy="210312"/>
+          </a:xfrm>
+          <a:prstGeom prst="rect">
+            <a:avLst/>
+          </a:prstGeom>
+          <a:noFill/>
+        </p:spPr>
+        <p:txBody>
+          <a:bodyPr wrap="square" lIns="0" rIns="0" tIns="0" bIns="0" anchor="ctr">
+            <a:spAutoFit/>
+          </a:bodyPr>
+          <a:lstStyle/>
+          <a:p>
+            <a:pPr algn="ctr">
+              <a:lnSpc>
+                <a:spcPct val="100000"/>
+              </a:lnSpc>
+            </a:pPr>
+            <a:r>
+              <a:rPr sz="1000" b="1">
+                <a:solidFill>
+                  <a:srgbClr val="93A0B2"/>
+                </a:solidFill>
+                <a:latin typeface="Helvetica Neue"/>
+              </a:rPr>
+              <a:t>→</a:t>
+            </a:r>
+          </a:p>
+        </p:txBody>
+      </p:sp>
+      <p:sp>
+        <p:nvSpPr>
+          <p:cNvPr id="136" name="Oval 135"/>
+          <p:cNvSpPr/>
+          <p:nvPr/>
+        </p:nvSpPr>
+        <p:spPr>
+          <a:xfrm>
+            <a:off x="6836511" y="5724144"/>
+            <a:ext cx="210312" cy="210312"/>
+          </a:xfrm>
+          <a:prstGeom prst="ellipse">
+            <a:avLst/>
+          </a:prstGeom>
+          <a:solidFill>
+            <a:srgbClr val="2E8C6A"/>
+          </a:solidFill>
+          <a:ln>
+            <a:noFill/>
+          </a:ln>
+          <a:effectLst/>
+        </p:spPr>
+        <p:style>
+          <a:lnRef idx="1">
+            <a:schemeClr val="accent1"/>
+          </a:lnRef>
+          <a:fillRef idx="3">
+            <a:schemeClr val="accent1"/>
+          </a:fillRef>
+          <a:effectRef idx="2">
+            <a:schemeClr val="accent1"/>
+          </a:effectRef>
+          <a:fontRef idx="minor">
+            <a:schemeClr val="lt1"/>
+          </a:fontRef>
+        </p:style>
+        <p:txBody>
+          <a:bodyPr rtlCol="0" anchor="ctr"/>
+          <a:lstStyle/>
+          <a:p>
+            <a:pPr algn="ctr"/>
+          </a:p>
+        </p:txBody>
+      </p:sp>
+      <p:sp>
+        <p:nvSpPr>
+          <p:cNvPr id="137" name="TextBox 136"/>
+          <p:cNvSpPr txBox="1"/>
+          <p:nvPr/>
+        </p:nvSpPr>
+        <p:spPr>
+          <a:xfrm>
+            <a:off x="6836511" y="5724144"/>
+            <a:ext cx="210312" cy="210312"/>
+          </a:xfrm>
+          <a:prstGeom prst="rect">
+            <a:avLst/>
+          </a:prstGeom>
+          <a:noFill/>
+        </p:spPr>
+        <p:txBody>
+          <a:bodyPr wrap="square" lIns="0" rIns="0" tIns="0" bIns="0" anchor="ctr">
+            <a:spAutoFit/>
+          </a:bodyPr>
+          <a:lstStyle/>
+          <a:p>
+            <a:pPr algn="ctr">
+              <a:lnSpc>
+                <a:spcPct val="100000"/>
+              </a:lnSpc>
+            </a:pPr>
+            <a:r>
+              <a:rPr sz="950" b="1">
+                <a:solidFill>
+                  <a:srgbClr val="FFFFFF"/>
+                </a:solidFill>
+                <a:latin typeface="Helvetica Neue"/>
+              </a:rPr>
+              <a:t>9</a:t>
+            </a:r>
+          </a:p>
+        </p:txBody>
+      </p:sp>
+      <p:sp>
+        <p:nvSpPr>
+          <p:cNvPr id="138" name="TextBox 137"/>
+          <p:cNvSpPr txBox="1"/>
+          <p:nvPr/>
+        </p:nvSpPr>
+        <p:spPr>
+          <a:xfrm>
+            <a:off x="7147407" y="5715000"/>
+            <a:ext cx="2712567" cy="228600"/>
+          </a:xfrm>
+          <a:prstGeom prst="rect">
+            <a:avLst/>
+          </a:prstGeom>
+          <a:noFill/>
+        </p:spPr>
+        <p:txBody>
+          <a:bodyPr wrap="square" lIns="0" rIns="0" tIns="0" bIns="0" anchor="ctr">
+            <a:spAutoFit/>
+          </a:bodyPr>
+          <a:lstStyle/>
+          <a:p>
+            <a:pPr algn="l">
+              <a:lnSpc>
+                <a:spcPct val="100000"/>
+              </a:lnSpc>
+            </a:pPr>
+            <a:r>
+              <a:rPr sz="1050" b="1">
+                <a:solidFill>
+                  <a:srgbClr val="16202E"/>
+                </a:solidFill>
+                <a:latin typeface="Helvetica Neue"/>
+              </a:rPr>
+              <a:t>Document → Deliver</a:t>
+            </a:r>
+          </a:p>
+        </p:txBody>
+      </p:sp>
+      <p:sp>
+        <p:nvSpPr>
+          <p:cNvPr id="139" name="TextBox 138"/>
+          <p:cNvSpPr txBox="1"/>
+          <p:nvPr/>
+        </p:nvSpPr>
+        <p:spPr>
+          <a:xfrm>
+            <a:off x="9978847" y="5715000"/>
+            <a:ext cx="1627632" cy="228600"/>
+          </a:xfrm>
+          <a:prstGeom prst="rect">
+            <a:avLst/>
+          </a:prstGeom>
+          <a:noFill/>
+        </p:spPr>
+        <p:txBody>
+          <a:bodyPr wrap="square" lIns="0" rIns="0" tIns="0" bIns="0" anchor="ctr">
+            <a:spAutoFit/>
+          </a:bodyPr>
+          <a:lstStyle/>
+          <a:p>
+            <a:pPr algn="r">
+              <a:lnSpc>
+                <a:spcPct val="100000"/>
+              </a:lnSpc>
+            </a:pPr>
+            <a:r>
+              <a:rPr sz="750" b="0">
+                <a:solidFill>
+                  <a:srgbClr val="93A0B2"/>
+                </a:solidFill>
+                <a:latin typeface="Menlo"/>
+              </a:rPr>
+              <a:t>Terminal → MCP</a:t>
+            </a:r>
+          </a:p>
+        </p:txBody>
+      </p:sp>
+      <p:sp>
+        <p:nvSpPr>
+          <p:cNvPr id="140" name="TextBox 139"/>
+          <p:cNvSpPr txBox="1"/>
+          <p:nvPr/>
+        </p:nvSpPr>
+        <p:spPr>
+          <a:xfrm>
+            <a:off x="6479895" y="6016752"/>
+            <a:ext cx="5117439" cy="155448"/>
+          </a:xfrm>
+          <a:prstGeom prst="rect">
+            <a:avLst/>
+          </a:prstGeom>
+          <a:noFill/>
+        </p:spPr>
+        <p:txBody>
+          <a:bodyPr wrap="square" lIns="0" rIns="0" tIns="0" bIns="0" anchor="t">
+            <a:spAutoFit/>
+          </a:bodyPr>
+          <a:lstStyle/>
+          <a:p>
+            <a:pPr algn="l">
+              <a:lnSpc>
+                <a:spcPct val="100000"/>
+              </a:lnSpc>
+            </a:pPr>
+            <a:r>
+              <a:rPr sz="730" b="1">
+                <a:solidFill>
+                  <a:srgbClr val="1657B0"/>
+                </a:solidFill>
+                <a:latin typeface="Menlo"/>
+              </a:rPr>
+              <a:t>trigger  </a:t>
+            </a:r>
+            <a:r>
+              <a:rPr sz="800" b="0">
+                <a:solidFill>
+                  <a:srgbClr val="51617A"/>
+                </a:solidFill>
+                <a:latin typeface="Helvetica Neue"/>
+              </a:rPr>
+              <a:t>add_connector_table(diagram=...)</a:t>
+            </a:r>
+          </a:p>
+        </p:txBody>
+      </p:sp>
+      <p:sp>
+        <p:nvSpPr>
+          <p:cNvPr id="141" name="TextBox 140"/>
+          <p:cNvSpPr txBox="1"/>
+          <p:nvPr/>
+        </p:nvSpPr>
+        <p:spPr>
+          <a:xfrm>
+            <a:off x="6479895" y="6158484"/>
+            <a:ext cx="5117439" cy="155448"/>
+          </a:xfrm>
+          <a:prstGeom prst="rect">
+            <a:avLst/>
+          </a:prstGeom>
+          <a:noFill/>
+        </p:spPr>
+        <p:txBody>
+          <a:bodyPr wrap="square" lIns="0" rIns="0" tIns="0" bIns="0" anchor="t">
+            <a:spAutoFit/>
+          </a:bodyPr>
+          <a:lstStyle/>
+          <a:p>
+            <a:pPr algn="l">
+              <a:lnSpc>
+                <a:spcPct val="100000"/>
+              </a:lnSpc>
+            </a:pPr>
+            <a:r>
+              <a:rPr sz="730" b="1">
+                <a:solidFill>
+                  <a:srgbClr val="1657B0"/>
+                </a:solidFill>
+                <a:latin typeface="Menlo"/>
+              </a:rPr>
+              <a:t>passes  </a:t>
+            </a:r>
+            <a:r>
+              <a:rPr sz="800" b="0">
+                <a:solidFill>
+                  <a:srgbClr val="51617A"/>
+                </a:solidFill>
+                <a:latin typeface="Helvetica Neue"/>
+              </a:rPr>
+              <a:t>&lt;KEY&gt;-connectors.md</a:t>
+            </a:r>
+          </a:p>
+        </p:txBody>
+      </p:sp>
+      <p:sp>
+        <p:nvSpPr>
+          <p:cNvPr id="142" name="TextBox 141"/>
+          <p:cNvSpPr txBox="1"/>
+          <p:nvPr/>
+        </p:nvSpPr>
+        <p:spPr>
+          <a:xfrm>
+            <a:off x="6479895" y="6300216"/>
+            <a:ext cx="5117439" cy="155448"/>
+          </a:xfrm>
+          <a:prstGeom prst="rect">
+            <a:avLst/>
+          </a:prstGeom>
+          <a:noFill/>
+        </p:spPr>
+        <p:txBody>
+          <a:bodyPr wrap="square" lIns="0" rIns="0" tIns="0" bIns="0" anchor="t">
+            <a:spAutoFit/>
+          </a:bodyPr>
+          <a:lstStyle/>
+          <a:p>
+            <a:pPr algn="l">
+              <a:lnSpc>
+                <a:spcPct val="100000"/>
+              </a:lnSpc>
+            </a:pPr>
+            <a:r>
+              <a:rPr sz="730" b="1">
+                <a:solidFill>
+                  <a:srgbClr val="1657B0"/>
+                </a:solidFill>
+                <a:latin typeface="Menlo"/>
+              </a:rPr>
+              <a:t>does  </a:t>
+            </a:r>
+            <a:r>
+              <a:rPr sz="800" b="0">
+                <a:solidFill>
+                  <a:srgbClr val="51617A"/>
+                </a:solidFill>
+                <a:latin typeface="Helvetica Neue"/>
+              </a:rPr>
+              <a:t>embed contract table below swimlanes · zero-TBD guard</a:t>
+            </a:r>
+          </a:p>
+        </p:txBody>
+      </p:sp>
+      <p:sp>
+        <p:nvSpPr>
+          <p:cNvPr id="143" name="Rectangle 142"/>
+          <p:cNvSpPr/>
+          <p:nvPr/>
+        </p:nvSpPr>
+        <p:spPr>
+          <a:xfrm>
+            <a:off x="457200" y="6364224"/>
+            <a:ext cx="11277295" cy="10058"/>
+          </a:xfrm>
+          <a:prstGeom prst="rect">
+            <a:avLst/>
+          </a:prstGeom>
+          <a:solidFill>
+            <a:srgbClr val="D2DBE7"/>
+          </a:solidFill>
+          <a:ln>
+            <a:noFill/>
+          </a:ln>
+          <a:effectLst/>
+        </p:spPr>
+        <p:style>
+          <a:lnRef idx="1">
+            <a:schemeClr val="accent1"/>
+          </a:lnRef>
+          <a:fillRef idx="3">
+            <a:schemeClr val="accent1"/>
+          </a:fillRef>
+          <a:effectRef idx="2">
+            <a:schemeClr val="accent1"/>
+          </a:effectRef>
+          <a:fontRef idx="minor">
+            <a:schemeClr val="lt1"/>
+          </a:fontRef>
+        </p:style>
+        <p:txBody>
+          <a:bodyPr rtlCol="0" anchor="ctr"/>
+          <a:lstStyle/>
+          <a:p>
+            <a:pPr algn="ctr"/>
+          </a:p>
+        </p:txBody>
+      </p:sp>
+      <p:sp>
+        <p:nvSpPr>
+          <p:cNvPr id="144" name="TextBox 143"/>
+          <p:cNvSpPr txBox="1"/>
+          <p:nvPr/>
+        </p:nvSpPr>
+        <p:spPr>
+          <a:xfrm>
+            <a:off x="457200" y="6437376"/>
+            <a:ext cx="5486400" cy="256032"/>
+          </a:xfrm>
+          <a:prstGeom prst="rect">
+            <a:avLst/>
+          </a:prstGeom>
+          <a:noFill/>
+        </p:spPr>
+        <p:txBody>
+          <a:bodyPr wrap="square" lIns="0" rIns="0" tIns="0" bIns="0" anchor="ctr">
+            <a:spAutoFit/>
+          </a:bodyPr>
+          <a:lstStyle/>
+          <a:p>
+            <a:pPr algn="l">
+              <a:lnSpc>
+                <a:spcPct val="100000"/>
+              </a:lnSpc>
+            </a:pPr>
+            <a:r>
+              <a:rPr sz="900" b="1">
+                <a:solidFill>
+                  <a:srgbClr val="16202E"/>
+                </a:solidFill>
+                <a:latin typeface="Helvetica Neue"/>
+              </a:rPr>
+              <a:t>Debajyoti Mukhopadhyay</a:t>
+            </a:r>
+            <a:r>
+              <a:rPr sz="900" b="0">
+                <a:solidFill>
+                  <a:srgbClr val="93A0B2"/>
+                </a:solidFill>
+                <a:latin typeface="Helvetica Neue"/>
+              </a:rPr>
+              <a:t>   ·   Architecture &amp; Tooling</a:t>
+            </a:r>
+          </a:p>
+        </p:txBody>
+      </p:sp>
+      <p:sp>
+        <p:nvSpPr>
+          <p:cNvPr id="145" name="TextBox 144"/>
+          <p:cNvSpPr txBox="1"/>
+          <p:nvPr/>
+        </p:nvSpPr>
+        <p:spPr>
+          <a:xfrm>
+            <a:off x="5608015" y="6437376"/>
+            <a:ext cx="6126480" cy="256032"/>
+          </a:xfrm>
+          <a:prstGeom prst="rect">
+            <a:avLst/>
+          </a:prstGeom>
+          <a:noFill/>
+        </p:spPr>
+        <p:txBody>
+          <a:bodyPr wrap="square" lIns="0" rIns="0" tIns="0" bIns="0" anchor="ctr">
+            <a:spAutoFit/>
+          </a:bodyPr>
+          <a:lstStyle/>
+          <a:p>
+            <a:pPr algn="r">
+              <a:lnSpc>
+                <a:spcPct val="100000"/>
+              </a:lnSpc>
+            </a:pPr>
+            <a:r>
+              <a:rPr sz="730" b="0">
+                <a:solidFill>
+                  <a:srgbClr val="51617A"/>
+                </a:solidFill>
+                <a:latin typeface="Menlo"/>
+              </a:rPr>
+              <a:t>artifact chain:  &lt;KEY&gt;.txt → &lt;KEY&gt;-surgical.txt → &lt;KEY&gt;-&lt;ts&gt;.drawio → &lt;KEY&gt;-connectors.md</a:t>
             </a:r>
           </a:p>
         </p:txBody>

--- a/Architecture-Copilot-OnePager.pptx
+++ b/Architecture-Copilot-OnePager.pptx
@@ -7,6 +7,7 @@
   <p:sldIdLst>
     <p:sldId id="256" r:id="rId7"/>
     <p:sldId id="257" r:id="rId8"/>
+    <p:sldId id="258" r:id="rId9"/>
   </p:sldIdLst>
   <p:sldSz cx="12191695" cy="6858000" type="screen4x3"/>
   <p:notesSz cx="6858000" cy="9144000"/>
@@ -16963,6 +16964,2971 @@
                 <a:latin typeface="Menlo"/>
               </a:rPr>
               <a:t>artifact chain:  &lt;KEY&gt;.txt → &lt;KEY&gt;-surgical.txt → &lt;KEY&gt;-&lt;ts&gt;.drawio → &lt;KEY&gt;-connectors.md</a:t>
+            </a:r>
+          </a:p>
+        </p:txBody>
+      </p:sp>
+    </p:spTree>
+  </p:cSld>
+  <p:clrMapOvr>
+    <a:masterClrMapping/>
+  </p:clrMapOvr>
+</p:sld>
+</file>
+
+<file path=ppt/slides/slide3.xml><?xml version="1.0" encoding="utf-8"?>
+<p:sld xmlns:a="http://schemas.openxmlformats.org/drawingml/2006/main" xmlns:p="http://schemas.openxmlformats.org/presentationml/2006/main" xmlns:r="http://schemas.openxmlformats.org/officeDocument/2006/relationships">
+  <p:cSld>
+    <p:bg>
+      <p:bgPr>
+        <a:solidFill>
+          <a:srgbClr val="FFFFFF"/>
+        </a:solidFill>
+        <a:effectLst/>
+      </p:bgPr>
+    </p:bg>
+    <p:spTree>
+      <p:nvGrpSpPr>
+        <p:cNvPr id="1" name=""/>
+        <p:cNvGrpSpPr/>
+        <p:nvPr/>
+      </p:nvGrpSpPr>
+      <p:grpSpPr/>
+      <p:sp>
+        <p:nvSpPr>
+          <p:cNvPr id="2" name="Rectangle 1"/>
+          <p:cNvSpPr/>
+          <p:nvPr/>
+        </p:nvSpPr>
+        <p:spPr>
+          <a:xfrm>
+            <a:off x="219456" y="219456"/>
+            <a:ext cx="155448" cy="14630"/>
+          </a:xfrm>
+          <a:prstGeom prst="rect">
+            <a:avLst/>
+          </a:prstGeom>
+          <a:solidFill>
+            <a:srgbClr val="B7C4D5"/>
+          </a:solidFill>
+          <a:ln>
+            <a:noFill/>
+          </a:ln>
+          <a:effectLst/>
+        </p:spPr>
+        <p:style>
+          <a:lnRef idx="1">
+            <a:schemeClr val="accent1"/>
+          </a:lnRef>
+          <a:fillRef idx="3">
+            <a:schemeClr val="accent1"/>
+          </a:fillRef>
+          <a:effectRef idx="2">
+            <a:schemeClr val="accent1"/>
+          </a:effectRef>
+          <a:fontRef idx="minor">
+            <a:schemeClr val="lt1"/>
+          </a:fontRef>
+        </p:style>
+        <p:txBody>
+          <a:bodyPr rtlCol="0" anchor="ctr"/>
+          <a:lstStyle/>
+          <a:p>
+            <a:pPr algn="ctr"/>
+          </a:p>
+        </p:txBody>
+      </p:sp>
+      <p:sp>
+        <p:nvSpPr>
+          <p:cNvPr id="3" name="Rectangle 2"/>
+          <p:cNvSpPr/>
+          <p:nvPr/>
+        </p:nvSpPr>
+        <p:spPr>
+          <a:xfrm>
+            <a:off x="219456" y="219456"/>
+            <a:ext cx="14630" cy="155448"/>
+          </a:xfrm>
+          <a:prstGeom prst="rect">
+            <a:avLst/>
+          </a:prstGeom>
+          <a:solidFill>
+            <a:srgbClr val="B7C4D5"/>
+          </a:solidFill>
+          <a:ln>
+            <a:noFill/>
+          </a:ln>
+          <a:effectLst/>
+        </p:spPr>
+        <p:style>
+          <a:lnRef idx="1">
+            <a:schemeClr val="accent1"/>
+          </a:lnRef>
+          <a:fillRef idx="3">
+            <a:schemeClr val="accent1"/>
+          </a:fillRef>
+          <a:effectRef idx="2">
+            <a:schemeClr val="accent1"/>
+          </a:effectRef>
+          <a:fontRef idx="minor">
+            <a:schemeClr val="lt1"/>
+          </a:fontRef>
+        </p:style>
+        <p:txBody>
+          <a:bodyPr rtlCol="0" anchor="ctr"/>
+          <a:lstStyle/>
+          <a:p>
+            <a:pPr algn="ctr"/>
+          </a:p>
+        </p:txBody>
+      </p:sp>
+      <p:sp>
+        <p:nvSpPr>
+          <p:cNvPr id="4" name="Rectangle 3"/>
+          <p:cNvSpPr/>
+          <p:nvPr/>
+        </p:nvSpPr>
+        <p:spPr>
+          <a:xfrm>
+            <a:off x="11802160" y="219456"/>
+            <a:ext cx="155448" cy="14630"/>
+          </a:xfrm>
+          <a:prstGeom prst="rect">
+            <a:avLst/>
+          </a:prstGeom>
+          <a:solidFill>
+            <a:srgbClr val="B7C4D5"/>
+          </a:solidFill>
+          <a:ln>
+            <a:noFill/>
+          </a:ln>
+          <a:effectLst/>
+        </p:spPr>
+        <p:style>
+          <a:lnRef idx="1">
+            <a:schemeClr val="accent1"/>
+          </a:lnRef>
+          <a:fillRef idx="3">
+            <a:schemeClr val="accent1"/>
+          </a:fillRef>
+          <a:effectRef idx="2">
+            <a:schemeClr val="accent1"/>
+          </a:effectRef>
+          <a:fontRef idx="minor">
+            <a:schemeClr val="lt1"/>
+          </a:fontRef>
+        </p:style>
+        <p:txBody>
+          <a:bodyPr rtlCol="0" anchor="ctr"/>
+          <a:lstStyle/>
+          <a:p>
+            <a:pPr algn="ctr"/>
+          </a:p>
+        </p:txBody>
+      </p:sp>
+      <p:sp>
+        <p:nvSpPr>
+          <p:cNvPr id="5" name="Rectangle 4"/>
+          <p:cNvSpPr/>
+          <p:nvPr/>
+        </p:nvSpPr>
+        <p:spPr>
+          <a:xfrm>
+            <a:off x="11957608" y="219456"/>
+            <a:ext cx="14630" cy="155448"/>
+          </a:xfrm>
+          <a:prstGeom prst="rect">
+            <a:avLst/>
+          </a:prstGeom>
+          <a:solidFill>
+            <a:srgbClr val="B7C4D5"/>
+          </a:solidFill>
+          <a:ln>
+            <a:noFill/>
+          </a:ln>
+          <a:effectLst/>
+        </p:spPr>
+        <p:style>
+          <a:lnRef idx="1">
+            <a:schemeClr val="accent1"/>
+          </a:lnRef>
+          <a:fillRef idx="3">
+            <a:schemeClr val="accent1"/>
+          </a:fillRef>
+          <a:effectRef idx="2">
+            <a:schemeClr val="accent1"/>
+          </a:effectRef>
+          <a:fontRef idx="minor">
+            <a:schemeClr val="lt1"/>
+          </a:fontRef>
+        </p:style>
+        <p:txBody>
+          <a:bodyPr rtlCol="0" anchor="ctr"/>
+          <a:lstStyle/>
+          <a:p>
+            <a:pPr algn="ctr"/>
+          </a:p>
+        </p:txBody>
+      </p:sp>
+      <p:sp>
+        <p:nvSpPr>
+          <p:cNvPr id="6" name="Rectangle 5"/>
+          <p:cNvSpPr/>
+          <p:nvPr/>
+        </p:nvSpPr>
+        <p:spPr>
+          <a:xfrm>
+            <a:off x="219456" y="6623913"/>
+            <a:ext cx="155448" cy="14630"/>
+          </a:xfrm>
+          <a:prstGeom prst="rect">
+            <a:avLst/>
+          </a:prstGeom>
+          <a:solidFill>
+            <a:srgbClr val="B7C4D5"/>
+          </a:solidFill>
+          <a:ln>
+            <a:noFill/>
+          </a:ln>
+          <a:effectLst/>
+        </p:spPr>
+        <p:style>
+          <a:lnRef idx="1">
+            <a:schemeClr val="accent1"/>
+          </a:lnRef>
+          <a:fillRef idx="3">
+            <a:schemeClr val="accent1"/>
+          </a:fillRef>
+          <a:effectRef idx="2">
+            <a:schemeClr val="accent1"/>
+          </a:effectRef>
+          <a:fontRef idx="minor">
+            <a:schemeClr val="lt1"/>
+          </a:fontRef>
+        </p:style>
+        <p:txBody>
+          <a:bodyPr rtlCol="0" anchor="ctr"/>
+          <a:lstStyle/>
+          <a:p>
+            <a:pPr algn="ctr"/>
+          </a:p>
+        </p:txBody>
+      </p:sp>
+      <p:sp>
+        <p:nvSpPr>
+          <p:cNvPr id="7" name="Rectangle 6"/>
+          <p:cNvSpPr/>
+          <p:nvPr/>
+        </p:nvSpPr>
+        <p:spPr>
+          <a:xfrm>
+            <a:off x="219456" y="6468465"/>
+            <a:ext cx="14630" cy="155448"/>
+          </a:xfrm>
+          <a:prstGeom prst="rect">
+            <a:avLst/>
+          </a:prstGeom>
+          <a:solidFill>
+            <a:srgbClr val="B7C4D5"/>
+          </a:solidFill>
+          <a:ln>
+            <a:noFill/>
+          </a:ln>
+          <a:effectLst/>
+        </p:spPr>
+        <p:style>
+          <a:lnRef idx="1">
+            <a:schemeClr val="accent1"/>
+          </a:lnRef>
+          <a:fillRef idx="3">
+            <a:schemeClr val="accent1"/>
+          </a:fillRef>
+          <a:effectRef idx="2">
+            <a:schemeClr val="accent1"/>
+          </a:effectRef>
+          <a:fontRef idx="minor">
+            <a:schemeClr val="lt1"/>
+          </a:fontRef>
+        </p:style>
+        <p:txBody>
+          <a:bodyPr rtlCol="0" anchor="ctr"/>
+          <a:lstStyle/>
+          <a:p>
+            <a:pPr algn="ctr"/>
+          </a:p>
+        </p:txBody>
+      </p:sp>
+      <p:sp>
+        <p:nvSpPr>
+          <p:cNvPr id="8" name="Rectangle 7"/>
+          <p:cNvSpPr/>
+          <p:nvPr/>
+        </p:nvSpPr>
+        <p:spPr>
+          <a:xfrm>
+            <a:off x="11802160" y="6623913"/>
+            <a:ext cx="155448" cy="14630"/>
+          </a:xfrm>
+          <a:prstGeom prst="rect">
+            <a:avLst/>
+          </a:prstGeom>
+          <a:solidFill>
+            <a:srgbClr val="B7C4D5"/>
+          </a:solidFill>
+          <a:ln>
+            <a:noFill/>
+          </a:ln>
+          <a:effectLst/>
+        </p:spPr>
+        <p:style>
+          <a:lnRef idx="1">
+            <a:schemeClr val="accent1"/>
+          </a:lnRef>
+          <a:fillRef idx="3">
+            <a:schemeClr val="accent1"/>
+          </a:fillRef>
+          <a:effectRef idx="2">
+            <a:schemeClr val="accent1"/>
+          </a:effectRef>
+          <a:fontRef idx="minor">
+            <a:schemeClr val="lt1"/>
+          </a:fontRef>
+        </p:style>
+        <p:txBody>
+          <a:bodyPr rtlCol="0" anchor="ctr"/>
+          <a:lstStyle/>
+          <a:p>
+            <a:pPr algn="ctr"/>
+          </a:p>
+        </p:txBody>
+      </p:sp>
+      <p:sp>
+        <p:nvSpPr>
+          <p:cNvPr id="9" name="Rectangle 8"/>
+          <p:cNvSpPr/>
+          <p:nvPr/>
+        </p:nvSpPr>
+        <p:spPr>
+          <a:xfrm>
+            <a:off x="11957608" y="6468465"/>
+            <a:ext cx="14630" cy="155448"/>
+          </a:xfrm>
+          <a:prstGeom prst="rect">
+            <a:avLst/>
+          </a:prstGeom>
+          <a:solidFill>
+            <a:srgbClr val="B7C4D5"/>
+          </a:solidFill>
+          <a:ln>
+            <a:noFill/>
+          </a:ln>
+          <a:effectLst/>
+        </p:spPr>
+        <p:style>
+          <a:lnRef idx="1">
+            <a:schemeClr val="accent1"/>
+          </a:lnRef>
+          <a:fillRef idx="3">
+            <a:schemeClr val="accent1"/>
+          </a:fillRef>
+          <a:effectRef idx="2">
+            <a:schemeClr val="accent1"/>
+          </a:effectRef>
+          <a:fontRef idx="minor">
+            <a:schemeClr val="lt1"/>
+          </a:fontRef>
+        </p:style>
+        <p:txBody>
+          <a:bodyPr rtlCol="0" anchor="ctr"/>
+          <a:lstStyle/>
+          <a:p>
+            <a:pPr algn="ctr"/>
+          </a:p>
+        </p:txBody>
+      </p:sp>
+      <p:sp>
+        <p:nvSpPr>
+          <p:cNvPr id="10" name="Rounded Rectangle 9"/>
+          <p:cNvSpPr/>
+          <p:nvPr/>
+        </p:nvSpPr>
+        <p:spPr>
+          <a:xfrm>
+            <a:off x="457200" y="292608"/>
+            <a:ext cx="228600" cy="228600"/>
+          </a:xfrm>
+          <a:prstGeom prst="roundRect">
+            <a:avLst>
+              <a:gd name="adj" fmla="val 30000"/>
+            </a:avLst>
+          </a:prstGeom>
+          <a:solidFill>
+            <a:srgbClr val="1657B0"/>
+          </a:solidFill>
+          <a:ln>
+            <a:noFill/>
+          </a:ln>
+          <a:effectLst>
+            <a:outerShdw blurRad="82296" dist="25603" dir="5400000" rotWithShape="0">
+              <a:srgbClr val="1B2A40">
+                <a:alpha val="11000"/>
+              </a:srgbClr>
+            </a:outerShdw>
+          </a:effectLst>
+        </p:spPr>
+        <p:style>
+          <a:lnRef idx="1">
+            <a:schemeClr val="accent1"/>
+          </a:lnRef>
+          <a:fillRef idx="3">
+            <a:schemeClr val="accent1"/>
+          </a:fillRef>
+          <a:effectRef idx="2">
+            <a:schemeClr val="accent1"/>
+          </a:effectRef>
+          <a:fontRef idx="minor">
+            <a:schemeClr val="lt1"/>
+          </a:fontRef>
+        </p:style>
+        <p:txBody>
+          <a:bodyPr rtlCol="0" anchor="ctr"/>
+          <a:lstStyle/>
+          <a:p>
+            <a:pPr algn="ctr"/>
+          </a:p>
+        </p:txBody>
+      </p:sp>
+      <p:sp>
+        <p:nvSpPr>
+          <p:cNvPr id="11" name="Rounded Rectangle 10"/>
+          <p:cNvSpPr/>
+          <p:nvPr/>
+        </p:nvSpPr>
+        <p:spPr>
+          <a:xfrm>
+            <a:off x="523036" y="358444"/>
+            <a:ext cx="96926" cy="96926"/>
+          </a:xfrm>
+          <a:prstGeom prst="roundRect">
+            <a:avLst>
+              <a:gd name="adj" fmla="val 30000"/>
+            </a:avLst>
+          </a:prstGeom>
+          <a:solidFill>
+            <a:srgbClr val="FFFFFF"/>
+          </a:solidFill>
+          <a:ln>
+            <a:noFill/>
+          </a:ln>
+          <a:effectLst/>
+        </p:spPr>
+        <p:style>
+          <a:lnRef idx="1">
+            <a:schemeClr val="accent1"/>
+          </a:lnRef>
+          <a:fillRef idx="3">
+            <a:schemeClr val="accent1"/>
+          </a:fillRef>
+          <a:effectRef idx="2">
+            <a:schemeClr val="accent1"/>
+          </a:effectRef>
+          <a:fontRef idx="minor">
+            <a:schemeClr val="lt1"/>
+          </a:fontRef>
+        </p:style>
+        <p:txBody>
+          <a:bodyPr rtlCol="0" anchor="ctr"/>
+          <a:lstStyle/>
+          <a:p>
+            <a:pPr algn="ctr"/>
+          </a:p>
+        </p:txBody>
+      </p:sp>
+      <p:sp>
+        <p:nvSpPr>
+          <p:cNvPr id="12" name="TextBox 11"/>
+          <p:cNvSpPr txBox="1"/>
+          <p:nvPr/>
+        </p:nvSpPr>
+        <p:spPr>
+          <a:xfrm>
+            <a:off x="822960" y="292608"/>
+            <a:ext cx="8229600" cy="237744"/>
+          </a:xfrm>
+          <a:prstGeom prst="rect">
+            <a:avLst/>
+          </a:prstGeom>
+          <a:noFill/>
+        </p:spPr>
+        <p:txBody>
+          <a:bodyPr wrap="square" lIns="0" rIns="0" tIns="0" bIns="0" anchor="ctr">
+            <a:spAutoFit/>
+          </a:bodyPr>
+          <a:lstStyle/>
+          <a:p>
+            <a:pPr algn="l">
+              <a:lnSpc>
+                <a:spcPct val="100000"/>
+              </a:lnSpc>
+            </a:pPr>
+            <a:r>
+              <a:rPr sz="900" b="1" spc="240">
+                <a:solidFill>
+                  <a:srgbClr val="1657B0"/>
+                </a:solidFill>
+                <a:latin typeface="Menlo"/>
+              </a:rPr>
+              <a:t>ARCHITECTURE COPILOT</a:t>
+            </a:r>
+            <a:r>
+              <a:rPr sz="900" b="0" spc="240">
+                <a:solidFill>
+                  <a:srgbClr val="93A0B2"/>
+                </a:solidFill>
+                <a:latin typeface="Menlo"/>
+              </a:rPr>
+              <a:t>   ·   BENEFITS</a:t>
+            </a:r>
+          </a:p>
+        </p:txBody>
+      </p:sp>
+      <p:sp>
+        <p:nvSpPr>
+          <p:cNvPr id="13" name="Rounded Rectangle 12"/>
+          <p:cNvSpPr/>
+          <p:nvPr/>
+        </p:nvSpPr>
+        <p:spPr>
+          <a:xfrm>
+            <a:off x="9768535" y="274320"/>
+            <a:ext cx="1965960" cy="292608"/>
+          </a:xfrm>
+          <a:prstGeom prst="roundRect">
+            <a:avLst>
+              <a:gd name="adj" fmla="val 50000"/>
+            </a:avLst>
+          </a:prstGeom>
+          <a:noFill/>
+          <a:ln w="9525">
+            <a:solidFill>
+              <a:srgbClr val="D2DBE7"/>
+            </a:solidFill>
+          </a:ln>
+          <a:effectLst/>
+        </p:spPr>
+        <p:style>
+          <a:lnRef idx="1">
+            <a:schemeClr val="accent1"/>
+          </a:lnRef>
+          <a:fillRef idx="3">
+            <a:schemeClr val="accent1"/>
+          </a:fillRef>
+          <a:effectRef idx="2">
+            <a:schemeClr val="accent1"/>
+          </a:effectRef>
+          <a:fontRef idx="minor">
+            <a:schemeClr val="lt1"/>
+          </a:fontRef>
+        </p:style>
+        <p:txBody>
+          <a:bodyPr rtlCol="0" anchor="ctr"/>
+          <a:lstStyle/>
+          <a:p>
+            <a:pPr algn="ctr"/>
+          </a:p>
+        </p:txBody>
+      </p:sp>
+      <p:sp>
+        <p:nvSpPr>
+          <p:cNvPr id="14" name="TextBox 13"/>
+          <p:cNvSpPr txBox="1"/>
+          <p:nvPr/>
+        </p:nvSpPr>
+        <p:spPr>
+          <a:xfrm>
+            <a:off x="9905695" y="274320"/>
+            <a:ext cx="1691640" cy="292608"/>
+          </a:xfrm>
+          <a:prstGeom prst="rect">
+            <a:avLst/>
+          </a:prstGeom>
+          <a:noFill/>
+        </p:spPr>
+        <p:txBody>
+          <a:bodyPr wrap="square" lIns="0" rIns="0" tIns="0" bIns="0" anchor="ctr">
+            <a:spAutoFit/>
+          </a:bodyPr>
+          <a:lstStyle/>
+          <a:p>
+            <a:pPr algn="l">
+              <a:lnSpc>
+                <a:spcPct val="100000"/>
+              </a:lnSpc>
+            </a:pPr>
+            <a:r>
+              <a:rPr sz="850" b="0">
+                <a:solidFill>
+                  <a:srgbClr val="51617A"/>
+                </a:solidFill>
+                <a:latin typeface="Menlo"/>
+              </a:rPr>
+              <a:t>12 reasons it pays off</a:t>
+            </a:r>
+          </a:p>
+        </p:txBody>
+      </p:sp>
+      <p:sp>
+        <p:nvSpPr>
+          <p:cNvPr id="15" name="TextBox 14"/>
+          <p:cNvSpPr txBox="1"/>
+          <p:nvPr/>
+        </p:nvSpPr>
+        <p:spPr>
+          <a:xfrm>
+            <a:off x="457200" y="585216"/>
+            <a:ext cx="11338560" cy="502920"/>
+          </a:xfrm>
+          <a:prstGeom prst="rect">
+            <a:avLst/>
+          </a:prstGeom>
+          <a:noFill/>
+        </p:spPr>
+        <p:txBody>
+          <a:bodyPr wrap="square" lIns="0" rIns="0" tIns="0" bIns="0" anchor="t">
+            <a:spAutoFit/>
+          </a:bodyPr>
+          <a:lstStyle/>
+          <a:p>
+            <a:pPr algn="l">
+              <a:lnSpc>
+                <a:spcPct val="100000"/>
+              </a:lnSpc>
+            </a:pPr>
+            <a:r>
+              <a:rPr sz="2200" b="0" spc="-20">
+                <a:solidFill>
+                  <a:srgbClr val="16202E"/>
+                </a:solidFill>
+                <a:latin typeface="Helvetica Neue"/>
+              </a:rPr>
+              <a:t>The payoff — </a:t>
+            </a:r>
+            <a:r>
+              <a:rPr sz="2200" b="1" spc="-20">
+                <a:solidFill>
+                  <a:srgbClr val="1657B0"/>
+                </a:solidFill>
+                <a:latin typeface="Helvetica Neue"/>
+              </a:rPr>
+              <a:t>why teams adopt it</a:t>
+            </a:r>
+          </a:p>
+        </p:txBody>
+      </p:sp>
+      <p:sp>
+        <p:nvSpPr>
+          <p:cNvPr id="16" name="Rounded Rectangle 15"/>
+          <p:cNvSpPr/>
+          <p:nvPr/>
+        </p:nvSpPr>
+        <p:spPr>
+          <a:xfrm>
+            <a:off x="457200" y="1152144"/>
+            <a:ext cx="1371600" cy="41148"/>
+          </a:xfrm>
+          <a:prstGeom prst="roundRect">
+            <a:avLst>
+              <a:gd name="adj" fmla="val 50000"/>
+            </a:avLst>
+          </a:prstGeom>
+          <a:solidFill>
+            <a:srgbClr val="1657B0"/>
+          </a:solidFill>
+          <a:ln>
+            <a:noFill/>
+          </a:ln>
+          <a:effectLst/>
+        </p:spPr>
+        <p:style>
+          <a:lnRef idx="1">
+            <a:schemeClr val="accent1"/>
+          </a:lnRef>
+          <a:fillRef idx="3">
+            <a:schemeClr val="accent1"/>
+          </a:fillRef>
+          <a:effectRef idx="2">
+            <a:schemeClr val="accent1"/>
+          </a:effectRef>
+          <a:fontRef idx="minor">
+            <a:schemeClr val="lt1"/>
+          </a:fontRef>
+        </p:style>
+        <p:txBody>
+          <a:bodyPr rtlCol="0" anchor="ctr"/>
+          <a:lstStyle/>
+          <a:p>
+            <a:pPr algn="ctr"/>
+          </a:p>
+        </p:txBody>
+      </p:sp>
+      <p:sp>
+        <p:nvSpPr>
+          <p:cNvPr id="17" name="TextBox 16"/>
+          <p:cNvSpPr txBox="1"/>
+          <p:nvPr/>
+        </p:nvSpPr>
+        <p:spPr>
+          <a:xfrm>
+            <a:off x="457200" y="1280160"/>
+            <a:ext cx="11338560" cy="274320"/>
+          </a:xfrm>
+          <a:prstGeom prst="rect">
+            <a:avLst/>
+          </a:prstGeom>
+          <a:noFill/>
+        </p:spPr>
+        <p:txBody>
+          <a:bodyPr wrap="square" lIns="0" rIns="0" tIns="0" bIns="0" anchor="t">
+            <a:spAutoFit/>
+          </a:bodyPr>
+          <a:lstStyle/>
+          <a:p>
+            <a:pPr algn="l">
+              <a:lnSpc>
+                <a:spcPct val="100000"/>
+              </a:lnSpc>
+            </a:pPr>
+            <a:r>
+              <a:rPr sz="1050" b="0">
+                <a:solidFill>
+                  <a:srgbClr val="51617A"/>
+                </a:solidFill>
+                <a:latin typeface="Helvetica Neue"/>
+              </a:rPr>
+              <a:t>From one Jira line to a governed, documented, deck-quality architecture — here is what you get.</a:t>
+            </a:r>
+          </a:p>
+        </p:txBody>
+      </p:sp>
+      <p:sp>
+        <p:nvSpPr>
+          <p:cNvPr id="18" name="Rectangle 17"/>
+          <p:cNvSpPr/>
+          <p:nvPr/>
+        </p:nvSpPr>
+        <p:spPr>
+          <a:xfrm>
+            <a:off x="457200" y="1810512"/>
+            <a:ext cx="11277295" cy="10058"/>
+          </a:xfrm>
+          <a:prstGeom prst="rect">
+            <a:avLst/>
+          </a:prstGeom>
+          <a:solidFill>
+            <a:srgbClr val="E7ECF3"/>
+          </a:solidFill>
+          <a:ln>
+            <a:noFill/>
+          </a:ln>
+          <a:effectLst/>
+        </p:spPr>
+        <p:style>
+          <a:lnRef idx="1">
+            <a:schemeClr val="accent1"/>
+          </a:lnRef>
+          <a:fillRef idx="3">
+            <a:schemeClr val="accent1"/>
+          </a:fillRef>
+          <a:effectRef idx="2">
+            <a:schemeClr val="accent1"/>
+          </a:effectRef>
+          <a:fontRef idx="minor">
+            <a:schemeClr val="lt1"/>
+          </a:fontRef>
+        </p:style>
+        <p:txBody>
+          <a:bodyPr rtlCol="0" anchor="ctr"/>
+          <a:lstStyle/>
+          <a:p>
+            <a:pPr algn="ctr"/>
+          </a:p>
+        </p:txBody>
+      </p:sp>
+      <p:sp>
+        <p:nvSpPr>
+          <p:cNvPr id="19" name="Rectangle 18"/>
+          <p:cNvSpPr/>
+          <p:nvPr/>
+        </p:nvSpPr>
+        <p:spPr>
+          <a:xfrm>
+            <a:off x="6095847" y="2011680"/>
+            <a:ext cx="10058" cy="3931920"/>
+          </a:xfrm>
+          <a:prstGeom prst="rect">
+            <a:avLst/>
+          </a:prstGeom>
+          <a:solidFill>
+            <a:srgbClr val="E7ECF3"/>
+          </a:solidFill>
+          <a:ln>
+            <a:noFill/>
+          </a:ln>
+          <a:effectLst/>
+        </p:spPr>
+        <p:style>
+          <a:lnRef idx="1">
+            <a:schemeClr val="accent1"/>
+          </a:lnRef>
+          <a:fillRef idx="3">
+            <a:schemeClr val="accent1"/>
+          </a:fillRef>
+          <a:effectRef idx="2">
+            <a:schemeClr val="accent1"/>
+          </a:effectRef>
+          <a:fontRef idx="minor">
+            <a:schemeClr val="lt1"/>
+          </a:fontRef>
+        </p:style>
+        <p:txBody>
+          <a:bodyPr rtlCol="0" anchor="ctr"/>
+          <a:lstStyle/>
+          <a:p>
+            <a:pPr algn="ctr"/>
+          </a:p>
+        </p:txBody>
+      </p:sp>
+      <p:sp>
+        <p:nvSpPr>
+          <p:cNvPr id="20" name="Oval 19"/>
+          <p:cNvSpPr/>
+          <p:nvPr/>
+        </p:nvSpPr>
+        <p:spPr>
+          <a:xfrm>
+            <a:off x="457200" y="2103120"/>
+            <a:ext cx="219456" cy="219456"/>
+          </a:xfrm>
+          <a:prstGeom prst="ellipse">
+            <a:avLst/>
+          </a:prstGeom>
+          <a:solidFill>
+            <a:srgbClr val="1657B0"/>
+          </a:solidFill>
+          <a:ln>
+            <a:noFill/>
+          </a:ln>
+          <a:effectLst>
+            <a:outerShdw blurRad="82296" dist="25603" dir="5400000" rotWithShape="0">
+              <a:srgbClr val="1B2A40">
+                <a:alpha val="11000"/>
+              </a:srgbClr>
+            </a:outerShdw>
+          </a:effectLst>
+        </p:spPr>
+        <p:style>
+          <a:lnRef idx="1">
+            <a:schemeClr val="accent1"/>
+          </a:lnRef>
+          <a:fillRef idx="3">
+            <a:schemeClr val="accent1"/>
+          </a:fillRef>
+          <a:effectRef idx="2">
+            <a:schemeClr val="accent1"/>
+          </a:effectRef>
+          <a:fontRef idx="minor">
+            <a:schemeClr val="lt1"/>
+          </a:fontRef>
+        </p:style>
+        <p:txBody>
+          <a:bodyPr rtlCol="0" anchor="ctr"/>
+          <a:lstStyle/>
+          <a:p>
+            <a:pPr algn="ctr"/>
+          </a:p>
+        </p:txBody>
+      </p:sp>
+      <p:sp>
+        <p:nvSpPr>
+          <p:cNvPr id="21" name="TextBox 20"/>
+          <p:cNvSpPr txBox="1"/>
+          <p:nvPr/>
+        </p:nvSpPr>
+        <p:spPr>
+          <a:xfrm>
+            <a:off x="457200" y="2103120"/>
+            <a:ext cx="219456" cy="219456"/>
+          </a:xfrm>
+          <a:prstGeom prst="rect">
+            <a:avLst/>
+          </a:prstGeom>
+          <a:noFill/>
+        </p:spPr>
+        <p:txBody>
+          <a:bodyPr wrap="square" lIns="0" rIns="0" tIns="0" bIns="0" anchor="ctr">
+            <a:spAutoFit/>
+          </a:bodyPr>
+          <a:lstStyle/>
+          <a:p>
+            <a:pPr algn="ctr">
+              <a:lnSpc>
+                <a:spcPct val="100000"/>
+              </a:lnSpc>
+            </a:pPr>
+            <a:r>
+              <a:rPr sz="1100" b="1">
+                <a:solidFill>
+                  <a:srgbClr val="FFFFFF"/>
+                </a:solidFill>
+                <a:latin typeface="Helvetica Neue"/>
+              </a:rPr>
+              <a:t>✓</a:t>
+            </a:r>
+          </a:p>
+        </p:txBody>
+      </p:sp>
+      <p:sp>
+        <p:nvSpPr>
+          <p:cNvPr id="22" name="TextBox 21"/>
+          <p:cNvSpPr txBox="1"/>
+          <p:nvPr/>
+        </p:nvSpPr>
+        <p:spPr>
+          <a:xfrm>
+            <a:off x="804672" y="2066543"/>
+            <a:ext cx="4980279" cy="237744"/>
+          </a:xfrm>
+          <a:prstGeom prst="rect">
+            <a:avLst/>
+          </a:prstGeom>
+          <a:noFill/>
+        </p:spPr>
+        <p:txBody>
+          <a:bodyPr wrap="square" lIns="0" rIns="0" tIns="0" bIns="0" anchor="t">
+            <a:spAutoFit/>
+          </a:bodyPr>
+          <a:lstStyle/>
+          <a:p>
+            <a:pPr algn="l">
+              <a:lnSpc>
+                <a:spcPct val="100000"/>
+              </a:lnSpc>
+            </a:pPr>
+            <a:r>
+              <a:rPr sz="1150" b="1">
+                <a:solidFill>
+                  <a:srgbClr val="16202E"/>
+                </a:solidFill>
+                <a:latin typeface="Helvetica Neue"/>
+              </a:rPr>
+              <a:t>Build end-to-end in one prompt</a:t>
+            </a:r>
+          </a:p>
+        </p:txBody>
+      </p:sp>
+      <p:sp>
+        <p:nvSpPr>
+          <p:cNvPr id="23" name="TextBox 22"/>
+          <p:cNvSpPr txBox="1"/>
+          <p:nvPr/>
+        </p:nvSpPr>
+        <p:spPr>
+          <a:xfrm>
+            <a:off x="804672" y="2304287"/>
+            <a:ext cx="4980279" cy="274320"/>
+          </a:xfrm>
+          <a:prstGeom prst="rect">
+            <a:avLst/>
+          </a:prstGeom>
+          <a:noFill/>
+        </p:spPr>
+        <p:txBody>
+          <a:bodyPr wrap="square" lIns="0" rIns="0" tIns="0" bIns="0" anchor="t">
+            <a:spAutoFit/>
+          </a:bodyPr>
+          <a:lstStyle/>
+          <a:p>
+            <a:pPr algn="l">
+              <a:lnSpc>
+                <a:spcPct val="100000"/>
+              </a:lnSpc>
+            </a:pPr>
+            <a:r>
+              <a:rPr sz="850" b="0">
+                <a:solidFill>
+                  <a:srgbClr val="51617A"/>
+                </a:solidFill>
+                <a:latin typeface="Helvetica Neue"/>
+              </a:rPr>
+              <a:t>One plain-English line becomes a complete, laid-out architecture.</a:t>
+            </a:r>
+          </a:p>
+        </p:txBody>
+      </p:sp>
+      <p:sp>
+        <p:nvSpPr>
+          <p:cNvPr id="24" name="Oval 23"/>
+          <p:cNvSpPr/>
+          <p:nvPr/>
+        </p:nvSpPr>
+        <p:spPr>
+          <a:xfrm>
+            <a:off x="457200" y="2775203"/>
+            <a:ext cx="219456" cy="219456"/>
+          </a:xfrm>
+          <a:prstGeom prst="ellipse">
+            <a:avLst/>
+          </a:prstGeom>
+          <a:solidFill>
+            <a:srgbClr val="1657B0"/>
+          </a:solidFill>
+          <a:ln>
+            <a:noFill/>
+          </a:ln>
+          <a:effectLst>
+            <a:outerShdw blurRad="82296" dist="25603" dir="5400000" rotWithShape="0">
+              <a:srgbClr val="1B2A40">
+                <a:alpha val="11000"/>
+              </a:srgbClr>
+            </a:outerShdw>
+          </a:effectLst>
+        </p:spPr>
+        <p:style>
+          <a:lnRef idx="1">
+            <a:schemeClr val="accent1"/>
+          </a:lnRef>
+          <a:fillRef idx="3">
+            <a:schemeClr val="accent1"/>
+          </a:fillRef>
+          <a:effectRef idx="2">
+            <a:schemeClr val="accent1"/>
+          </a:effectRef>
+          <a:fontRef idx="minor">
+            <a:schemeClr val="lt1"/>
+          </a:fontRef>
+        </p:style>
+        <p:txBody>
+          <a:bodyPr rtlCol="0" anchor="ctr"/>
+          <a:lstStyle/>
+          <a:p>
+            <a:pPr algn="ctr"/>
+          </a:p>
+        </p:txBody>
+      </p:sp>
+      <p:sp>
+        <p:nvSpPr>
+          <p:cNvPr id="25" name="TextBox 24"/>
+          <p:cNvSpPr txBox="1"/>
+          <p:nvPr/>
+        </p:nvSpPr>
+        <p:spPr>
+          <a:xfrm>
+            <a:off x="457200" y="2775203"/>
+            <a:ext cx="219456" cy="219456"/>
+          </a:xfrm>
+          <a:prstGeom prst="rect">
+            <a:avLst/>
+          </a:prstGeom>
+          <a:noFill/>
+        </p:spPr>
+        <p:txBody>
+          <a:bodyPr wrap="square" lIns="0" rIns="0" tIns="0" bIns="0" anchor="ctr">
+            <a:spAutoFit/>
+          </a:bodyPr>
+          <a:lstStyle/>
+          <a:p>
+            <a:pPr algn="ctr">
+              <a:lnSpc>
+                <a:spcPct val="100000"/>
+              </a:lnSpc>
+            </a:pPr>
+            <a:r>
+              <a:rPr sz="1100" b="1">
+                <a:solidFill>
+                  <a:srgbClr val="FFFFFF"/>
+                </a:solidFill>
+                <a:latin typeface="Helvetica Neue"/>
+              </a:rPr>
+              <a:t>✓</a:t>
+            </a:r>
+          </a:p>
+        </p:txBody>
+      </p:sp>
+      <p:sp>
+        <p:nvSpPr>
+          <p:cNvPr id="26" name="TextBox 25"/>
+          <p:cNvSpPr txBox="1"/>
+          <p:nvPr/>
+        </p:nvSpPr>
+        <p:spPr>
+          <a:xfrm>
+            <a:off x="804672" y="2738627"/>
+            <a:ext cx="4980279" cy="237744"/>
+          </a:xfrm>
+          <a:prstGeom prst="rect">
+            <a:avLst/>
+          </a:prstGeom>
+          <a:noFill/>
+        </p:spPr>
+        <p:txBody>
+          <a:bodyPr wrap="square" lIns="0" rIns="0" tIns="0" bIns="0" anchor="t">
+            <a:spAutoFit/>
+          </a:bodyPr>
+          <a:lstStyle/>
+          <a:p>
+            <a:pPr algn="l">
+              <a:lnSpc>
+                <a:spcPct val="100000"/>
+              </a:lnSpc>
+            </a:pPr>
+            <a:r>
+              <a:rPr sz="1150" b="1">
+                <a:solidFill>
+                  <a:srgbClr val="16202E"/>
+                </a:solidFill>
+                <a:latin typeface="Helvetica Neue"/>
+              </a:rPr>
+              <a:t>Explore approaches from one Jira</a:t>
+            </a:r>
+          </a:p>
+        </p:txBody>
+      </p:sp>
+      <p:sp>
+        <p:nvSpPr>
+          <p:cNvPr id="27" name="TextBox 26"/>
+          <p:cNvSpPr txBox="1"/>
+          <p:nvPr/>
+        </p:nvSpPr>
+        <p:spPr>
+          <a:xfrm>
+            <a:off x="804672" y="2976372"/>
+            <a:ext cx="4980279" cy="274320"/>
+          </a:xfrm>
+          <a:prstGeom prst="rect">
+            <a:avLst/>
+          </a:prstGeom>
+          <a:noFill/>
+        </p:spPr>
+        <p:txBody>
+          <a:bodyPr wrap="square" lIns="0" rIns="0" tIns="0" bIns="0" anchor="t">
+            <a:spAutoFit/>
+          </a:bodyPr>
+          <a:lstStyle/>
+          <a:p>
+            <a:pPr algn="l">
+              <a:lnSpc>
+                <a:spcPct val="100000"/>
+              </a:lnSpc>
+            </a:pPr>
+            <a:r>
+              <a:rPr sz="850" b="0">
+                <a:solidFill>
+                  <a:srgbClr val="51617A"/>
+                </a:solidFill>
+                <a:latin typeface="Helvetica Neue"/>
+              </a:rPr>
+              <a:t>Re-run different framings; every run is timestamped, never overwritten.</a:t>
+            </a:r>
+          </a:p>
+        </p:txBody>
+      </p:sp>
+      <p:sp>
+        <p:nvSpPr>
+          <p:cNvPr id="28" name="Oval 27"/>
+          <p:cNvSpPr/>
+          <p:nvPr/>
+        </p:nvSpPr>
+        <p:spPr>
+          <a:xfrm>
+            <a:off x="457200" y="3447288"/>
+            <a:ext cx="219456" cy="219456"/>
+          </a:xfrm>
+          <a:prstGeom prst="ellipse">
+            <a:avLst/>
+          </a:prstGeom>
+          <a:solidFill>
+            <a:srgbClr val="1657B0"/>
+          </a:solidFill>
+          <a:ln>
+            <a:noFill/>
+          </a:ln>
+          <a:effectLst>
+            <a:outerShdw blurRad="82296" dist="25603" dir="5400000" rotWithShape="0">
+              <a:srgbClr val="1B2A40">
+                <a:alpha val="11000"/>
+              </a:srgbClr>
+            </a:outerShdw>
+          </a:effectLst>
+        </p:spPr>
+        <p:style>
+          <a:lnRef idx="1">
+            <a:schemeClr val="accent1"/>
+          </a:lnRef>
+          <a:fillRef idx="3">
+            <a:schemeClr val="accent1"/>
+          </a:fillRef>
+          <a:effectRef idx="2">
+            <a:schemeClr val="accent1"/>
+          </a:effectRef>
+          <a:fontRef idx="minor">
+            <a:schemeClr val="lt1"/>
+          </a:fontRef>
+        </p:style>
+        <p:txBody>
+          <a:bodyPr rtlCol="0" anchor="ctr"/>
+          <a:lstStyle/>
+          <a:p>
+            <a:pPr algn="ctr"/>
+          </a:p>
+        </p:txBody>
+      </p:sp>
+      <p:sp>
+        <p:nvSpPr>
+          <p:cNvPr id="29" name="TextBox 28"/>
+          <p:cNvSpPr txBox="1"/>
+          <p:nvPr/>
+        </p:nvSpPr>
+        <p:spPr>
+          <a:xfrm>
+            <a:off x="457200" y="3447288"/>
+            <a:ext cx="219456" cy="219456"/>
+          </a:xfrm>
+          <a:prstGeom prst="rect">
+            <a:avLst/>
+          </a:prstGeom>
+          <a:noFill/>
+        </p:spPr>
+        <p:txBody>
+          <a:bodyPr wrap="square" lIns="0" rIns="0" tIns="0" bIns="0" anchor="ctr">
+            <a:spAutoFit/>
+          </a:bodyPr>
+          <a:lstStyle/>
+          <a:p>
+            <a:pPr algn="ctr">
+              <a:lnSpc>
+                <a:spcPct val="100000"/>
+              </a:lnSpc>
+            </a:pPr>
+            <a:r>
+              <a:rPr sz="1100" b="1">
+                <a:solidFill>
+                  <a:srgbClr val="FFFFFF"/>
+                </a:solidFill>
+                <a:latin typeface="Helvetica Neue"/>
+              </a:rPr>
+              <a:t>✓</a:t>
+            </a:r>
+          </a:p>
+        </p:txBody>
+      </p:sp>
+      <p:sp>
+        <p:nvSpPr>
+          <p:cNvPr id="30" name="TextBox 29"/>
+          <p:cNvSpPr txBox="1"/>
+          <p:nvPr/>
+        </p:nvSpPr>
+        <p:spPr>
+          <a:xfrm>
+            <a:off x="804672" y="3410712"/>
+            <a:ext cx="4980279" cy="237744"/>
+          </a:xfrm>
+          <a:prstGeom prst="rect">
+            <a:avLst/>
+          </a:prstGeom>
+          <a:noFill/>
+        </p:spPr>
+        <p:txBody>
+          <a:bodyPr wrap="square" lIns="0" rIns="0" tIns="0" bIns="0" anchor="t">
+            <a:spAutoFit/>
+          </a:bodyPr>
+          <a:lstStyle/>
+          <a:p>
+            <a:pPr algn="l">
+              <a:lnSpc>
+                <a:spcPct val="100000"/>
+              </a:lnSpc>
+            </a:pPr>
+            <a:r>
+              <a:rPr sz="1150" b="1">
+                <a:solidFill>
+                  <a:srgbClr val="16202E"/>
+                </a:solidFill>
+                <a:latin typeface="Helvetica Neue"/>
+              </a:rPr>
+              <a:t>Governance without the homework</a:t>
+            </a:r>
+          </a:p>
+        </p:txBody>
+      </p:sp>
+      <p:sp>
+        <p:nvSpPr>
+          <p:cNvPr id="31" name="TextBox 30"/>
+          <p:cNvSpPr txBox="1"/>
+          <p:nvPr/>
+        </p:nvSpPr>
+        <p:spPr>
+          <a:xfrm>
+            <a:off x="804672" y="3648456"/>
+            <a:ext cx="4980279" cy="274320"/>
+          </a:xfrm>
+          <a:prstGeom prst="rect">
+            <a:avLst/>
+          </a:prstGeom>
+          <a:noFill/>
+        </p:spPr>
+        <p:txBody>
+          <a:bodyPr wrap="square" lIns="0" rIns="0" tIns="0" bIns="0" anchor="t">
+            <a:spAutoFit/>
+          </a:bodyPr>
+          <a:lstStyle/>
+          <a:p>
+            <a:pPr algn="l">
+              <a:lnSpc>
+                <a:spcPct val="100000"/>
+              </a:lnSpc>
+            </a:pPr>
+            <a:r>
+              <a:rPr sz="850" b="0">
+                <a:solidFill>
+                  <a:srgbClr val="51617A"/>
+                </a:solidFill>
+                <a:latin typeface="Helvetica Neue"/>
+              </a:rPr>
+              <a:t>No need to track allowed vs blocked services — it flags and proposes options.</a:t>
+            </a:r>
+          </a:p>
+        </p:txBody>
+      </p:sp>
+      <p:sp>
+        <p:nvSpPr>
+          <p:cNvPr id="32" name="Oval 31"/>
+          <p:cNvSpPr/>
+          <p:nvPr/>
+        </p:nvSpPr>
+        <p:spPr>
+          <a:xfrm>
+            <a:off x="457200" y="4119371"/>
+            <a:ext cx="219456" cy="219456"/>
+          </a:xfrm>
+          <a:prstGeom prst="ellipse">
+            <a:avLst/>
+          </a:prstGeom>
+          <a:solidFill>
+            <a:srgbClr val="1657B0"/>
+          </a:solidFill>
+          <a:ln>
+            <a:noFill/>
+          </a:ln>
+          <a:effectLst>
+            <a:outerShdw blurRad="82296" dist="25603" dir="5400000" rotWithShape="0">
+              <a:srgbClr val="1B2A40">
+                <a:alpha val="11000"/>
+              </a:srgbClr>
+            </a:outerShdw>
+          </a:effectLst>
+        </p:spPr>
+        <p:style>
+          <a:lnRef idx="1">
+            <a:schemeClr val="accent1"/>
+          </a:lnRef>
+          <a:fillRef idx="3">
+            <a:schemeClr val="accent1"/>
+          </a:fillRef>
+          <a:effectRef idx="2">
+            <a:schemeClr val="accent1"/>
+          </a:effectRef>
+          <a:fontRef idx="minor">
+            <a:schemeClr val="lt1"/>
+          </a:fontRef>
+        </p:style>
+        <p:txBody>
+          <a:bodyPr rtlCol="0" anchor="ctr"/>
+          <a:lstStyle/>
+          <a:p>
+            <a:pPr algn="ctr"/>
+          </a:p>
+        </p:txBody>
+      </p:sp>
+      <p:sp>
+        <p:nvSpPr>
+          <p:cNvPr id="33" name="TextBox 32"/>
+          <p:cNvSpPr txBox="1"/>
+          <p:nvPr/>
+        </p:nvSpPr>
+        <p:spPr>
+          <a:xfrm>
+            <a:off x="457200" y="4119371"/>
+            <a:ext cx="219456" cy="219456"/>
+          </a:xfrm>
+          <a:prstGeom prst="rect">
+            <a:avLst/>
+          </a:prstGeom>
+          <a:noFill/>
+        </p:spPr>
+        <p:txBody>
+          <a:bodyPr wrap="square" lIns="0" rIns="0" tIns="0" bIns="0" anchor="ctr">
+            <a:spAutoFit/>
+          </a:bodyPr>
+          <a:lstStyle/>
+          <a:p>
+            <a:pPr algn="ctr">
+              <a:lnSpc>
+                <a:spcPct val="100000"/>
+              </a:lnSpc>
+            </a:pPr>
+            <a:r>
+              <a:rPr sz="1100" b="1">
+                <a:solidFill>
+                  <a:srgbClr val="FFFFFF"/>
+                </a:solidFill>
+                <a:latin typeface="Helvetica Neue"/>
+              </a:rPr>
+              <a:t>✓</a:t>
+            </a:r>
+          </a:p>
+        </p:txBody>
+      </p:sp>
+      <p:sp>
+        <p:nvSpPr>
+          <p:cNvPr id="34" name="TextBox 33"/>
+          <p:cNvSpPr txBox="1"/>
+          <p:nvPr/>
+        </p:nvSpPr>
+        <p:spPr>
+          <a:xfrm>
+            <a:off x="804672" y="4082796"/>
+            <a:ext cx="4980279" cy="237744"/>
+          </a:xfrm>
+          <a:prstGeom prst="rect">
+            <a:avLst/>
+          </a:prstGeom>
+          <a:noFill/>
+        </p:spPr>
+        <p:txBody>
+          <a:bodyPr wrap="square" lIns="0" rIns="0" tIns="0" bIns="0" anchor="t">
+            <a:spAutoFit/>
+          </a:bodyPr>
+          <a:lstStyle/>
+          <a:p>
+            <a:pPr algn="l">
+              <a:lnSpc>
+                <a:spcPct val="100000"/>
+              </a:lnSpc>
+            </a:pPr>
+            <a:r>
+              <a:rPr sz="1150" b="1">
+                <a:solidFill>
+                  <a:srgbClr val="16202E"/>
+                </a:solidFill>
+                <a:latin typeface="Helvetica Neue"/>
+              </a:rPr>
+              <a:t>You approve every substitution</a:t>
+            </a:r>
+          </a:p>
+        </p:txBody>
+      </p:sp>
+      <p:sp>
+        <p:nvSpPr>
+          <p:cNvPr id="35" name="TextBox 34"/>
+          <p:cNvSpPr txBox="1"/>
+          <p:nvPr/>
+        </p:nvSpPr>
+        <p:spPr>
+          <a:xfrm>
+            <a:off x="804672" y="4320540"/>
+            <a:ext cx="4980279" cy="274320"/>
+          </a:xfrm>
+          <a:prstGeom prst="rect">
+            <a:avLst/>
+          </a:prstGeom>
+          <a:noFill/>
+        </p:spPr>
+        <p:txBody>
+          <a:bodyPr wrap="square" lIns="0" rIns="0" tIns="0" bIns="0" anchor="t">
+            <a:spAutoFit/>
+          </a:bodyPr>
+          <a:lstStyle/>
+          <a:p>
+            <a:pPr algn="l">
+              <a:lnSpc>
+                <a:spcPct val="100000"/>
+              </a:lnSpc>
+            </a:pPr>
+            <a:r>
+              <a:rPr sz="850" b="0">
+                <a:solidFill>
+                  <a:srgbClr val="51617A"/>
+                </a:solidFill>
+                <a:latin typeface="Helvetica Neue"/>
+              </a:rPr>
+              <a:t>Restricted services are swapped only after you pick — no silent choices.</a:t>
+            </a:r>
+          </a:p>
+        </p:txBody>
+      </p:sp>
+      <p:sp>
+        <p:nvSpPr>
+          <p:cNvPr id="36" name="Oval 35"/>
+          <p:cNvSpPr/>
+          <p:nvPr/>
+        </p:nvSpPr>
+        <p:spPr>
+          <a:xfrm>
+            <a:off x="457200" y="4791455"/>
+            <a:ext cx="219456" cy="219456"/>
+          </a:xfrm>
+          <a:prstGeom prst="ellipse">
+            <a:avLst/>
+          </a:prstGeom>
+          <a:solidFill>
+            <a:srgbClr val="1657B0"/>
+          </a:solidFill>
+          <a:ln>
+            <a:noFill/>
+          </a:ln>
+          <a:effectLst>
+            <a:outerShdw blurRad="82296" dist="25603" dir="5400000" rotWithShape="0">
+              <a:srgbClr val="1B2A40">
+                <a:alpha val="11000"/>
+              </a:srgbClr>
+            </a:outerShdw>
+          </a:effectLst>
+        </p:spPr>
+        <p:style>
+          <a:lnRef idx="1">
+            <a:schemeClr val="accent1"/>
+          </a:lnRef>
+          <a:fillRef idx="3">
+            <a:schemeClr val="accent1"/>
+          </a:fillRef>
+          <a:effectRef idx="2">
+            <a:schemeClr val="accent1"/>
+          </a:effectRef>
+          <a:fontRef idx="minor">
+            <a:schemeClr val="lt1"/>
+          </a:fontRef>
+        </p:style>
+        <p:txBody>
+          <a:bodyPr rtlCol="0" anchor="ctr"/>
+          <a:lstStyle/>
+          <a:p>
+            <a:pPr algn="ctr"/>
+          </a:p>
+        </p:txBody>
+      </p:sp>
+      <p:sp>
+        <p:nvSpPr>
+          <p:cNvPr id="37" name="TextBox 36"/>
+          <p:cNvSpPr txBox="1"/>
+          <p:nvPr/>
+        </p:nvSpPr>
+        <p:spPr>
+          <a:xfrm>
+            <a:off x="457200" y="4791455"/>
+            <a:ext cx="219456" cy="219456"/>
+          </a:xfrm>
+          <a:prstGeom prst="rect">
+            <a:avLst/>
+          </a:prstGeom>
+          <a:noFill/>
+        </p:spPr>
+        <p:txBody>
+          <a:bodyPr wrap="square" lIns="0" rIns="0" tIns="0" bIns="0" anchor="ctr">
+            <a:spAutoFit/>
+          </a:bodyPr>
+          <a:lstStyle/>
+          <a:p>
+            <a:pPr algn="ctr">
+              <a:lnSpc>
+                <a:spcPct val="100000"/>
+              </a:lnSpc>
+            </a:pPr>
+            <a:r>
+              <a:rPr sz="1100" b="1">
+                <a:solidFill>
+                  <a:srgbClr val="FFFFFF"/>
+                </a:solidFill>
+                <a:latin typeface="Helvetica Neue"/>
+              </a:rPr>
+              <a:t>✓</a:t>
+            </a:r>
+          </a:p>
+        </p:txBody>
+      </p:sp>
+      <p:sp>
+        <p:nvSpPr>
+          <p:cNvPr id="38" name="TextBox 37"/>
+          <p:cNvSpPr txBox="1"/>
+          <p:nvPr/>
+        </p:nvSpPr>
+        <p:spPr>
+          <a:xfrm>
+            <a:off x="804672" y="4754880"/>
+            <a:ext cx="4980279" cy="237744"/>
+          </a:xfrm>
+          <a:prstGeom prst="rect">
+            <a:avLst/>
+          </a:prstGeom>
+          <a:noFill/>
+        </p:spPr>
+        <p:txBody>
+          <a:bodyPr wrap="square" lIns="0" rIns="0" tIns="0" bIns="0" anchor="t">
+            <a:spAutoFit/>
+          </a:bodyPr>
+          <a:lstStyle/>
+          <a:p>
+            <a:pPr algn="l">
+              <a:lnSpc>
+                <a:spcPct val="100000"/>
+              </a:lnSpc>
+            </a:pPr>
+            <a:r>
+              <a:rPr sz="1150" b="1">
+                <a:solidFill>
+                  <a:srgbClr val="16202E"/>
+                </a:solidFill>
+                <a:latin typeface="Helvetica Neue"/>
+              </a:rPr>
+              <a:t>Consistent, deck-quality output</a:t>
+            </a:r>
+          </a:p>
+        </p:txBody>
+      </p:sp>
+      <p:sp>
+        <p:nvSpPr>
+          <p:cNvPr id="39" name="TextBox 38"/>
+          <p:cNvSpPr txBox="1"/>
+          <p:nvPr/>
+        </p:nvSpPr>
+        <p:spPr>
+          <a:xfrm>
+            <a:off x="804672" y="4992624"/>
+            <a:ext cx="4980279" cy="274320"/>
+          </a:xfrm>
+          <a:prstGeom prst="rect">
+            <a:avLst/>
+          </a:prstGeom>
+          <a:noFill/>
+        </p:spPr>
+        <p:txBody>
+          <a:bodyPr wrap="square" lIns="0" rIns="0" tIns="0" bIns="0" anchor="t">
+            <a:spAutoFit/>
+          </a:bodyPr>
+          <a:lstStyle/>
+          <a:p>
+            <a:pPr algn="l">
+              <a:lnSpc>
+                <a:spcPct val="100000"/>
+              </a:lnSpc>
+            </a:pPr>
+            <a:r>
+              <a:rPr sz="850" b="0">
+                <a:solidFill>
+                  <a:srgbClr val="51617A"/>
+                </a:solidFill>
+                <a:latin typeface="Helvetica Neue"/>
+              </a:rPr>
+              <a:t>Swimlanes, official icons, numbered flows — identical quality, any author.</a:t>
+            </a:r>
+          </a:p>
+        </p:txBody>
+      </p:sp>
+      <p:sp>
+        <p:nvSpPr>
+          <p:cNvPr id="40" name="Oval 39"/>
+          <p:cNvSpPr/>
+          <p:nvPr/>
+        </p:nvSpPr>
+        <p:spPr>
+          <a:xfrm>
+            <a:off x="457200" y="5463540"/>
+            <a:ext cx="219456" cy="219456"/>
+          </a:xfrm>
+          <a:prstGeom prst="ellipse">
+            <a:avLst/>
+          </a:prstGeom>
+          <a:solidFill>
+            <a:srgbClr val="1657B0"/>
+          </a:solidFill>
+          <a:ln>
+            <a:noFill/>
+          </a:ln>
+          <a:effectLst>
+            <a:outerShdw blurRad="82296" dist="25603" dir="5400000" rotWithShape="0">
+              <a:srgbClr val="1B2A40">
+                <a:alpha val="11000"/>
+              </a:srgbClr>
+            </a:outerShdw>
+          </a:effectLst>
+        </p:spPr>
+        <p:style>
+          <a:lnRef idx="1">
+            <a:schemeClr val="accent1"/>
+          </a:lnRef>
+          <a:fillRef idx="3">
+            <a:schemeClr val="accent1"/>
+          </a:fillRef>
+          <a:effectRef idx="2">
+            <a:schemeClr val="accent1"/>
+          </a:effectRef>
+          <a:fontRef idx="minor">
+            <a:schemeClr val="lt1"/>
+          </a:fontRef>
+        </p:style>
+        <p:txBody>
+          <a:bodyPr rtlCol="0" anchor="ctr"/>
+          <a:lstStyle/>
+          <a:p>
+            <a:pPr algn="ctr"/>
+          </a:p>
+        </p:txBody>
+      </p:sp>
+      <p:sp>
+        <p:nvSpPr>
+          <p:cNvPr id="41" name="TextBox 40"/>
+          <p:cNvSpPr txBox="1"/>
+          <p:nvPr/>
+        </p:nvSpPr>
+        <p:spPr>
+          <a:xfrm>
+            <a:off x="457200" y="5463540"/>
+            <a:ext cx="219456" cy="219456"/>
+          </a:xfrm>
+          <a:prstGeom prst="rect">
+            <a:avLst/>
+          </a:prstGeom>
+          <a:noFill/>
+        </p:spPr>
+        <p:txBody>
+          <a:bodyPr wrap="square" lIns="0" rIns="0" tIns="0" bIns="0" anchor="ctr">
+            <a:spAutoFit/>
+          </a:bodyPr>
+          <a:lstStyle/>
+          <a:p>
+            <a:pPr algn="ctr">
+              <a:lnSpc>
+                <a:spcPct val="100000"/>
+              </a:lnSpc>
+            </a:pPr>
+            <a:r>
+              <a:rPr sz="1100" b="1">
+                <a:solidFill>
+                  <a:srgbClr val="FFFFFF"/>
+                </a:solidFill>
+                <a:latin typeface="Helvetica Neue"/>
+              </a:rPr>
+              <a:t>✓</a:t>
+            </a:r>
+          </a:p>
+        </p:txBody>
+      </p:sp>
+      <p:sp>
+        <p:nvSpPr>
+          <p:cNvPr id="42" name="TextBox 41"/>
+          <p:cNvSpPr txBox="1"/>
+          <p:nvPr/>
+        </p:nvSpPr>
+        <p:spPr>
+          <a:xfrm>
+            <a:off x="804672" y="5426964"/>
+            <a:ext cx="4980279" cy="237744"/>
+          </a:xfrm>
+          <a:prstGeom prst="rect">
+            <a:avLst/>
+          </a:prstGeom>
+          <a:noFill/>
+        </p:spPr>
+        <p:txBody>
+          <a:bodyPr wrap="square" lIns="0" rIns="0" tIns="0" bIns="0" anchor="t">
+            <a:spAutoFit/>
+          </a:bodyPr>
+          <a:lstStyle/>
+          <a:p>
+            <a:pPr algn="l">
+              <a:lnSpc>
+                <a:spcPct val="100000"/>
+              </a:lnSpc>
+            </a:pPr>
+            <a:r>
+              <a:rPr sz="1150" b="1">
+                <a:solidFill>
+                  <a:srgbClr val="16202E"/>
+                </a:solidFill>
+                <a:latin typeface="Helvetica Neue"/>
+              </a:rPr>
+              <a:t>Documentation for free</a:t>
+            </a:r>
+          </a:p>
+        </p:txBody>
+      </p:sp>
+      <p:sp>
+        <p:nvSpPr>
+          <p:cNvPr id="43" name="TextBox 42"/>
+          <p:cNvSpPr txBox="1"/>
+          <p:nvPr/>
+        </p:nvSpPr>
+        <p:spPr>
+          <a:xfrm>
+            <a:off x="804672" y="5664708"/>
+            <a:ext cx="4980279" cy="274320"/>
+          </a:xfrm>
+          <a:prstGeom prst="rect">
+            <a:avLst/>
+          </a:prstGeom>
+          <a:noFill/>
+        </p:spPr>
+        <p:txBody>
+          <a:bodyPr wrap="square" lIns="0" rIns="0" tIns="0" bIns="0" anchor="t">
+            <a:spAutoFit/>
+          </a:bodyPr>
+          <a:lstStyle/>
+          <a:p>
+            <a:pPr algn="l">
+              <a:lnSpc>
+                <a:spcPct val="100000"/>
+              </a:lnSpc>
+            </a:pPr>
+            <a:r>
+              <a:rPr sz="850" b="0">
+                <a:solidFill>
+                  <a:srgbClr val="51617A"/>
+                </a:solidFill>
+                <a:latin typeface="Helvetica Neue"/>
+              </a:rPr>
+              <a:t>A 14-column per-connector contract, embedded on the canvas, zero {TBD}.</a:t>
+            </a:r>
+          </a:p>
+        </p:txBody>
+      </p:sp>
+      <p:sp>
+        <p:nvSpPr>
+          <p:cNvPr id="44" name="Oval 43"/>
+          <p:cNvSpPr/>
+          <p:nvPr/>
+        </p:nvSpPr>
+        <p:spPr>
+          <a:xfrm>
+            <a:off x="6370167" y="2103120"/>
+            <a:ext cx="219456" cy="219456"/>
+          </a:xfrm>
+          <a:prstGeom prst="ellipse">
+            <a:avLst/>
+          </a:prstGeom>
+          <a:solidFill>
+            <a:srgbClr val="1657B0"/>
+          </a:solidFill>
+          <a:ln>
+            <a:noFill/>
+          </a:ln>
+          <a:effectLst>
+            <a:outerShdw blurRad="82296" dist="25603" dir="5400000" rotWithShape="0">
+              <a:srgbClr val="1B2A40">
+                <a:alpha val="11000"/>
+              </a:srgbClr>
+            </a:outerShdw>
+          </a:effectLst>
+        </p:spPr>
+        <p:style>
+          <a:lnRef idx="1">
+            <a:schemeClr val="accent1"/>
+          </a:lnRef>
+          <a:fillRef idx="3">
+            <a:schemeClr val="accent1"/>
+          </a:fillRef>
+          <a:effectRef idx="2">
+            <a:schemeClr val="accent1"/>
+          </a:effectRef>
+          <a:fontRef idx="minor">
+            <a:schemeClr val="lt1"/>
+          </a:fontRef>
+        </p:style>
+        <p:txBody>
+          <a:bodyPr rtlCol="0" anchor="ctr"/>
+          <a:lstStyle/>
+          <a:p>
+            <a:pPr algn="ctr"/>
+          </a:p>
+        </p:txBody>
+      </p:sp>
+      <p:sp>
+        <p:nvSpPr>
+          <p:cNvPr id="45" name="TextBox 44"/>
+          <p:cNvSpPr txBox="1"/>
+          <p:nvPr/>
+        </p:nvSpPr>
+        <p:spPr>
+          <a:xfrm>
+            <a:off x="6370167" y="2103120"/>
+            <a:ext cx="219456" cy="219456"/>
+          </a:xfrm>
+          <a:prstGeom prst="rect">
+            <a:avLst/>
+          </a:prstGeom>
+          <a:noFill/>
+        </p:spPr>
+        <p:txBody>
+          <a:bodyPr wrap="square" lIns="0" rIns="0" tIns="0" bIns="0" anchor="ctr">
+            <a:spAutoFit/>
+          </a:bodyPr>
+          <a:lstStyle/>
+          <a:p>
+            <a:pPr algn="ctr">
+              <a:lnSpc>
+                <a:spcPct val="100000"/>
+              </a:lnSpc>
+            </a:pPr>
+            <a:r>
+              <a:rPr sz="1100" b="1">
+                <a:solidFill>
+                  <a:srgbClr val="FFFFFF"/>
+                </a:solidFill>
+                <a:latin typeface="Helvetica Neue"/>
+              </a:rPr>
+              <a:t>✓</a:t>
+            </a:r>
+          </a:p>
+        </p:txBody>
+      </p:sp>
+      <p:sp>
+        <p:nvSpPr>
+          <p:cNvPr id="46" name="TextBox 45"/>
+          <p:cNvSpPr txBox="1"/>
+          <p:nvPr/>
+        </p:nvSpPr>
+        <p:spPr>
+          <a:xfrm>
+            <a:off x="6717639" y="2066543"/>
+            <a:ext cx="4980279" cy="237744"/>
+          </a:xfrm>
+          <a:prstGeom prst="rect">
+            <a:avLst/>
+          </a:prstGeom>
+          <a:noFill/>
+        </p:spPr>
+        <p:txBody>
+          <a:bodyPr wrap="square" lIns="0" rIns="0" tIns="0" bIns="0" anchor="t">
+            <a:spAutoFit/>
+          </a:bodyPr>
+          <a:lstStyle/>
+          <a:p>
+            <a:pPr algn="l">
+              <a:lnSpc>
+                <a:spcPct val="100000"/>
+              </a:lnSpc>
+            </a:pPr>
+            <a:r>
+              <a:rPr sz="1150" b="1">
+                <a:solidFill>
+                  <a:srgbClr val="16202E"/>
+                </a:solidFill>
+                <a:latin typeface="Helvetica Neue"/>
+              </a:rPr>
+              <a:t>Self-describing diagrams</a:t>
+            </a:r>
+          </a:p>
+        </p:txBody>
+      </p:sp>
+      <p:sp>
+        <p:nvSpPr>
+          <p:cNvPr id="47" name="TextBox 46"/>
+          <p:cNvSpPr txBox="1"/>
+          <p:nvPr/>
+        </p:nvSpPr>
+        <p:spPr>
+          <a:xfrm>
+            <a:off x="6717639" y="2304287"/>
+            <a:ext cx="4980279" cy="274320"/>
+          </a:xfrm>
+          <a:prstGeom prst="rect">
+            <a:avLst/>
+          </a:prstGeom>
+          <a:noFill/>
+        </p:spPr>
+        <p:txBody>
+          <a:bodyPr wrap="square" lIns="0" rIns="0" tIns="0" bIns="0" anchor="t">
+            <a:spAutoFit/>
+          </a:bodyPr>
+          <a:lstStyle/>
+          <a:p>
+            <a:pPr algn="l">
+              <a:lnSpc>
+                <a:spcPct val="100000"/>
+              </a:lnSpc>
+            </a:pPr>
+            <a:r>
+              <a:rPr sz="850" b="0">
+                <a:solidFill>
+                  <a:srgbClr val="51617A"/>
+                </a:solidFill>
+                <a:latin typeface="Helvetica Neue"/>
+              </a:rPr>
+              <a:t>The canonical service name sits beside every GCP logo.</a:t>
+            </a:r>
+          </a:p>
+        </p:txBody>
+      </p:sp>
+      <p:sp>
+        <p:nvSpPr>
+          <p:cNvPr id="48" name="Oval 47"/>
+          <p:cNvSpPr/>
+          <p:nvPr/>
+        </p:nvSpPr>
+        <p:spPr>
+          <a:xfrm>
+            <a:off x="6370167" y="2775203"/>
+            <a:ext cx="219456" cy="219456"/>
+          </a:xfrm>
+          <a:prstGeom prst="ellipse">
+            <a:avLst/>
+          </a:prstGeom>
+          <a:solidFill>
+            <a:srgbClr val="1657B0"/>
+          </a:solidFill>
+          <a:ln>
+            <a:noFill/>
+          </a:ln>
+          <a:effectLst>
+            <a:outerShdw blurRad="82296" dist="25603" dir="5400000" rotWithShape="0">
+              <a:srgbClr val="1B2A40">
+                <a:alpha val="11000"/>
+              </a:srgbClr>
+            </a:outerShdw>
+          </a:effectLst>
+        </p:spPr>
+        <p:style>
+          <a:lnRef idx="1">
+            <a:schemeClr val="accent1"/>
+          </a:lnRef>
+          <a:fillRef idx="3">
+            <a:schemeClr val="accent1"/>
+          </a:fillRef>
+          <a:effectRef idx="2">
+            <a:schemeClr val="accent1"/>
+          </a:effectRef>
+          <a:fontRef idx="minor">
+            <a:schemeClr val="lt1"/>
+          </a:fontRef>
+        </p:style>
+        <p:txBody>
+          <a:bodyPr rtlCol="0" anchor="ctr"/>
+          <a:lstStyle/>
+          <a:p>
+            <a:pPr algn="ctr"/>
+          </a:p>
+        </p:txBody>
+      </p:sp>
+      <p:sp>
+        <p:nvSpPr>
+          <p:cNvPr id="49" name="TextBox 48"/>
+          <p:cNvSpPr txBox="1"/>
+          <p:nvPr/>
+        </p:nvSpPr>
+        <p:spPr>
+          <a:xfrm>
+            <a:off x="6370167" y="2775203"/>
+            <a:ext cx="219456" cy="219456"/>
+          </a:xfrm>
+          <a:prstGeom prst="rect">
+            <a:avLst/>
+          </a:prstGeom>
+          <a:noFill/>
+        </p:spPr>
+        <p:txBody>
+          <a:bodyPr wrap="square" lIns="0" rIns="0" tIns="0" bIns="0" anchor="ctr">
+            <a:spAutoFit/>
+          </a:bodyPr>
+          <a:lstStyle/>
+          <a:p>
+            <a:pPr algn="ctr">
+              <a:lnSpc>
+                <a:spcPct val="100000"/>
+              </a:lnSpc>
+            </a:pPr>
+            <a:r>
+              <a:rPr sz="1100" b="1">
+                <a:solidFill>
+                  <a:srgbClr val="FFFFFF"/>
+                </a:solidFill>
+                <a:latin typeface="Helvetica Neue"/>
+              </a:rPr>
+              <a:t>✓</a:t>
+            </a:r>
+          </a:p>
+        </p:txBody>
+      </p:sp>
+      <p:sp>
+        <p:nvSpPr>
+          <p:cNvPr id="50" name="TextBox 49"/>
+          <p:cNvSpPr txBox="1"/>
+          <p:nvPr/>
+        </p:nvSpPr>
+        <p:spPr>
+          <a:xfrm>
+            <a:off x="6717639" y="2738627"/>
+            <a:ext cx="4980279" cy="237744"/>
+          </a:xfrm>
+          <a:prstGeom prst="rect">
+            <a:avLst/>
+          </a:prstGeom>
+          <a:noFill/>
+        </p:spPr>
+        <p:txBody>
+          <a:bodyPr wrap="square" lIns="0" rIns="0" tIns="0" bIns="0" anchor="t">
+            <a:spAutoFit/>
+          </a:bodyPr>
+          <a:lstStyle/>
+          <a:p>
+            <a:pPr algn="l">
+              <a:lnSpc>
+                <a:spcPct val="100000"/>
+              </a:lnSpc>
+            </a:pPr>
+            <a:r>
+              <a:rPr sz="1150" b="1">
+                <a:solidFill>
+                  <a:srgbClr val="16202E"/>
+                </a:solidFill>
+                <a:latin typeface="Helvetica Neue"/>
+              </a:rPr>
+              <a:t>Nothing broken ever ships</a:t>
+            </a:r>
+          </a:p>
+        </p:txBody>
+      </p:sp>
+      <p:sp>
+        <p:nvSpPr>
+          <p:cNvPr id="51" name="TextBox 50"/>
+          <p:cNvSpPr txBox="1"/>
+          <p:nvPr/>
+        </p:nvSpPr>
+        <p:spPr>
+          <a:xfrm>
+            <a:off x="6717639" y="2976372"/>
+            <a:ext cx="4980279" cy="274320"/>
+          </a:xfrm>
+          <a:prstGeom prst="rect">
+            <a:avLst/>
+          </a:prstGeom>
+          <a:noFill/>
+        </p:spPr>
+        <p:txBody>
+          <a:bodyPr wrap="square" lIns="0" rIns="0" tIns="0" bIns="0" anchor="t">
+            <a:spAutoFit/>
+          </a:bodyPr>
+          <a:lstStyle/>
+          <a:p>
+            <a:pPr algn="l">
+              <a:lnSpc>
+                <a:spcPct val="100000"/>
+              </a:lnSpc>
+            </a:pPr>
+            <a:r>
+              <a:rPr sz="850" b="0">
+                <a:solidFill>
+                  <a:srgbClr val="51617A"/>
+                </a:solidFill>
+                <a:latin typeface="Helvetica Neue"/>
+              </a:rPr>
+              <a:t>A hard verifier blocks dangling edges, missing icons, arrowless connectors.</a:t>
+            </a:r>
+          </a:p>
+        </p:txBody>
+      </p:sp>
+      <p:sp>
+        <p:nvSpPr>
+          <p:cNvPr id="52" name="Oval 51"/>
+          <p:cNvSpPr/>
+          <p:nvPr/>
+        </p:nvSpPr>
+        <p:spPr>
+          <a:xfrm>
+            <a:off x="6370167" y="3447288"/>
+            <a:ext cx="219456" cy="219456"/>
+          </a:xfrm>
+          <a:prstGeom prst="ellipse">
+            <a:avLst/>
+          </a:prstGeom>
+          <a:solidFill>
+            <a:srgbClr val="1657B0"/>
+          </a:solidFill>
+          <a:ln>
+            <a:noFill/>
+          </a:ln>
+          <a:effectLst>
+            <a:outerShdw blurRad="82296" dist="25603" dir="5400000" rotWithShape="0">
+              <a:srgbClr val="1B2A40">
+                <a:alpha val="11000"/>
+              </a:srgbClr>
+            </a:outerShdw>
+          </a:effectLst>
+        </p:spPr>
+        <p:style>
+          <a:lnRef idx="1">
+            <a:schemeClr val="accent1"/>
+          </a:lnRef>
+          <a:fillRef idx="3">
+            <a:schemeClr val="accent1"/>
+          </a:fillRef>
+          <a:effectRef idx="2">
+            <a:schemeClr val="accent1"/>
+          </a:effectRef>
+          <a:fontRef idx="minor">
+            <a:schemeClr val="lt1"/>
+          </a:fontRef>
+        </p:style>
+        <p:txBody>
+          <a:bodyPr rtlCol="0" anchor="ctr"/>
+          <a:lstStyle/>
+          <a:p>
+            <a:pPr algn="ctr"/>
+          </a:p>
+        </p:txBody>
+      </p:sp>
+      <p:sp>
+        <p:nvSpPr>
+          <p:cNvPr id="53" name="TextBox 52"/>
+          <p:cNvSpPr txBox="1"/>
+          <p:nvPr/>
+        </p:nvSpPr>
+        <p:spPr>
+          <a:xfrm>
+            <a:off x="6370167" y="3447288"/>
+            <a:ext cx="219456" cy="219456"/>
+          </a:xfrm>
+          <a:prstGeom prst="rect">
+            <a:avLst/>
+          </a:prstGeom>
+          <a:noFill/>
+        </p:spPr>
+        <p:txBody>
+          <a:bodyPr wrap="square" lIns="0" rIns="0" tIns="0" bIns="0" anchor="ctr">
+            <a:spAutoFit/>
+          </a:bodyPr>
+          <a:lstStyle/>
+          <a:p>
+            <a:pPr algn="ctr">
+              <a:lnSpc>
+                <a:spcPct val="100000"/>
+              </a:lnSpc>
+            </a:pPr>
+            <a:r>
+              <a:rPr sz="1100" b="1">
+                <a:solidFill>
+                  <a:srgbClr val="FFFFFF"/>
+                </a:solidFill>
+                <a:latin typeface="Helvetica Neue"/>
+              </a:rPr>
+              <a:t>✓</a:t>
+            </a:r>
+          </a:p>
+        </p:txBody>
+      </p:sp>
+      <p:sp>
+        <p:nvSpPr>
+          <p:cNvPr id="54" name="TextBox 53"/>
+          <p:cNvSpPr txBox="1"/>
+          <p:nvPr/>
+        </p:nvSpPr>
+        <p:spPr>
+          <a:xfrm>
+            <a:off x="6717639" y="3410712"/>
+            <a:ext cx="4980279" cy="237744"/>
+          </a:xfrm>
+          <a:prstGeom prst="rect">
+            <a:avLst/>
+          </a:prstGeom>
+          <a:noFill/>
+        </p:spPr>
+        <p:txBody>
+          <a:bodyPr wrap="square" lIns="0" rIns="0" tIns="0" bIns="0" anchor="t">
+            <a:spAutoFit/>
+          </a:bodyPr>
+          <a:lstStyle/>
+          <a:p>
+            <a:pPr algn="l">
+              <a:lnSpc>
+                <a:spcPct val="100000"/>
+              </a:lnSpc>
+            </a:pPr>
+            <a:r>
+              <a:rPr sz="1150" b="1">
+                <a:solidFill>
+                  <a:srgbClr val="16202E"/>
+                </a:solidFill>
+                <a:latin typeface="Helvetica Neue"/>
+              </a:rPr>
+              <a:t>Reproducible &amp; versionable</a:t>
+            </a:r>
+          </a:p>
+        </p:txBody>
+      </p:sp>
+      <p:sp>
+        <p:nvSpPr>
+          <p:cNvPr id="55" name="TextBox 54"/>
+          <p:cNvSpPr txBox="1"/>
+          <p:nvPr/>
+        </p:nvSpPr>
+        <p:spPr>
+          <a:xfrm>
+            <a:off x="6717639" y="3648456"/>
+            <a:ext cx="4980279" cy="274320"/>
+          </a:xfrm>
+          <a:prstGeom prst="rect">
+            <a:avLst/>
+          </a:prstGeom>
+          <a:noFill/>
+        </p:spPr>
+        <p:txBody>
+          <a:bodyPr wrap="square" lIns="0" rIns="0" tIns="0" bIns="0" anchor="t">
+            <a:spAutoFit/>
+          </a:bodyPr>
+          <a:lstStyle/>
+          <a:p>
+            <a:pPr algn="l">
+              <a:lnSpc>
+                <a:spcPct val="100000"/>
+              </a:lnSpc>
+            </a:pPr>
+            <a:r>
+              <a:rPr sz="850" b="0">
+                <a:solidFill>
+                  <a:srgbClr val="51617A"/>
+                </a:solidFill>
+                <a:latin typeface="Helvetica Neue"/>
+              </a:rPr>
+              <a:t>Diagram-as-code: re-run from the same prompt; outputs are diffable.</a:t>
+            </a:r>
+          </a:p>
+        </p:txBody>
+      </p:sp>
+      <p:sp>
+        <p:nvSpPr>
+          <p:cNvPr id="56" name="Oval 55"/>
+          <p:cNvSpPr/>
+          <p:nvPr/>
+        </p:nvSpPr>
+        <p:spPr>
+          <a:xfrm>
+            <a:off x="6370167" y="4119371"/>
+            <a:ext cx="219456" cy="219456"/>
+          </a:xfrm>
+          <a:prstGeom prst="ellipse">
+            <a:avLst/>
+          </a:prstGeom>
+          <a:solidFill>
+            <a:srgbClr val="1657B0"/>
+          </a:solidFill>
+          <a:ln>
+            <a:noFill/>
+          </a:ln>
+          <a:effectLst>
+            <a:outerShdw blurRad="82296" dist="25603" dir="5400000" rotWithShape="0">
+              <a:srgbClr val="1B2A40">
+                <a:alpha val="11000"/>
+              </a:srgbClr>
+            </a:outerShdw>
+          </a:effectLst>
+        </p:spPr>
+        <p:style>
+          <a:lnRef idx="1">
+            <a:schemeClr val="accent1"/>
+          </a:lnRef>
+          <a:fillRef idx="3">
+            <a:schemeClr val="accent1"/>
+          </a:fillRef>
+          <a:effectRef idx="2">
+            <a:schemeClr val="accent1"/>
+          </a:effectRef>
+          <a:fontRef idx="minor">
+            <a:schemeClr val="lt1"/>
+          </a:fontRef>
+        </p:style>
+        <p:txBody>
+          <a:bodyPr rtlCol="0" anchor="ctr"/>
+          <a:lstStyle/>
+          <a:p>
+            <a:pPr algn="ctr"/>
+          </a:p>
+        </p:txBody>
+      </p:sp>
+      <p:sp>
+        <p:nvSpPr>
+          <p:cNvPr id="57" name="TextBox 56"/>
+          <p:cNvSpPr txBox="1"/>
+          <p:nvPr/>
+        </p:nvSpPr>
+        <p:spPr>
+          <a:xfrm>
+            <a:off x="6370167" y="4119371"/>
+            <a:ext cx="219456" cy="219456"/>
+          </a:xfrm>
+          <a:prstGeom prst="rect">
+            <a:avLst/>
+          </a:prstGeom>
+          <a:noFill/>
+        </p:spPr>
+        <p:txBody>
+          <a:bodyPr wrap="square" lIns="0" rIns="0" tIns="0" bIns="0" anchor="ctr">
+            <a:spAutoFit/>
+          </a:bodyPr>
+          <a:lstStyle/>
+          <a:p>
+            <a:pPr algn="ctr">
+              <a:lnSpc>
+                <a:spcPct val="100000"/>
+              </a:lnSpc>
+            </a:pPr>
+            <a:r>
+              <a:rPr sz="1100" b="1">
+                <a:solidFill>
+                  <a:srgbClr val="FFFFFF"/>
+                </a:solidFill>
+                <a:latin typeface="Helvetica Neue"/>
+              </a:rPr>
+              <a:t>✓</a:t>
+            </a:r>
+          </a:p>
+        </p:txBody>
+      </p:sp>
+      <p:sp>
+        <p:nvSpPr>
+          <p:cNvPr id="58" name="TextBox 57"/>
+          <p:cNvSpPr txBox="1"/>
+          <p:nvPr/>
+        </p:nvSpPr>
+        <p:spPr>
+          <a:xfrm>
+            <a:off x="6717639" y="4082796"/>
+            <a:ext cx="4980279" cy="237744"/>
+          </a:xfrm>
+          <a:prstGeom prst="rect">
+            <a:avLst/>
+          </a:prstGeom>
+          <a:noFill/>
+        </p:spPr>
+        <p:txBody>
+          <a:bodyPr wrap="square" lIns="0" rIns="0" tIns="0" bIns="0" anchor="t">
+            <a:spAutoFit/>
+          </a:bodyPr>
+          <a:lstStyle/>
+          <a:p>
+            <a:pPr algn="l">
+              <a:lnSpc>
+                <a:spcPct val="100000"/>
+              </a:lnSpc>
+            </a:pPr>
+            <a:r>
+              <a:rPr sz="1150" b="1">
+                <a:solidFill>
+                  <a:srgbClr val="16202E"/>
+                </a:solidFill>
+                <a:latin typeface="Helvetica Neue"/>
+              </a:rPr>
+              <a:t>Update in place, not just create</a:t>
+            </a:r>
+          </a:p>
+        </p:txBody>
+      </p:sp>
+      <p:sp>
+        <p:nvSpPr>
+          <p:cNvPr id="59" name="TextBox 58"/>
+          <p:cNvSpPr txBox="1"/>
+          <p:nvPr/>
+        </p:nvSpPr>
+        <p:spPr>
+          <a:xfrm>
+            <a:off x="6717639" y="4320540"/>
+            <a:ext cx="4980279" cy="274320"/>
+          </a:xfrm>
+          <a:prstGeom prst="rect">
+            <a:avLst/>
+          </a:prstGeom>
+          <a:noFill/>
+        </p:spPr>
+        <p:txBody>
+          <a:bodyPr wrap="square" lIns="0" rIns="0" tIns="0" bIns="0" anchor="t">
+            <a:spAutoFit/>
+          </a:bodyPr>
+          <a:lstStyle/>
+          <a:p>
+            <a:pPr algn="l">
+              <a:lnSpc>
+                <a:spcPct val="100000"/>
+              </a:lnSpc>
+            </a:pPr>
+            <a:r>
+              <a:rPr sz="850" b="0">
+                <a:solidFill>
+                  <a:srgbClr val="51617A"/>
+                </a:solidFill>
+                <a:latin typeface="Helvetica Neue"/>
+              </a:rPr>
+              <a:t>Feed a new Jira to patch an existing diagram (surgical-diff mode).</a:t>
+            </a:r>
+          </a:p>
+        </p:txBody>
+      </p:sp>
+      <p:sp>
+        <p:nvSpPr>
+          <p:cNvPr id="60" name="Oval 59"/>
+          <p:cNvSpPr/>
+          <p:nvPr/>
+        </p:nvSpPr>
+        <p:spPr>
+          <a:xfrm>
+            <a:off x="6370167" y="4791455"/>
+            <a:ext cx="219456" cy="219456"/>
+          </a:xfrm>
+          <a:prstGeom prst="ellipse">
+            <a:avLst/>
+          </a:prstGeom>
+          <a:solidFill>
+            <a:srgbClr val="1657B0"/>
+          </a:solidFill>
+          <a:ln>
+            <a:noFill/>
+          </a:ln>
+          <a:effectLst>
+            <a:outerShdw blurRad="82296" dist="25603" dir="5400000" rotWithShape="0">
+              <a:srgbClr val="1B2A40">
+                <a:alpha val="11000"/>
+              </a:srgbClr>
+            </a:outerShdw>
+          </a:effectLst>
+        </p:spPr>
+        <p:style>
+          <a:lnRef idx="1">
+            <a:schemeClr val="accent1"/>
+          </a:lnRef>
+          <a:fillRef idx="3">
+            <a:schemeClr val="accent1"/>
+          </a:fillRef>
+          <a:effectRef idx="2">
+            <a:schemeClr val="accent1"/>
+          </a:effectRef>
+          <a:fontRef idx="minor">
+            <a:schemeClr val="lt1"/>
+          </a:fontRef>
+        </p:style>
+        <p:txBody>
+          <a:bodyPr rtlCol="0" anchor="ctr"/>
+          <a:lstStyle/>
+          <a:p>
+            <a:pPr algn="ctr"/>
+          </a:p>
+        </p:txBody>
+      </p:sp>
+      <p:sp>
+        <p:nvSpPr>
+          <p:cNvPr id="61" name="TextBox 60"/>
+          <p:cNvSpPr txBox="1"/>
+          <p:nvPr/>
+        </p:nvSpPr>
+        <p:spPr>
+          <a:xfrm>
+            <a:off x="6370167" y="4791455"/>
+            <a:ext cx="219456" cy="219456"/>
+          </a:xfrm>
+          <a:prstGeom prst="rect">
+            <a:avLst/>
+          </a:prstGeom>
+          <a:noFill/>
+        </p:spPr>
+        <p:txBody>
+          <a:bodyPr wrap="square" lIns="0" rIns="0" tIns="0" bIns="0" anchor="ctr">
+            <a:spAutoFit/>
+          </a:bodyPr>
+          <a:lstStyle/>
+          <a:p>
+            <a:pPr algn="ctr">
+              <a:lnSpc>
+                <a:spcPct val="100000"/>
+              </a:lnSpc>
+            </a:pPr>
+            <a:r>
+              <a:rPr sz="1100" b="1">
+                <a:solidFill>
+                  <a:srgbClr val="FFFFFF"/>
+                </a:solidFill>
+                <a:latin typeface="Helvetica Neue"/>
+              </a:rPr>
+              <a:t>✓</a:t>
+            </a:r>
+          </a:p>
+        </p:txBody>
+      </p:sp>
+      <p:sp>
+        <p:nvSpPr>
+          <p:cNvPr id="62" name="TextBox 61"/>
+          <p:cNvSpPr txBox="1"/>
+          <p:nvPr/>
+        </p:nvSpPr>
+        <p:spPr>
+          <a:xfrm>
+            <a:off x="6717639" y="4754880"/>
+            <a:ext cx="4980279" cy="237744"/>
+          </a:xfrm>
+          <a:prstGeom prst="rect">
+            <a:avLst/>
+          </a:prstGeom>
+          <a:noFill/>
+        </p:spPr>
+        <p:txBody>
+          <a:bodyPr wrap="square" lIns="0" rIns="0" tIns="0" bIns="0" anchor="t">
+            <a:spAutoFit/>
+          </a:bodyPr>
+          <a:lstStyle/>
+          <a:p>
+            <a:pPr algn="l">
+              <a:lnSpc>
+                <a:spcPct val="100000"/>
+              </a:lnSpc>
+            </a:pPr>
+            <a:r>
+              <a:rPr sz="1150" b="1">
+                <a:solidFill>
+                  <a:srgbClr val="16202E"/>
+                </a:solidFill>
+                <a:latin typeface="Helvetica Neue"/>
+              </a:rPr>
+              <a:t>Any client, any OS, pluggable</a:t>
+            </a:r>
+          </a:p>
+        </p:txBody>
+      </p:sp>
+      <p:sp>
+        <p:nvSpPr>
+          <p:cNvPr id="63" name="TextBox 62"/>
+          <p:cNvSpPr txBox="1"/>
+          <p:nvPr/>
+        </p:nvSpPr>
+        <p:spPr>
+          <a:xfrm>
+            <a:off x="6717639" y="4992624"/>
+            <a:ext cx="4980279" cy="274320"/>
+          </a:xfrm>
+          <a:prstGeom prst="rect">
+            <a:avLst/>
+          </a:prstGeom>
+          <a:noFill/>
+        </p:spPr>
+        <p:txBody>
+          <a:bodyPr wrap="square" lIns="0" rIns="0" tIns="0" bIns="0" anchor="t">
+            <a:spAutoFit/>
+          </a:bodyPr>
+          <a:lstStyle/>
+          <a:p>
+            <a:pPr algn="l">
+              <a:lnSpc>
+                <a:spcPct val="100000"/>
+              </a:lnSpc>
+            </a:pPr>
+            <a:r>
+              <a:rPr sz="850" b="0">
+                <a:solidFill>
+                  <a:srgbClr val="51617A"/>
+                </a:solidFill>
+                <a:latin typeface="Helvetica Neue"/>
+              </a:rPr>
+              <a:t>Copilot / Claude / Cursor · Mac / Linux / Win · add AWS / Azure icon packs.</a:t>
+            </a:r>
+          </a:p>
+        </p:txBody>
+      </p:sp>
+      <p:sp>
+        <p:nvSpPr>
+          <p:cNvPr id="64" name="Oval 63"/>
+          <p:cNvSpPr/>
+          <p:nvPr/>
+        </p:nvSpPr>
+        <p:spPr>
+          <a:xfrm>
+            <a:off x="6370167" y="5463540"/>
+            <a:ext cx="219456" cy="219456"/>
+          </a:xfrm>
+          <a:prstGeom prst="ellipse">
+            <a:avLst/>
+          </a:prstGeom>
+          <a:solidFill>
+            <a:srgbClr val="1657B0"/>
+          </a:solidFill>
+          <a:ln>
+            <a:noFill/>
+          </a:ln>
+          <a:effectLst>
+            <a:outerShdw blurRad="82296" dist="25603" dir="5400000" rotWithShape="0">
+              <a:srgbClr val="1B2A40">
+                <a:alpha val="11000"/>
+              </a:srgbClr>
+            </a:outerShdw>
+          </a:effectLst>
+        </p:spPr>
+        <p:style>
+          <a:lnRef idx="1">
+            <a:schemeClr val="accent1"/>
+          </a:lnRef>
+          <a:fillRef idx="3">
+            <a:schemeClr val="accent1"/>
+          </a:fillRef>
+          <a:effectRef idx="2">
+            <a:schemeClr val="accent1"/>
+          </a:effectRef>
+          <a:fontRef idx="minor">
+            <a:schemeClr val="lt1"/>
+          </a:fontRef>
+        </p:style>
+        <p:txBody>
+          <a:bodyPr rtlCol="0" anchor="ctr"/>
+          <a:lstStyle/>
+          <a:p>
+            <a:pPr algn="ctr"/>
+          </a:p>
+        </p:txBody>
+      </p:sp>
+      <p:sp>
+        <p:nvSpPr>
+          <p:cNvPr id="65" name="TextBox 64"/>
+          <p:cNvSpPr txBox="1"/>
+          <p:nvPr/>
+        </p:nvSpPr>
+        <p:spPr>
+          <a:xfrm>
+            <a:off x="6370167" y="5463540"/>
+            <a:ext cx="219456" cy="219456"/>
+          </a:xfrm>
+          <a:prstGeom prst="rect">
+            <a:avLst/>
+          </a:prstGeom>
+          <a:noFill/>
+        </p:spPr>
+        <p:txBody>
+          <a:bodyPr wrap="square" lIns="0" rIns="0" tIns="0" bIns="0" anchor="ctr">
+            <a:spAutoFit/>
+          </a:bodyPr>
+          <a:lstStyle/>
+          <a:p>
+            <a:pPr algn="ctr">
+              <a:lnSpc>
+                <a:spcPct val="100000"/>
+              </a:lnSpc>
+            </a:pPr>
+            <a:r>
+              <a:rPr sz="1100" b="1">
+                <a:solidFill>
+                  <a:srgbClr val="FFFFFF"/>
+                </a:solidFill>
+                <a:latin typeface="Helvetica Neue"/>
+              </a:rPr>
+              <a:t>✓</a:t>
+            </a:r>
+          </a:p>
+        </p:txBody>
+      </p:sp>
+      <p:sp>
+        <p:nvSpPr>
+          <p:cNvPr id="66" name="TextBox 65"/>
+          <p:cNvSpPr txBox="1"/>
+          <p:nvPr/>
+        </p:nvSpPr>
+        <p:spPr>
+          <a:xfrm>
+            <a:off x="6717639" y="5426964"/>
+            <a:ext cx="4980279" cy="237744"/>
+          </a:xfrm>
+          <a:prstGeom prst="rect">
+            <a:avLst/>
+          </a:prstGeom>
+          <a:noFill/>
+        </p:spPr>
+        <p:txBody>
+          <a:bodyPr wrap="square" lIns="0" rIns="0" tIns="0" bIns="0" anchor="t">
+            <a:spAutoFit/>
+          </a:bodyPr>
+          <a:lstStyle/>
+          <a:p>
+            <a:pPr algn="l">
+              <a:lnSpc>
+                <a:spcPct val="100000"/>
+              </a:lnSpc>
+            </a:pPr>
+            <a:r>
+              <a:rPr sz="1150" b="1">
+                <a:solidFill>
+                  <a:srgbClr val="16202E"/>
+                </a:solidFill>
+                <a:latin typeface="Helvetica Neue"/>
+              </a:rPr>
+              <a:t>Hours become minutes</a:t>
+            </a:r>
+          </a:p>
+        </p:txBody>
+      </p:sp>
+      <p:sp>
+        <p:nvSpPr>
+          <p:cNvPr id="67" name="TextBox 66"/>
+          <p:cNvSpPr txBox="1"/>
+          <p:nvPr/>
+        </p:nvSpPr>
+        <p:spPr>
+          <a:xfrm>
+            <a:off x="6717639" y="5664708"/>
+            <a:ext cx="4980279" cy="274320"/>
+          </a:xfrm>
+          <a:prstGeom prst="rect">
+            <a:avLst/>
+          </a:prstGeom>
+          <a:noFill/>
+        </p:spPr>
+        <p:txBody>
+          <a:bodyPr wrap="square" lIns="0" rIns="0" tIns="0" bIns="0" anchor="t">
+            <a:spAutoFit/>
+          </a:bodyPr>
+          <a:lstStyle/>
+          <a:p>
+            <a:pPr algn="l">
+              <a:lnSpc>
+                <a:spcPct val="100000"/>
+              </a:lnSpc>
+            </a:pPr>
+            <a:r>
+              <a:rPr sz="850" b="0">
+                <a:solidFill>
+                  <a:srgbClr val="51617A"/>
+                </a:solidFill>
+                <a:latin typeface="Helvetica Neue"/>
+              </a:rPr>
+              <a:t>Architects decide, the machine draws; new joiners onboard instantly.</a:t>
+            </a:r>
+          </a:p>
+        </p:txBody>
+      </p:sp>
+      <p:sp>
+        <p:nvSpPr>
+          <p:cNvPr id="68" name="Rectangle 67"/>
+          <p:cNvSpPr/>
+          <p:nvPr/>
+        </p:nvSpPr>
+        <p:spPr>
+          <a:xfrm>
+            <a:off x="457200" y="6364224"/>
+            <a:ext cx="11277295" cy="10058"/>
+          </a:xfrm>
+          <a:prstGeom prst="rect">
+            <a:avLst/>
+          </a:prstGeom>
+          <a:solidFill>
+            <a:srgbClr val="D2DBE7"/>
+          </a:solidFill>
+          <a:ln>
+            <a:noFill/>
+          </a:ln>
+          <a:effectLst/>
+        </p:spPr>
+        <p:style>
+          <a:lnRef idx="1">
+            <a:schemeClr val="accent1"/>
+          </a:lnRef>
+          <a:fillRef idx="3">
+            <a:schemeClr val="accent1"/>
+          </a:fillRef>
+          <a:effectRef idx="2">
+            <a:schemeClr val="accent1"/>
+          </a:effectRef>
+          <a:fontRef idx="minor">
+            <a:schemeClr val="lt1"/>
+          </a:fontRef>
+        </p:style>
+        <p:txBody>
+          <a:bodyPr rtlCol="0" anchor="ctr"/>
+          <a:lstStyle/>
+          <a:p>
+            <a:pPr algn="ctr"/>
+          </a:p>
+        </p:txBody>
+      </p:sp>
+      <p:sp>
+        <p:nvSpPr>
+          <p:cNvPr id="69" name="TextBox 68"/>
+          <p:cNvSpPr txBox="1"/>
+          <p:nvPr/>
+        </p:nvSpPr>
+        <p:spPr>
+          <a:xfrm>
+            <a:off x="457200" y="6437376"/>
+            <a:ext cx="6858000" cy="256032"/>
+          </a:xfrm>
+          <a:prstGeom prst="rect">
+            <a:avLst/>
+          </a:prstGeom>
+          <a:noFill/>
+        </p:spPr>
+        <p:txBody>
+          <a:bodyPr wrap="square" lIns="0" rIns="0" tIns="0" bIns="0" anchor="ctr">
+            <a:spAutoFit/>
+          </a:bodyPr>
+          <a:lstStyle/>
+          <a:p>
+            <a:pPr algn="l">
+              <a:lnSpc>
+                <a:spcPct val="100000"/>
+              </a:lnSpc>
+            </a:pPr>
+            <a:r>
+              <a:rPr sz="900" b="1">
+                <a:solidFill>
+                  <a:srgbClr val="16202E"/>
+                </a:solidFill>
+                <a:latin typeface="Helvetica Neue"/>
+              </a:rPr>
+              <a:t>Debajyoti Mukhopadhyay</a:t>
+            </a:r>
+            <a:r>
+              <a:rPr sz="900" b="0">
+                <a:solidFill>
+                  <a:srgbClr val="93A0B2"/>
+                </a:solidFill>
+                <a:latin typeface="Helvetica Neue"/>
+              </a:rPr>
+              <a:t>   ·   Architecture &amp; Tooling</a:t>
+            </a:r>
+          </a:p>
+        </p:txBody>
+      </p:sp>
+      <p:sp>
+        <p:nvSpPr>
+          <p:cNvPr id="70" name="TextBox 69"/>
+          <p:cNvSpPr txBox="1"/>
+          <p:nvPr/>
+        </p:nvSpPr>
+        <p:spPr>
+          <a:xfrm>
+            <a:off x="6613855" y="6437376"/>
+            <a:ext cx="5120640" cy="256032"/>
+          </a:xfrm>
+          <a:prstGeom prst="rect">
+            <a:avLst/>
+          </a:prstGeom>
+          <a:noFill/>
+        </p:spPr>
+        <p:txBody>
+          <a:bodyPr wrap="square" lIns="0" rIns="0" tIns="0" bIns="0" anchor="ctr">
+            <a:spAutoFit/>
+          </a:bodyPr>
+          <a:lstStyle/>
+          <a:p>
+            <a:pPr algn="r">
+              <a:lnSpc>
+                <a:spcPct val="100000"/>
+              </a:lnSpc>
+            </a:pPr>
+            <a:r>
+              <a:rPr sz="760" b="0">
+                <a:solidFill>
+                  <a:srgbClr val="51617A"/>
+                </a:solidFill>
+                <a:latin typeface="Menlo"/>
+              </a:rPr>
+              <a:t>one prompt  ·  governed  ·  documented  ·  verified  ·  reproducible</a:t>
             </a:r>
           </a:p>
         </p:txBody>
